--- a/cours/Module TIC/Département Français/Master 1 - Langue et Culture/Cours_TIC_04_Microsoft_Word_FR.pptx
+++ b/cours/Module TIC/Département Français/Master 1 - Langue et Culture/Cours_TIC_04_Microsoft_Word_FR.pptx
@@ -4,9 +4,6 @@
   <p:sldMasterIdLst>
     <p:sldMasterId id="2147483648" r:id="rId1"/>
   </p:sldMasterIdLst>
-  <p:notesMasterIdLst>
-    <p:notesMasterId r:id="rId33"/>
-  </p:notesMasterIdLst>
   <p:sldIdLst>
     <p:sldId id="256" r:id="rId7"/>
     <p:sldId id="257" r:id="rId8"/>
@@ -18,6 +15,11 @@
     <p:sldId id="263" r:id="rId14"/>
     <p:sldId id="264" r:id="rId15"/>
     <p:sldId id="265" r:id="rId16"/>
+    <p:sldId id="266" r:id="rId17"/>
+    <p:sldId id="267" r:id="rId18"/>
+    <p:sldId id="268" r:id="rId19"/>
+    <p:sldId id="269" r:id="rId20"/>
+    <p:sldId id="270" r:id="rId21"/>
   </p:sldIdLst>
   <p:sldSz cx="9144000" cy="6858000" type="screen4x3"/>
   <p:notesSz cx="6858000" cy="9144000"/>
@@ -116,372 +118,7 @@
       </a:defRPr>
     </a:lvl9pPr>
   </p:defaultTextStyle>
-  <p:extLst>
-    <p:ext uri="{EFAFB233-063F-42B5-8137-9DF3F51BA10A}">
-      <p15:sldGuideLst xmlns:p15="http://schemas.microsoft.com/office/powerpoint/2012/main">
-        <p15:guide id="1" orient="horz" pos="2160">
-          <p15:clr>
-            <a:srgbClr val="A4A3A4"/>
-          </p15:clr>
-        </p15:guide>
-        <p15:guide id="2" pos="2880">
-          <p15:clr>
-            <a:srgbClr val="A4A3A4"/>
-          </p15:clr>
-        </p15:guide>
-      </p15:sldGuideLst>
-    </p:ext>
-  </p:extLst>
 </p:presentation>
-</file>
-
-<file path=ppt/notesMasters/notesMaster1.xml><?xml version="1.0" encoding="utf-8"?>
-<p:notesMaster xmlns:a="http://schemas.openxmlformats.org/drawingml/2006/main" xmlns:r="http://schemas.openxmlformats.org/officeDocument/2006/relationships" xmlns:p="http://schemas.openxmlformats.org/presentationml/2006/main">
-  <p:cSld>
-    <p:bg>
-      <p:bgRef idx="1001">
-        <a:schemeClr val="bg1"/>
-      </p:bgRef>
-    </p:bg>
-    <p:spTree>
-      <p:nvGrpSpPr>
-        <p:cNvPr id="1" name=""/>
-        <p:cNvGrpSpPr/>
-        <p:nvPr/>
-      </p:nvGrpSpPr>
-      <p:grpSpPr>
-        <a:xfrm>
-          <a:off x="0" y="0"/>
-          <a:ext cx="0" cy="0"/>
-          <a:chOff x="0" y="0"/>
-          <a:chExt cx="0" cy="0"/>
-        </a:xfrm>
-      </p:grpSpPr>
-      <p:sp>
-        <p:nvSpPr>
-          <p:cNvPr id="2" name="Espace réservé de l'en-tête 1"/>
-          <p:cNvSpPr>
-            <a:spLocks noGrp="1"/>
-          </p:cNvSpPr>
-          <p:nvPr>
-            <p:ph type="hdr" sz="quarter"/>
-          </p:nvPr>
-        </p:nvSpPr>
-        <p:spPr>
-          <a:xfrm>
-            <a:off x="0" y="0"/>
-            <a:ext cx="2971800" cy="458788"/>
-          </a:xfrm>
-          <a:prstGeom prst="rect">
-            <a:avLst/>
-          </a:prstGeom>
-        </p:spPr>
-        <p:txBody>
-          <a:bodyPr vert="horz" lIns="91440" tIns="45720" rIns="91440" bIns="45720" rtlCol="0"/>
-          <a:lstStyle>
-            <a:lvl1pPr algn="l">
-              <a:defRPr sz="1200"/>
-            </a:lvl1pPr>
-          </a:lstStyle>
-          <a:p>
-            <a:endParaRPr lang="fr-FR"/>
-          </a:p>
-        </p:txBody>
-      </p:sp>
-      <p:sp>
-        <p:nvSpPr>
-          <p:cNvPr id="3" name="Espace réservé de la date 2"/>
-          <p:cNvSpPr>
-            <a:spLocks noGrp="1"/>
-          </p:cNvSpPr>
-          <p:nvPr>
-            <p:ph type="dt" idx="1"/>
-          </p:nvPr>
-        </p:nvSpPr>
-        <p:spPr>
-          <a:xfrm>
-            <a:off x="3884613" y="0"/>
-            <a:ext cx="2971800" cy="458788"/>
-          </a:xfrm>
-          <a:prstGeom prst="rect">
-            <a:avLst/>
-          </a:prstGeom>
-        </p:spPr>
-        <p:txBody>
-          <a:bodyPr vert="horz" lIns="91440" tIns="45720" rIns="91440" bIns="45720" rtlCol="0"/>
-          <a:lstStyle>
-            <a:lvl1pPr algn="r">
-              <a:defRPr sz="1200"/>
-            </a:lvl1pPr>
-          </a:lstStyle>
-          <a:p>
-            <a:fld id="{B8F0B2C1-4194-45A7-9834-731A4F36BABD}" type="datetimeFigureOut">
-              <a:rPr lang="fr-FR" smtClean="0"/>
-              <a:t>16/05/2026</a:t>
-            </a:fld>
-            <a:endParaRPr lang="fr-FR"/>
-          </a:p>
-        </p:txBody>
-      </p:sp>
-      <p:sp>
-        <p:nvSpPr>
-          <p:cNvPr id="4" name="Espace réservé de l'image des diapositives 3"/>
-          <p:cNvSpPr>
-            <a:spLocks noGrp="1" noRot="1" noChangeAspect="1"/>
-          </p:cNvSpPr>
-          <p:nvPr>
-            <p:ph type="sldImg" idx="2"/>
-          </p:nvPr>
-        </p:nvSpPr>
-        <p:spPr>
-          <a:xfrm>
-            <a:off x="1371600" y="1143000"/>
-            <a:ext cx="4114800" cy="3086100"/>
-          </a:xfrm>
-          <a:prstGeom prst="rect">
-            <a:avLst/>
-          </a:prstGeom>
-          <a:noFill/>
-          <a:ln w="12700">
-            <a:solidFill>
-              <a:prstClr val="black"/>
-            </a:solidFill>
-          </a:ln>
-        </p:spPr>
-        <p:txBody>
-          <a:bodyPr vert="horz" lIns="91440" tIns="45720" rIns="91440" bIns="45720" rtlCol="0" anchor="ctr"/>
-          <a:lstStyle/>
-          <a:p>
-            <a:endParaRPr lang="fr-FR"/>
-          </a:p>
-        </p:txBody>
-      </p:sp>
-      <p:sp>
-        <p:nvSpPr>
-          <p:cNvPr id="5" name="Espace réservé des notes 4"/>
-          <p:cNvSpPr>
-            <a:spLocks noGrp="1"/>
-          </p:cNvSpPr>
-          <p:nvPr>
-            <p:ph type="body" sz="quarter" idx="3"/>
-          </p:nvPr>
-        </p:nvSpPr>
-        <p:spPr>
-          <a:xfrm>
-            <a:off x="685800" y="4400550"/>
-            <a:ext cx="5486400" cy="3600450"/>
-          </a:xfrm>
-          <a:prstGeom prst="rect">
-            <a:avLst/>
-          </a:prstGeom>
-        </p:spPr>
-        <p:txBody>
-          <a:bodyPr vert="horz" lIns="91440" tIns="45720" rIns="91440" bIns="45720" rtlCol="0"/>
-          <a:lstStyle/>
-          <a:p>
-            <a:pPr lvl="0"/>
-            <a:r>
-              <a:rPr lang="fr-FR"/>
-              <a:t>Cliquez pour modifier les styles du texte du masque</a:t>
-            </a:r>
-          </a:p>
-          <a:p>
-            <a:pPr lvl="1"/>
-            <a:r>
-              <a:rPr lang="fr-FR"/>
-              <a:t>Deuxième niveau</a:t>
-            </a:r>
-          </a:p>
-          <a:p>
-            <a:pPr lvl="2"/>
-            <a:r>
-              <a:rPr lang="fr-FR"/>
-              <a:t>Troisième niveau</a:t>
-            </a:r>
-          </a:p>
-          <a:p>
-            <a:pPr lvl="3"/>
-            <a:r>
-              <a:rPr lang="fr-FR"/>
-              <a:t>Quatrième niveau</a:t>
-            </a:r>
-          </a:p>
-          <a:p>
-            <a:pPr lvl="4"/>
-            <a:r>
-              <a:rPr lang="fr-FR"/>
-              <a:t>Cinquième niveau</a:t>
-            </a:r>
-          </a:p>
-        </p:txBody>
-      </p:sp>
-      <p:sp>
-        <p:nvSpPr>
-          <p:cNvPr id="6" name="Espace réservé du pied de page 5"/>
-          <p:cNvSpPr>
-            <a:spLocks noGrp="1"/>
-          </p:cNvSpPr>
-          <p:nvPr>
-            <p:ph type="ftr" sz="quarter" idx="4"/>
-          </p:nvPr>
-        </p:nvSpPr>
-        <p:spPr>
-          <a:xfrm>
-            <a:off x="0" y="8685213"/>
-            <a:ext cx="2971800" cy="458787"/>
-          </a:xfrm>
-          <a:prstGeom prst="rect">
-            <a:avLst/>
-          </a:prstGeom>
-        </p:spPr>
-        <p:txBody>
-          <a:bodyPr vert="horz" lIns="91440" tIns="45720" rIns="91440" bIns="45720" rtlCol="0" anchor="b"/>
-          <a:lstStyle>
-            <a:lvl1pPr algn="l">
-              <a:defRPr sz="1200"/>
-            </a:lvl1pPr>
-          </a:lstStyle>
-          <a:p>
-            <a:endParaRPr lang="fr-FR"/>
-          </a:p>
-        </p:txBody>
-      </p:sp>
-      <p:sp>
-        <p:nvSpPr>
-          <p:cNvPr id="7" name="Espace réservé du numéro de diapositive 6"/>
-          <p:cNvSpPr>
-            <a:spLocks noGrp="1"/>
-          </p:cNvSpPr>
-          <p:nvPr>
-            <p:ph type="sldNum" sz="quarter" idx="5"/>
-          </p:nvPr>
-        </p:nvSpPr>
-        <p:spPr>
-          <a:xfrm>
-            <a:off x="3884613" y="8685213"/>
-            <a:ext cx="2971800" cy="458787"/>
-          </a:xfrm>
-          <a:prstGeom prst="rect">
-            <a:avLst/>
-          </a:prstGeom>
-        </p:spPr>
-        <p:txBody>
-          <a:bodyPr vert="horz" lIns="91440" tIns="45720" rIns="91440" bIns="45720" rtlCol="0" anchor="b"/>
-          <a:lstStyle>
-            <a:lvl1pPr algn="r">
-              <a:defRPr sz="1200"/>
-            </a:lvl1pPr>
-          </a:lstStyle>
-          <a:p>
-            <a:fld id="{EDB5666F-E79B-4A29-9A64-FA4855FAABBD}" type="slidenum">
-              <a:rPr lang="fr-FR" smtClean="0"/>
-              <a:t>‹N°›</a:t>
-            </a:fld>
-            <a:endParaRPr lang="fr-FR"/>
-          </a:p>
-        </p:txBody>
-      </p:sp>
-    </p:spTree>
-    <p:extLst>
-      <p:ext uri="{BB962C8B-B14F-4D97-AF65-F5344CB8AC3E}">
-        <p14:creationId xmlns:p14="http://schemas.microsoft.com/office/powerpoint/2010/main" val="4057233482"/>
-      </p:ext>
-    </p:extLst>
-  </p:cSld>
-  <p:clrMap bg1="lt1" tx1="dk1" bg2="lt2" tx2="dk2" accent1="accent1" accent2="accent2" accent3="accent3" accent4="accent4" accent5="accent5" accent6="accent6" hlink="hlink" folHlink="folHlink"/>
-  <p:notesStyle>
-    <a:lvl1pPr marL="0" algn="l" defTabSz="914400" rtl="0" eaLnBrk="1" latinLnBrk="0" hangingPunct="1">
-      <a:defRPr sz="1200" kern="1200">
-        <a:solidFill>
-          <a:schemeClr val="tx1"/>
-        </a:solidFill>
-        <a:latin typeface="+mn-lt"/>
-        <a:ea typeface="+mn-ea"/>
-        <a:cs typeface="+mn-cs"/>
-      </a:defRPr>
-    </a:lvl1pPr>
-    <a:lvl2pPr marL="457200" algn="l" defTabSz="914400" rtl="0" eaLnBrk="1" latinLnBrk="0" hangingPunct="1">
-      <a:defRPr sz="1200" kern="1200">
-        <a:solidFill>
-          <a:schemeClr val="tx1"/>
-        </a:solidFill>
-        <a:latin typeface="+mn-lt"/>
-        <a:ea typeface="+mn-ea"/>
-        <a:cs typeface="+mn-cs"/>
-      </a:defRPr>
-    </a:lvl2pPr>
-    <a:lvl3pPr marL="914400" algn="l" defTabSz="914400" rtl="0" eaLnBrk="1" latinLnBrk="0" hangingPunct="1">
-      <a:defRPr sz="1200" kern="1200">
-        <a:solidFill>
-          <a:schemeClr val="tx1"/>
-        </a:solidFill>
-        <a:latin typeface="+mn-lt"/>
-        <a:ea typeface="+mn-ea"/>
-        <a:cs typeface="+mn-cs"/>
-      </a:defRPr>
-    </a:lvl3pPr>
-    <a:lvl4pPr marL="1371600" algn="l" defTabSz="914400" rtl="0" eaLnBrk="1" latinLnBrk="0" hangingPunct="1">
-      <a:defRPr sz="1200" kern="1200">
-        <a:solidFill>
-          <a:schemeClr val="tx1"/>
-        </a:solidFill>
-        <a:latin typeface="+mn-lt"/>
-        <a:ea typeface="+mn-ea"/>
-        <a:cs typeface="+mn-cs"/>
-      </a:defRPr>
-    </a:lvl4pPr>
-    <a:lvl5pPr marL="1828800" algn="l" defTabSz="914400" rtl="0" eaLnBrk="1" latinLnBrk="0" hangingPunct="1">
-      <a:defRPr sz="1200" kern="1200">
-        <a:solidFill>
-          <a:schemeClr val="tx1"/>
-        </a:solidFill>
-        <a:latin typeface="+mn-lt"/>
-        <a:ea typeface="+mn-ea"/>
-        <a:cs typeface="+mn-cs"/>
-      </a:defRPr>
-    </a:lvl5pPr>
-    <a:lvl6pPr marL="2286000" algn="l" defTabSz="914400" rtl="0" eaLnBrk="1" latinLnBrk="0" hangingPunct="1">
-      <a:defRPr sz="1200" kern="1200">
-        <a:solidFill>
-          <a:schemeClr val="tx1"/>
-        </a:solidFill>
-        <a:latin typeface="+mn-lt"/>
-        <a:ea typeface="+mn-ea"/>
-        <a:cs typeface="+mn-cs"/>
-      </a:defRPr>
-    </a:lvl6pPr>
-    <a:lvl7pPr marL="2743200" algn="l" defTabSz="914400" rtl="0" eaLnBrk="1" latinLnBrk="0" hangingPunct="1">
-      <a:defRPr sz="1200" kern="1200">
-        <a:solidFill>
-          <a:schemeClr val="tx1"/>
-        </a:solidFill>
-        <a:latin typeface="+mn-lt"/>
-        <a:ea typeface="+mn-ea"/>
-        <a:cs typeface="+mn-cs"/>
-      </a:defRPr>
-    </a:lvl7pPr>
-    <a:lvl8pPr marL="3200400" algn="l" defTabSz="914400" rtl="0" eaLnBrk="1" latinLnBrk="0" hangingPunct="1">
-      <a:defRPr sz="1200" kern="1200">
-        <a:solidFill>
-          <a:schemeClr val="tx1"/>
-        </a:solidFill>
-        <a:latin typeface="+mn-lt"/>
-        <a:ea typeface="+mn-ea"/>
-        <a:cs typeface="+mn-cs"/>
-      </a:defRPr>
-    </a:lvl8pPr>
-    <a:lvl9pPr marL="3657600" algn="l" defTabSz="914400" rtl="0" eaLnBrk="1" latinLnBrk="0" hangingPunct="1">
-      <a:defRPr sz="1200" kern="1200">
-        <a:solidFill>
-          <a:schemeClr val="tx1"/>
-        </a:solidFill>
-        <a:latin typeface="+mn-lt"/>
-        <a:ea typeface="+mn-ea"/>
-        <a:cs typeface="+mn-cs"/>
-      </a:defRPr>
-    </a:lvl9pPr>
-  </p:notesStyle>
-</p:notesMaster>
 </file>
 
 <file path=ppt/slideLayouts/slideLayout1.xml><?xml version="1.0" encoding="utf-8"?>
@@ -522,9 +159,10 @@
           <a:lstStyle/>
           <a:p>
             <a:r>
-              <a:rPr lang="en-US"/>
+              <a:rPr lang="en-US" smtClean="0"/>
               <a:t>Click to edit Master title style</a:t>
             </a:r>
+            <a:endParaRPr lang="en-US"/>
           </a:p>
         </p:txBody>
       </p:sp>
@@ -640,9 +278,10 @@
           </a:lstStyle>
           <a:p>
             <a:r>
-              <a:rPr lang="en-US"/>
+              <a:rPr lang="en-US" smtClean="0"/>
               <a:t>Click to edit Master subtitle style</a:t>
             </a:r>
+            <a:endParaRPr lang="en-US"/>
           </a:p>
         </p:txBody>
       </p:sp>
@@ -663,7 +302,7 @@
           <a:p>
             <a:fld id="{5BCAD085-E8A6-8845-BD4E-CB4CCA059FC4}" type="datetimeFigureOut">
               <a:rPr lang="en-US" smtClean="0"/>
-              <a:t>5/16/2026</a:t>
+              <a:t>1/27/13</a:t>
             </a:fld>
             <a:endParaRPr lang="en-US"/>
           </a:p>
@@ -705,7 +344,7 @@
           <a:p>
             <a:fld id="{C1FF6DA9-008F-8B48-92A6-B652298478BF}" type="slidenum">
               <a:rPr lang="en-US" smtClean="0"/>
-              <a:t>‹N°›</a:t>
+              <a:t>‹#›</a:t>
             </a:fld>
             <a:endParaRPr lang="en-US"/>
           </a:p>
@@ -757,9 +396,10 @@
           <a:lstStyle/>
           <a:p>
             <a:r>
-              <a:rPr lang="en-US"/>
+              <a:rPr lang="en-US" smtClean="0"/>
               <a:t>Click to edit Master title style</a:t>
             </a:r>
+            <a:endParaRPr lang="en-US"/>
           </a:p>
         </p:txBody>
       </p:sp>
@@ -780,37 +420,38 @@
           <a:p>
             <a:pPr lvl="0"/>
             <a:r>
-              <a:rPr lang="en-US"/>
+              <a:rPr lang="en-US" smtClean="0"/>
               <a:t>Click to edit Master text styles</a:t>
             </a:r>
           </a:p>
           <a:p>
             <a:pPr lvl="1"/>
             <a:r>
-              <a:rPr lang="en-US"/>
+              <a:rPr lang="en-US" smtClean="0"/>
               <a:t>Second level</a:t>
             </a:r>
           </a:p>
           <a:p>
             <a:pPr lvl="2"/>
             <a:r>
-              <a:rPr lang="en-US"/>
+              <a:rPr lang="en-US" smtClean="0"/>
               <a:t>Third level</a:t>
             </a:r>
           </a:p>
           <a:p>
             <a:pPr lvl="3"/>
             <a:r>
-              <a:rPr lang="en-US"/>
+              <a:rPr lang="en-US" smtClean="0"/>
               <a:t>Fourth level</a:t>
             </a:r>
           </a:p>
           <a:p>
             <a:pPr lvl="4"/>
             <a:r>
-              <a:rPr lang="en-US"/>
+              <a:rPr lang="en-US" smtClean="0"/>
               <a:t>Fifth level</a:t>
             </a:r>
+            <a:endParaRPr lang="en-US"/>
           </a:p>
         </p:txBody>
       </p:sp>
@@ -831,7 +472,7 @@
           <a:p>
             <a:fld id="{5BCAD085-E8A6-8845-BD4E-CB4CCA059FC4}" type="datetimeFigureOut">
               <a:rPr lang="en-US" smtClean="0"/>
-              <a:t>5/16/2026</a:t>
+              <a:t>1/27/13</a:t>
             </a:fld>
             <a:endParaRPr lang="en-US"/>
           </a:p>
@@ -873,7 +514,7 @@
           <a:p>
             <a:fld id="{C1FF6DA9-008F-8B48-92A6-B652298478BF}" type="slidenum">
               <a:rPr lang="en-US" smtClean="0"/>
-              <a:t>‹N°›</a:t>
+              <a:t>‹#›</a:t>
             </a:fld>
             <a:endParaRPr lang="en-US"/>
           </a:p>
@@ -930,9 +571,10 @@
           <a:lstStyle/>
           <a:p>
             <a:r>
-              <a:rPr lang="en-US"/>
+              <a:rPr lang="en-US" smtClean="0"/>
               <a:t>Click to edit Master title style</a:t>
             </a:r>
+            <a:endParaRPr lang="en-US"/>
           </a:p>
         </p:txBody>
       </p:sp>
@@ -958,37 +600,38 @@
           <a:p>
             <a:pPr lvl="0"/>
             <a:r>
-              <a:rPr lang="en-US"/>
+              <a:rPr lang="en-US" smtClean="0"/>
               <a:t>Click to edit Master text styles</a:t>
             </a:r>
           </a:p>
           <a:p>
             <a:pPr lvl="1"/>
             <a:r>
-              <a:rPr lang="en-US"/>
+              <a:rPr lang="en-US" smtClean="0"/>
               <a:t>Second level</a:t>
             </a:r>
           </a:p>
           <a:p>
             <a:pPr lvl="2"/>
             <a:r>
-              <a:rPr lang="en-US"/>
+              <a:rPr lang="en-US" smtClean="0"/>
               <a:t>Third level</a:t>
             </a:r>
           </a:p>
           <a:p>
             <a:pPr lvl="3"/>
             <a:r>
-              <a:rPr lang="en-US"/>
+              <a:rPr lang="en-US" smtClean="0"/>
               <a:t>Fourth level</a:t>
             </a:r>
           </a:p>
           <a:p>
             <a:pPr lvl="4"/>
             <a:r>
-              <a:rPr lang="en-US"/>
+              <a:rPr lang="en-US" smtClean="0"/>
               <a:t>Fifth level</a:t>
             </a:r>
+            <a:endParaRPr lang="en-US"/>
           </a:p>
         </p:txBody>
       </p:sp>
@@ -1009,7 +652,7 @@
           <a:p>
             <a:fld id="{5BCAD085-E8A6-8845-BD4E-CB4CCA059FC4}" type="datetimeFigureOut">
               <a:rPr lang="en-US" smtClean="0"/>
-              <a:t>5/16/2026</a:t>
+              <a:t>1/27/13</a:t>
             </a:fld>
             <a:endParaRPr lang="en-US"/>
           </a:p>
@@ -1051,7 +694,7 @@
           <a:p>
             <a:fld id="{C1FF6DA9-008F-8B48-92A6-B652298478BF}" type="slidenum">
               <a:rPr lang="en-US" smtClean="0"/>
-              <a:t>‹N°›</a:t>
+              <a:t>‹#›</a:t>
             </a:fld>
             <a:endParaRPr lang="en-US"/>
           </a:p>
@@ -1103,9 +746,10 @@
           <a:lstStyle/>
           <a:p>
             <a:r>
-              <a:rPr lang="en-US"/>
+              <a:rPr lang="en-US" smtClean="0"/>
               <a:t>Click to edit Master title style</a:t>
             </a:r>
+            <a:endParaRPr lang="en-US"/>
           </a:p>
         </p:txBody>
       </p:sp>
@@ -1126,37 +770,38 @@
           <a:p>
             <a:pPr lvl="0"/>
             <a:r>
-              <a:rPr lang="en-US"/>
+              <a:rPr lang="en-US" smtClean="0"/>
               <a:t>Click to edit Master text styles</a:t>
             </a:r>
           </a:p>
           <a:p>
             <a:pPr lvl="1"/>
             <a:r>
-              <a:rPr lang="en-US"/>
+              <a:rPr lang="en-US" smtClean="0"/>
               <a:t>Second level</a:t>
             </a:r>
           </a:p>
           <a:p>
             <a:pPr lvl="2"/>
             <a:r>
-              <a:rPr lang="en-US"/>
+              <a:rPr lang="en-US" smtClean="0"/>
               <a:t>Third level</a:t>
             </a:r>
           </a:p>
           <a:p>
             <a:pPr lvl="3"/>
             <a:r>
-              <a:rPr lang="en-US"/>
+              <a:rPr lang="en-US" smtClean="0"/>
               <a:t>Fourth level</a:t>
             </a:r>
           </a:p>
           <a:p>
             <a:pPr lvl="4"/>
             <a:r>
-              <a:rPr lang="en-US"/>
+              <a:rPr lang="en-US" smtClean="0"/>
               <a:t>Fifth level</a:t>
             </a:r>
+            <a:endParaRPr lang="en-US"/>
           </a:p>
         </p:txBody>
       </p:sp>
@@ -1177,7 +822,7 @@
           <a:p>
             <a:fld id="{5BCAD085-E8A6-8845-BD4E-CB4CCA059FC4}" type="datetimeFigureOut">
               <a:rPr lang="en-US" smtClean="0"/>
-              <a:t>5/16/2026</a:t>
+              <a:t>1/27/13</a:t>
             </a:fld>
             <a:endParaRPr lang="en-US"/>
           </a:p>
@@ -1219,7 +864,7 @@
           <a:p>
             <a:fld id="{C1FF6DA9-008F-8B48-92A6-B652298478BF}" type="slidenum">
               <a:rPr lang="en-US" smtClean="0"/>
-              <a:t>‹N°›</a:t>
+              <a:t>‹#›</a:t>
             </a:fld>
             <a:endParaRPr lang="en-US"/>
           </a:p>
@@ -1280,9 +925,10 @@
           </a:lstStyle>
           <a:p>
             <a:r>
-              <a:rPr lang="en-US"/>
+              <a:rPr lang="en-US" smtClean="0"/>
               <a:t>Click to edit Master title style</a:t>
             </a:r>
+            <a:endParaRPr lang="en-US"/>
           </a:p>
         </p:txBody>
       </p:sp>
@@ -1399,7 +1045,7 @@
           <a:p>
             <a:pPr lvl="0"/>
             <a:r>
-              <a:rPr lang="en-US"/>
+              <a:rPr lang="en-US" smtClean="0"/>
               <a:t>Click to edit Master text styles</a:t>
             </a:r>
           </a:p>
@@ -1422,7 +1068,7 @@
           <a:p>
             <a:fld id="{5BCAD085-E8A6-8845-BD4E-CB4CCA059FC4}" type="datetimeFigureOut">
               <a:rPr lang="en-US" smtClean="0"/>
-              <a:t>5/16/2026</a:t>
+              <a:t>1/27/13</a:t>
             </a:fld>
             <a:endParaRPr lang="en-US"/>
           </a:p>
@@ -1464,7 +1110,7 @@
           <a:p>
             <a:fld id="{C1FF6DA9-008F-8B48-92A6-B652298478BF}" type="slidenum">
               <a:rPr lang="en-US" smtClean="0"/>
-              <a:t>‹N°›</a:t>
+              <a:t>‹#›</a:t>
             </a:fld>
             <a:endParaRPr lang="en-US"/>
           </a:p>
@@ -1516,9 +1162,10 @@
           <a:lstStyle/>
           <a:p>
             <a:r>
-              <a:rPr lang="en-US"/>
+              <a:rPr lang="en-US" smtClean="0"/>
               <a:t>Click to edit Master title style</a:t>
             </a:r>
+            <a:endParaRPr lang="en-US"/>
           </a:p>
         </p:txBody>
       </p:sp>
@@ -1572,37 +1219,38 @@
           <a:p>
             <a:pPr lvl="0"/>
             <a:r>
-              <a:rPr lang="en-US"/>
+              <a:rPr lang="en-US" smtClean="0"/>
               <a:t>Click to edit Master text styles</a:t>
             </a:r>
           </a:p>
           <a:p>
             <a:pPr lvl="1"/>
             <a:r>
-              <a:rPr lang="en-US"/>
+              <a:rPr lang="en-US" smtClean="0"/>
               <a:t>Second level</a:t>
             </a:r>
           </a:p>
           <a:p>
             <a:pPr lvl="2"/>
             <a:r>
-              <a:rPr lang="en-US"/>
+              <a:rPr lang="en-US" smtClean="0"/>
               <a:t>Third level</a:t>
             </a:r>
           </a:p>
           <a:p>
             <a:pPr lvl="3"/>
             <a:r>
-              <a:rPr lang="en-US"/>
+              <a:rPr lang="en-US" smtClean="0"/>
               <a:t>Fourth level</a:t>
             </a:r>
           </a:p>
           <a:p>
             <a:pPr lvl="4"/>
             <a:r>
-              <a:rPr lang="en-US"/>
+              <a:rPr lang="en-US" smtClean="0"/>
               <a:t>Fifth level</a:t>
             </a:r>
+            <a:endParaRPr lang="en-US"/>
           </a:p>
         </p:txBody>
       </p:sp>
@@ -1656,37 +1304,38 @@
           <a:p>
             <a:pPr lvl="0"/>
             <a:r>
-              <a:rPr lang="en-US"/>
+              <a:rPr lang="en-US" smtClean="0"/>
               <a:t>Click to edit Master text styles</a:t>
             </a:r>
           </a:p>
           <a:p>
             <a:pPr lvl="1"/>
             <a:r>
-              <a:rPr lang="en-US"/>
+              <a:rPr lang="en-US" smtClean="0"/>
               <a:t>Second level</a:t>
             </a:r>
           </a:p>
           <a:p>
             <a:pPr lvl="2"/>
             <a:r>
-              <a:rPr lang="en-US"/>
+              <a:rPr lang="en-US" smtClean="0"/>
               <a:t>Third level</a:t>
             </a:r>
           </a:p>
           <a:p>
             <a:pPr lvl="3"/>
             <a:r>
-              <a:rPr lang="en-US"/>
+              <a:rPr lang="en-US" smtClean="0"/>
               <a:t>Fourth level</a:t>
             </a:r>
           </a:p>
           <a:p>
             <a:pPr lvl="4"/>
             <a:r>
-              <a:rPr lang="en-US"/>
+              <a:rPr lang="en-US" smtClean="0"/>
               <a:t>Fifth level</a:t>
             </a:r>
+            <a:endParaRPr lang="en-US"/>
           </a:p>
         </p:txBody>
       </p:sp>
@@ -1707,7 +1356,7 @@
           <a:p>
             <a:fld id="{5BCAD085-E8A6-8845-BD4E-CB4CCA059FC4}" type="datetimeFigureOut">
               <a:rPr lang="en-US" smtClean="0"/>
-              <a:t>5/16/2026</a:t>
+              <a:t>1/27/13</a:t>
             </a:fld>
             <a:endParaRPr lang="en-US"/>
           </a:p>
@@ -1749,7 +1398,7 @@
           <a:p>
             <a:fld id="{C1FF6DA9-008F-8B48-92A6-B652298478BF}" type="slidenum">
               <a:rPr lang="en-US" smtClean="0"/>
-              <a:t>‹N°›</a:t>
+              <a:t>‹#›</a:t>
             </a:fld>
             <a:endParaRPr lang="en-US"/>
           </a:p>
@@ -1805,9 +1454,10 @@
           </a:lstStyle>
           <a:p>
             <a:r>
-              <a:rPr lang="en-US"/>
+              <a:rPr lang="en-US" smtClean="0"/>
               <a:t>Click to edit Master title style</a:t>
             </a:r>
+            <a:endParaRPr lang="en-US"/>
           </a:p>
         </p:txBody>
       </p:sp>
@@ -1870,7 +1520,7 @@
           <a:p>
             <a:pPr lvl="0"/>
             <a:r>
-              <a:rPr lang="en-US"/>
+              <a:rPr lang="en-US" smtClean="0"/>
               <a:t>Click to edit Master text styles</a:t>
             </a:r>
           </a:p>
@@ -1926,37 +1576,38 @@
           <a:p>
             <a:pPr lvl="0"/>
             <a:r>
-              <a:rPr lang="en-US"/>
+              <a:rPr lang="en-US" smtClean="0"/>
               <a:t>Click to edit Master text styles</a:t>
             </a:r>
           </a:p>
           <a:p>
             <a:pPr lvl="1"/>
             <a:r>
-              <a:rPr lang="en-US"/>
+              <a:rPr lang="en-US" smtClean="0"/>
               <a:t>Second level</a:t>
             </a:r>
           </a:p>
           <a:p>
             <a:pPr lvl="2"/>
             <a:r>
-              <a:rPr lang="en-US"/>
+              <a:rPr lang="en-US" smtClean="0"/>
               <a:t>Third level</a:t>
             </a:r>
           </a:p>
           <a:p>
             <a:pPr lvl="3"/>
             <a:r>
-              <a:rPr lang="en-US"/>
+              <a:rPr lang="en-US" smtClean="0"/>
               <a:t>Fourth level</a:t>
             </a:r>
           </a:p>
           <a:p>
             <a:pPr lvl="4"/>
             <a:r>
-              <a:rPr lang="en-US"/>
+              <a:rPr lang="en-US" smtClean="0"/>
               <a:t>Fifth level</a:t>
             </a:r>
+            <a:endParaRPr lang="en-US"/>
           </a:p>
         </p:txBody>
       </p:sp>
@@ -2019,7 +1670,7 @@
           <a:p>
             <a:pPr lvl="0"/>
             <a:r>
-              <a:rPr lang="en-US"/>
+              <a:rPr lang="en-US" smtClean="0"/>
               <a:t>Click to edit Master text styles</a:t>
             </a:r>
           </a:p>
@@ -2075,37 +1726,38 @@
           <a:p>
             <a:pPr lvl="0"/>
             <a:r>
-              <a:rPr lang="en-US"/>
+              <a:rPr lang="en-US" smtClean="0"/>
               <a:t>Click to edit Master text styles</a:t>
             </a:r>
           </a:p>
           <a:p>
             <a:pPr lvl="1"/>
             <a:r>
-              <a:rPr lang="en-US"/>
+              <a:rPr lang="en-US" smtClean="0"/>
               <a:t>Second level</a:t>
             </a:r>
           </a:p>
           <a:p>
             <a:pPr lvl="2"/>
             <a:r>
-              <a:rPr lang="en-US"/>
+              <a:rPr lang="en-US" smtClean="0"/>
               <a:t>Third level</a:t>
             </a:r>
           </a:p>
           <a:p>
             <a:pPr lvl="3"/>
             <a:r>
-              <a:rPr lang="en-US"/>
+              <a:rPr lang="en-US" smtClean="0"/>
               <a:t>Fourth level</a:t>
             </a:r>
           </a:p>
           <a:p>
             <a:pPr lvl="4"/>
             <a:r>
-              <a:rPr lang="en-US"/>
+              <a:rPr lang="en-US" smtClean="0"/>
               <a:t>Fifth level</a:t>
             </a:r>
+            <a:endParaRPr lang="en-US"/>
           </a:p>
         </p:txBody>
       </p:sp>
@@ -2126,7 +1778,7 @@
           <a:p>
             <a:fld id="{5BCAD085-E8A6-8845-BD4E-CB4CCA059FC4}" type="datetimeFigureOut">
               <a:rPr lang="en-US" smtClean="0"/>
-              <a:t>5/16/2026</a:t>
+              <a:t>1/27/13</a:t>
             </a:fld>
             <a:endParaRPr lang="en-US"/>
           </a:p>
@@ -2168,7 +1820,7 @@
           <a:p>
             <a:fld id="{C1FF6DA9-008F-8B48-92A6-B652298478BF}" type="slidenum">
               <a:rPr lang="en-US" smtClean="0"/>
-              <a:t>‹N°›</a:t>
+              <a:t>‹#›</a:t>
             </a:fld>
             <a:endParaRPr lang="en-US"/>
           </a:p>
@@ -2220,9 +1872,10 @@
           <a:lstStyle/>
           <a:p>
             <a:r>
-              <a:rPr lang="en-US"/>
+              <a:rPr lang="en-US" smtClean="0"/>
               <a:t>Click to edit Master title style</a:t>
             </a:r>
+            <a:endParaRPr lang="en-US"/>
           </a:p>
         </p:txBody>
       </p:sp>
@@ -2243,7 +1896,7 @@
           <a:p>
             <a:fld id="{5BCAD085-E8A6-8845-BD4E-CB4CCA059FC4}" type="datetimeFigureOut">
               <a:rPr lang="en-US" smtClean="0"/>
-              <a:t>5/16/2026</a:t>
+              <a:t>1/27/13</a:t>
             </a:fld>
             <a:endParaRPr lang="en-US"/>
           </a:p>
@@ -2285,7 +1938,7 @@
           <a:p>
             <a:fld id="{C1FF6DA9-008F-8B48-92A6-B652298478BF}" type="slidenum">
               <a:rPr lang="en-US" smtClean="0"/>
-              <a:t>‹N°›</a:t>
+              <a:t>‹#›</a:t>
             </a:fld>
             <a:endParaRPr lang="en-US"/>
           </a:p>
@@ -2338,7 +1991,7 @@
           <a:p>
             <a:fld id="{5BCAD085-E8A6-8845-BD4E-CB4CCA059FC4}" type="datetimeFigureOut">
               <a:rPr lang="en-US" smtClean="0"/>
-              <a:t>5/16/2026</a:t>
+              <a:t>1/27/13</a:t>
             </a:fld>
             <a:endParaRPr lang="en-US"/>
           </a:p>
@@ -2380,7 +2033,7 @@
           <a:p>
             <a:fld id="{C1FF6DA9-008F-8B48-92A6-B652298478BF}" type="slidenum">
               <a:rPr lang="en-US" smtClean="0"/>
-              <a:t>‹N°›</a:t>
+              <a:t>‹#›</a:t>
             </a:fld>
             <a:endParaRPr lang="en-US"/>
           </a:p>
@@ -2441,9 +2094,10 @@
           </a:lstStyle>
           <a:p>
             <a:r>
-              <a:rPr lang="en-US"/>
+              <a:rPr lang="en-US" smtClean="0"/>
               <a:t>Click to edit Master title style</a:t>
             </a:r>
+            <a:endParaRPr lang="en-US"/>
           </a:p>
         </p:txBody>
       </p:sp>
@@ -2497,37 +2151,38 @@
           <a:p>
             <a:pPr lvl="0"/>
             <a:r>
-              <a:rPr lang="en-US"/>
+              <a:rPr lang="en-US" smtClean="0"/>
               <a:t>Click to edit Master text styles</a:t>
             </a:r>
           </a:p>
           <a:p>
             <a:pPr lvl="1"/>
             <a:r>
-              <a:rPr lang="en-US"/>
+              <a:rPr lang="en-US" smtClean="0"/>
               <a:t>Second level</a:t>
             </a:r>
           </a:p>
           <a:p>
             <a:pPr lvl="2"/>
             <a:r>
-              <a:rPr lang="en-US"/>
+              <a:rPr lang="en-US" smtClean="0"/>
               <a:t>Third level</a:t>
             </a:r>
           </a:p>
           <a:p>
             <a:pPr lvl="3"/>
             <a:r>
-              <a:rPr lang="en-US"/>
+              <a:rPr lang="en-US" smtClean="0"/>
               <a:t>Fourth level</a:t>
             </a:r>
           </a:p>
           <a:p>
             <a:pPr lvl="4"/>
             <a:r>
-              <a:rPr lang="en-US"/>
+              <a:rPr lang="en-US" smtClean="0"/>
               <a:t>Fifth level</a:t>
             </a:r>
+            <a:endParaRPr lang="en-US"/>
           </a:p>
         </p:txBody>
       </p:sp>
@@ -2590,7 +2245,7 @@
           <a:p>
             <a:pPr lvl="0"/>
             <a:r>
-              <a:rPr lang="en-US"/>
+              <a:rPr lang="en-US" smtClean="0"/>
               <a:t>Click to edit Master text styles</a:t>
             </a:r>
           </a:p>
@@ -2613,7 +2268,7 @@
           <a:p>
             <a:fld id="{5BCAD085-E8A6-8845-BD4E-CB4CCA059FC4}" type="datetimeFigureOut">
               <a:rPr lang="en-US" smtClean="0"/>
-              <a:t>5/16/2026</a:t>
+              <a:t>1/27/13</a:t>
             </a:fld>
             <a:endParaRPr lang="en-US"/>
           </a:p>
@@ -2655,7 +2310,7 @@
           <a:p>
             <a:fld id="{C1FF6DA9-008F-8B48-92A6-B652298478BF}" type="slidenum">
               <a:rPr lang="en-US" smtClean="0"/>
-              <a:t>‹N°›</a:t>
+              <a:t>‹#›</a:t>
             </a:fld>
             <a:endParaRPr lang="en-US"/>
           </a:p>
@@ -2716,9 +2371,10 @@
           </a:lstStyle>
           <a:p>
             <a:r>
-              <a:rPr lang="en-US"/>
+              <a:rPr lang="en-US" smtClean="0"/>
               <a:t>Click to edit Master title style</a:t>
             </a:r>
+            <a:endParaRPr lang="en-US"/>
           </a:p>
         </p:txBody>
       </p:sp>
@@ -2842,7 +2498,7 @@
           <a:p>
             <a:pPr lvl="0"/>
             <a:r>
-              <a:rPr lang="en-US"/>
+              <a:rPr lang="en-US" smtClean="0"/>
               <a:t>Click to edit Master text styles</a:t>
             </a:r>
           </a:p>
@@ -2865,7 +2521,7 @@
           <a:p>
             <a:fld id="{5BCAD085-E8A6-8845-BD4E-CB4CCA059FC4}" type="datetimeFigureOut">
               <a:rPr lang="en-US" smtClean="0"/>
-              <a:t>5/16/2026</a:t>
+              <a:t>1/27/13</a:t>
             </a:fld>
             <a:endParaRPr lang="en-US"/>
           </a:p>
@@ -2907,7 +2563,7 @@
           <a:p>
             <a:fld id="{C1FF6DA9-008F-8B48-92A6-B652298478BF}" type="slidenum">
               <a:rPr lang="en-US" smtClean="0"/>
-              <a:t>‹N°›</a:t>
+              <a:t>‹#›</a:t>
             </a:fld>
             <a:endParaRPr lang="en-US"/>
           </a:p>
@@ -2974,9 +2630,10 @@
           <a:lstStyle/>
           <a:p>
             <a:r>
-              <a:rPr lang="en-US"/>
+              <a:rPr lang="en-US" smtClean="0"/>
               <a:t>Click to edit Master title style</a:t>
             </a:r>
+            <a:endParaRPr lang="en-US"/>
           </a:p>
         </p:txBody>
       </p:sp>
@@ -3007,37 +2664,38 @@
           <a:p>
             <a:pPr lvl="0"/>
             <a:r>
-              <a:rPr lang="en-US"/>
+              <a:rPr lang="en-US" smtClean="0"/>
               <a:t>Click to edit Master text styles</a:t>
             </a:r>
           </a:p>
           <a:p>
             <a:pPr lvl="1"/>
             <a:r>
-              <a:rPr lang="en-US"/>
+              <a:rPr lang="en-US" smtClean="0"/>
               <a:t>Second level</a:t>
             </a:r>
           </a:p>
           <a:p>
             <a:pPr lvl="2"/>
             <a:r>
-              <a:rPr lang="en-US"/>
+              <a:rPr lang="en-US" smtClean="0"/>
               <a:t>Third level</a:t>
             </a:r>
           </a:p>
           <a:p>
             <a:pPr lvl="3"/>
             <a:r>
-              <a:rPr lang="en-US"/>
+              <a:rPr lang="en-US" smtClean="0"/>
               <a:t>Fourth level</a:t>
             </a:r>
           </a:p>
           <a:p>
             <a:pPr lvl="4"/>
             <a:r>
-              <a:rPr lang="en-US"/>
+              <a:rPr lang="en-US" smtClean="0"/>
               <a:t>Fifth level</a:t>
             </a:r>
+            <a:endParaRPr lang="en-US"/>
           </a:p>
         </p:txBody>
       </p:sp>
@@ -3076,7 +2734,7 @@
           <a:p>
             <a:fld id="{5BCAD085-E8A6-8845-BD4E-CB4CCA059FC4}" type="datetimeFigureOut">
               <a:rPr lang="en-US" smtClean="0"/>
-              <a:t>5/16/2026</a:t>
+              <a:t>1/27/13</a:t>
             </a:fld>
             <a:endParaRPr lang="en-US"/>
           </a:p>
@@ -3154,7 +2812,7 @@
           <a:p>
             <a:fld id="{C1FF6DA9-008F-8B48-92A6-B652298478BF}" type="slidenum">
               <a:rPr lang="en-US" smtClean="0"/>
-              <a:t>‹N°›</a:t>
+              <a:t>‹#›</a:t>
             </a:fld>
             <a:endParaRPr lang="en-US"/>
           </a:p>
@@ -3437,6 +3095,14 @@
 <file path=ppt/slides/slide1.xml><?xml version="1.0" encoding="utf-8"?>
 <p:sld xmlns:a="http://schemas.openxmlformats.org/drawingml/2006/main" xmlns:p="http://schemas.openxmlformats.org/presentationml/2006/main" xmlns:r="http://schemas.openxmlformats.org/officeDocument/2006/relationships">
   <p:cSld>
+    <p:bg>
+      <p:bgPr>
+        <a:solidFill>
+          <a:srgbClr val="1A5C33"/>
+        </a:solidFill>
+        <a:effectLst/>
+      </p:bgPr>
+    </p:bg>
     <p:spTree>
       <p:nvGrpSpPr>
         <p:cNvPr id="1" name=""/>
@@ -3446,56 +3112,14 @@
       <p:grpSpPr/>
       <p:sp>
         <p:nvSpPr>
-          <p:cNvPr id="2" name="Title 1"/>
-          <p:cNvSpPr>
-            <a:spLocks noGrp="1"/>
-          </p:cNvSpPr>
-          <p:nvPr>
-            <p:ph type="ctrTitle"/>
-          </p:nvPr>
-        </p:nvSpPr>
-        <p:spPr/>
-        <p:txBody>
-          <a:bodyPr/>
-          <a:lstStyle/>
-          <a:p>
-            <a:r>
-              <a:t>Microsoft Word : Bureautique Académique</a:t>
-            </a:r>
-          </a:p>
-        </p:txBody>
-      </p:sp>
-      <p:sp>
-        <p:nvSpPr>
-          <p:cNvPr id="3" name="Subtitle 2"/>
-          <p:cNvSpPr>
-            <a:spLocks noGrp="1"/>
-          </p:cNvSpPr>
-          <p:nvPr>
-            <p:ph type="subTitle" idx="1"/>
-          </p:nvPr>
-        </p:nvSpPr>
-        <p:spPr/>
-        <p:txBody>
-          <a:bodyPr/>
-          <a:lstStyle/>
-          <a:p>
-            <a:r>
-              <a:t>Cours TIC 04 | 1h30 (90 min) | BELACEL Madani</a:t>
-            </a:r>
-          </a:p>
-        </p:txBody>
-      </p:sp>
-      <p:sp>
-        <p:nvSpPr>
-          <p:cNvPr id="4" name="TextBox 3"/>
+          <p:cNvPr id="2" name="TextBox 1"/>
           <p:cNvSpPr txBox="1"/>
           <p:nvPr/>
         </p:nvSpPr>
         <p:spPr>
           <a:xfrm>
-            <a:off x="365760" y="6446520"/>
-            <a:ext cx="8412480" cy="320040"/>
+            <a:off x="731520" y="1371600"/>
+            <a:ext cx="7680960" cy="1371600"/>
           </a:xfrm>
           <a:prstGeom prst="rect">
             <a:avLst/>
@@ -3503,20 +3127,90 @@
           <a:noFill/>
         </p:spPr>
         <p:txBody>
-          <a:bodyPr wrap="none">
+          <a:bodyPr wrap="square">
             <a:spAutoFit/>
           </a:bodyPr>
           <a:lstStyle/>
           <a:p>
             <a:pPr algn="ctr">
-              <a:defRPr sz="900">
-                <a:solidFill>
-                  <a:srgbClr val="404040"/>
-                </a:solidFill>
-              </a:defRPr>
-            </a:pPr>
-            <a:r>
-              <a:t>Cours TIC 04  •  Diapositive 1/10</a:t>
+              <a:defRPr sz="3200" b="1">
+                <a:solidFill>
+                  <a:srgbClr val="FFFFFF"/>
+                </a:solidFill>
+              </a:defRPr>
+            </a:pPr>
+            <a:r>
+              <a:t>Cours TIC 04 — Microsoft Word : Rédaction du Mémoire et Publication Académique</a:t>
+            </a:r>
+          </a:p>
+        </p:txBody>
+      </p:sp>
+      <p:sp>
+        <p:nvSpPr>
+          <p:cNvPr id="3" name="TextBox 2"/>
+          <p:cNvSpPr txBox="1"/>
+          <p:nvPr/>
+        </p:nvSpPr>
+        <p:spPr>
+          <a:xfrm>
+            <a:off x="731520" y="2926080"/>
+            <a:ext cx="7680960" cy="548640"/>
+          </a:xfrm>
+          <a:prstGeom prst="rect">
+            <a:avLst/>
+          </a:prstGeom>
+          <a:noFill/>
+        </p:spPr>
+        <p:txBody>
+          <a:bodyPr wrap="square">
+            <a:spAutoFit/>
+          </a:bodyPr>
+          <a:lstStyle/>
+          <a:p>
+            <a:pPr algn="ctr">
+              <a:defRPr sz="2000" b="0">
+                <a:solidFill>
+                  <a:srgbClr val="C5D9C7"/>
+                </a:solidFill>
+              </a:defRPr>
+            </a:pPr>
+            <a:r>
+              <a:t>Module TIC — Dr. BELACEL Madani</a:t>
+            </a:r>
+          </a:p>
+        </p:txBody>
+      </p:sp>
+      <p:sp>
+        <p:nvSpPr>
+          <p:cNvPr id="4" name="TextBox 3"/>
+          <p:cNvSpPr txBox="1"/>
+          <p:nvPr/>
+        </p:nvSpPr>
+        <p:spPr>
+          <a:xfrm>
+            <a:off x="731520" y="3657600"/>
+            <a:ext cx="7680960" cy="457200"/>
+          </a:xfrm>
+          <a:prstGeom prst="rect">
+            <a:avLst/>
+          </a:prstGeom>
+          <a:noFill/>
+        </p:spPr>
+        <p:txBody>
+          <a:bodyPr wrap="square">
+            <a:spAutoFit/>
+          </a:bodyPr>
+          <a:lstStyle/>
+          <a:p>
+            <a:pPr algn="ctr">
+              <a:defRPr sz="1600" b="0">
+                <a:solidFill>
+                  <a:srgbClr val="A0CFA0"/>
+                </a:solidFill>
+              </a:defRPr>
+            </a:pPr>
+            <a:r>
+              <a:t>Université de Mostaganem — MCB</a:t>
             </a:r>
           </a:p>
         </p:txBody>
@@ -3526,15 +3220,20 @@
   <p:clrMapOvr>
     <a:masterClrMapping/>
   </p:clrMapOvr>
-  <p:transition spd="med">
-    <p:fade/>
-  </p:transition>
 </p:sld>
 </file>
 
 <file path=ppt/slides/slide10.xml><?xml version="1.0" encoding="utf-8"?>
 <p:sld xmlns:a="http://schemas.openxmlformats.org/drawingml/2006/main" xmlns:p="http://schemas.openxmlformats.org/presentationml/2006/main" xmlns:r="http://schemas.openxmlformats.org/officeDocument/2006/relationships">
   <p:cSld>
+    <p:bg>
+      <p:bgPr>
+        <a:solidFill>
+          <a:srgbClr val="FFFFFF"/>
+        </a:solidFill>
+        <a:effectLst/>
+      </p:bgPr>
+    </p:bg>
     <p:spTree>
       <p:nvGrpSpPr>
         <p:cNvPr id="1" name=""/>
@@ -3544,83 +3243,57 @@
       <p:grpSpPr/>
       <p:sp>
         <p:nvSpPr>
-          <p:cNvPr id="2" name="Title 1"/>
-          <p:cNvSpPr>
-            <a:spLocks noGrp="1"/>
-          </p:cNvSpPr>
-          <p:nvPr>
-            <p:ph type="title"/>
-          </p:nvPr>
-        </p:nvSpPr>
-        <p:spPr/>
-        <p:txBody>
-          <a:bodyPr/>
-          <a:lstStyle/>
-          <a:p>
-            <a:r>
-              <a:t>Conclusion</a:t>
-            </a:r>
-          </a:p>
-        </p:txBody>
-      </p:sp>
-      <p:sp>
-        <p:nvSpPr>
-          <p:cNvPr id="3" name="Content Placeholder 2"/>
-          <p:cNvSpPr>
-            <a:spLocks noGrp="1"/>
-          </p:cNvSpPr>
-          <p:nvPr>
-            <p:ph idx="1"/>
-          </p:nvPr>
-        </p:nvSpPr>
-        <p:spPr/>
-        <p:txBody>
-          <a:bodyPr/>
-          <a:lstStyle/>
-          <a:p>
-            <a:pPr>
-              <a:defRPr sz="2000"/>
-            </a:pPr>
-            <a:r>
-              <a:t>✅ Documents professionnels</a:t>
-            </a:r>
-          </a:p>
-          <a:p>
-            <a:pPr>
-              <a:defRPr sz="2000"/>
-            </a:pPr>
-            <a:r>
-              <a:t>✅ TD 04 — 1h30</a:t>
-            </a:r>
-          </a:p>
-          <a:p>
-            <a:pPr>
-              <a:defRPr sz="2000"/>
-            </a:pPr>
-            <a:r>
-              <a:t>✅ Prochain : Excel</a:t>
-            </a:r>
-          </a:p>
-          <a:p>
-            <a:pPr>
-              <a:defRPr sz="2000"/>
-            </a:pPr>
-            <a:r>
-              <a:t>✅ Questions ?</a:t>
-            </a:r>
-          </a:p>
-        </p:txBody>
-      </p:sp>
-      <p:sp>
-        <p:nvSpPr>
-          <p:cNvPr id="4" name="TextBox 3"/>
+          <p:cNvPr id="2" name="Rectangle 1"/>
+          <p:cNvSpPr/>
+          <p:nvPr/>
+        </p:nvSpPr>
+        <p:spPr>
+          <a:xfrm>
+            <a:off x="0" y="0"/>
+            <a:ext cx="109728" cy="6858000"/>
+          </a:xfrm>
+          <a:prstGeom prst="rect">
+            <a:avLst/>
+          </a:prstGeom>
+          <a:solidFill>
+            <a:srgbClr val="2C6E49"/>
+          </a:solidFill>
+          <a:ln>
+            <a:noFill/>
+          </a:ln>
+        </p:spPr>
+        <p:style>
+          <a:lnRef idx="1">
+            <a:schemeClr val="accent1"/>
+          </a:lnRef>
+          <a:fillRef idx="3">
+            <a:schemeClr val="accent1"/>
+          </a:fillRef>
+          <a:effectRef idx="2">
+            <a:schemeClr val="accent1"/>
+          </a:effectRef>
+          <a:fontRef idx="minor">
+            <a:schemeClr val="lt1"/>
+          </a:fontRef>
+        </p:style>
+        <p:txBody>
+          <a:bodyPr rtlCol="0" anchor="ctr"/>
+          <a:lstStyle/>
+          <a:p>
+            <a:pPr algn="ctr"/>
+          </a:p>
+        </p:txBody>
+      </p:sp>
+      <p:sp>
+        <p:nvSpPr>
+          <p:cNvPr id="3" name="TextBox 2"/>
           <p:cNvSpPr txBox="1"/>
           <p:nvPr/>
         </p:nvSpPr>
         <p:spPr>
           <a:xfrm>
-            <a:off x="365760" y="6446520"/>
-            <a:ext cx="8412480" cy="320040"/>
+            <a:off x="457200" y="365760"/>
+            <a:ext cx="8229600" cy="640080"/>
           </a:xfrm>
           <a:prstGeom prst="rect">
             <a:avLst/>
@@ -3628,20 +3301,178 @@
           <a:noFill/>
         </p:spPr>
         <p:txBody>
-          <a:bodyPr wrap="none">
+          <a:bodyPr wrap="square">
             <a:spAutoFit/>
           </a:bodyPr>
           <a:lstStyle/>
           <a:p>
-            <a:pPr algn="ctr">
-              <a:defRPr sz="900">
-                <a:solidFill>
-                  <a:srgbClr val="404040"/>
-                </a:solidFill>
-              </a:defRPr>
-            </a:pPr>
-            <a:r>
-              <a:t>Cours TIC 04  •  Diapositive 10/10</a:t>
+            <a:pPr algn="l">
+              <a:defRPr sz="2200" b="1">
+                <a:solidFill>
+                  <a:srgbClr val="1A5C33"/>
+                </a:solidFill>
+              </a:defRPr>
+            </a:pPr>
+            <a:r>
+              <a:t>Plan du Cours</a:t>
+            </a:r>
+          </a:p>
+        </p:txBody>
+      </p:sp>
+      <p:sp>
+        <p:nvSpPr>
+          <p:cNvPr id="4" name="TextBox 3"/>
+          <p:cNvSpPr txBox="1"/>
+          <p:nvPr/>
+        </p:nvSpPr>
+        <p:spPr>
+          <a:xfrm>
+            <a:off x="457200" y="1371600"/>
+            <a:ext cx="7772400" cy="4572000"/>
+          </a:xfrm>
+          <a:prstGeom prst="rect">
+            <a:avLst/>
+          </a:prstGeom>
+          <a:noFill/>
+        </p:spPr>
+        <p:txBody>
+          <a:bodyPr wrap="square">
+            <a:spAutoFit/>
+          </a:bodyPr>
+          <a:lstStyle/>
+          <a:p>
+            <a:pPr>
+              <a:spcAft>
+                <a:spcPts val="600"/>
+              </a:spcAft>
+              <a:defRPr sz="1400">
+                <a:solidFill>
+                  <a:srgbClr val="222222"/>
+                </a:solidFill>
+              </a:defRPr>
+            </a:pPr>
+            <a:r>
+              <a:t>• Introduction : Word comme outil de rédaction scientifique</a:t>
+            </a:r>
+          </a:p>
+          <a:p>
+            <a:pPr>
+              <a:spcAft>
+                <a:spcPts val="600"/>
+              </a:spcAft>
+              <a:defRPr sz="1400">
+                <a:solidFill>
+                  <a:srgbClr val="222222"/>
+                </a:solidFill>
+              </a:defRPr>
+            </a:pPr>
+            <a:r>
+              <a:t>• L'interface Word pour les documents longs</a:t>
+            </a:r>
+          </a:p>
+          <a:p>
+            <a:pPr>
+              <a:spcAft>
+                <a:spcPts val="600"/>
+              </a:spcAft>
+              <a:defRPr sz="1400">
+                <a:solidFill>
+                  <a:srgbClr val="222222"/>
+                </a:solidFill>
+              </a:defRPr>
+            </a:pPr>
+            <a:r>
+              <a:t>• Styles avancés et template Master</a:t>
+            </a:r>
+          </a:p>
+          <a:p>
+            <a:pPr>
+              <a:spcAft>
+                <a:spcPts val="600"/>
+              </a:spcAft>
+              <a:defRPr sz="1400">
+                <a:solidFill>
+                  <a:srgbClr val="222222"/>
+                </a:solidFill>
+              </a:defRPr>
+            </a:pPr>
+            <a:r>
+              <a:t>• Gestion des sections et pagination</a:t>
+            </a:r>
+          </a:p>
+          <a:p>
+            <a:pPr>
+              <a:spcAft>
+                <a:spcPts val="600"/>
+              </a:spcAft>
+              <a:defRPr sz="1400">
+                <a:solidFill>
+                  <a:srgbClr val="222222"/>
+                </a:solidFill>
+              </a:defRPr>
+            </a:pPr>
+            <a:r>
+              <a:t>• Tables automatisées (TDM, figures, tableaux)</a:t>
+            </a:r>
+          </a:p>
+          <a:p>
+            <a:pPr>
+              <a:spcAft>
+                <a:spcPts val="600"/>
+              </a:spcAft>
+              <a:defRPr sz="1400">
+                <a:solidFill>
+                  <a:srgbClr val="222222"/>
+                </a:solidFill>
+              </a:defRPr>
+            </a:pPr>
+            <a:r>
+              <a:t>• Citations et bibliographie avec Zotero</a:t>
+            </a:r>
+          </a:p>
+          <a:p>
+            <a:pPr>
+              <a:spcAft>
+                <a:spcPts val="600"/>
+              </a:spcAft>
+              <a:defRPr sz="1400">
+                <a:solidFill>
+                  <a:srgbClr val="222222"/>
+                </a:solidFill>
+              </a:defRPr>
+            </a:pPr>
+            <a:r>
+              <a:t>• Normes typographiques et page de garde institutionnelle</a:t>
+            </a:r>
+          </a:p>
+          <a:p>
+            <a:pPr>
+              <a:spcAft>
+                <a:spcPts val="600"/>
+              </a:spcAft>
+              <a:defRPr sz="1400">
+                <a:solidFill>
+                  <a:srgbClr val="222222"/>
+                </a:solidFill>
+              </a:defRPr>
+            </a:pPr>
+            <a:r>
+              <a:t>• Export PDF/A et dépôt légal</a:t>
+            </a:r>
+          </a:p>
+          <a:p>
+            <a:pPr>
+              <a:spcAft>
+                <a:spcPts val="600"/>
+              </a:spcAft>
+              <a:defRPr sz="1400">
+                <a:solidFill>
+                  <a:srgbClr val="222222"/>
+                </a:solidFill>
+              </a:defRPr>
+            </a:pPr>
+            <a:r>
+              <a:t>• Conclusion et transition vers Excel</a:t>
             </a:r>
           </a:p>
         </p:txBody>
@@ -3651,15 +3482,20 @@
   <p:clrMapOvr>
     <a:masterClrMapping/>
   </p:clrMapOvr>
-  <p:transition spd="med">
-    <p:fade/>
-  </p:transition>
 </p:sld>
 </file>
 
-<file path=ppt/slides/slide2.xml><?xml version="1.0" encoding="utf-8"?>
+<file path=ppt/slides/slide11.xml><?xml version="1.0" encoding="utf-8"?>
 <p:sld xmlns:a="http://schemas.openxmlformats.org/drawingml/2006/main" xmlns:p="http://schemas.openxmlformats.org/presentationml/2006/main" xmlns:r="http://schemas.openxmlformats.org/officeDocument/2006/relationships">
   <p:cSld>
+    <p:bg>
+      <p:bgPr>
+        <a:solidFill>
+          <a:srgbClr val="FFFFFF"/>
+        </a:solidFill>
+        <a:effectLst/>
+      </p:bgPr>
+    </p:bg>
     <p:spTree>
       <p:nvGrpSpPr>
         <p:cNvPr id="1" name=""/>
@@ -3669,83 +3505,57 @@
       <p:grpSpPr/>
       <p:sp>
         <p:nvSpPr>
-          <p:cNvPr id="2" name="Title 1"/>
-          <p:cNvSpPr>
-            <a:spLocks noGrp="1"/>
-          </p:cNvSpPr>
-          <p:nvPr>
-            <p:ph type="title"/>
-          </p:nvPr>
-        </p:nvSpPr>
-        <p:spPr/>
-        <p:txBody>
-          <a:bodyPr/>
-          <a:lstStyle/>
-          <a:p>
-            <a:r>
-              <a:t>Objectifs du cours</a:t>
-            </a:r>
-          </a:p>
-        </p:txBody>
-      </p:sp>
-      <p:sp>
-        <p:nvSpPr>
-          <p:cNvPr id="3" name="Content Placeholder 2"/>
-          <p:cNvSpPr>
-            <a:spLocks noGrp="1"/>
-          </p:cNvSpPr>
-          <p:nvPr>
-            <p:ph idx="1"/>
-          </p:nvPr>
-        </p:nvSpPr>
-        <p:spPr/>
-        <p:txBody>
-          <a:bodyPr/>
-          <a:lstStyle/>
-          <a:p>
-            <a:pPr>
-              <a:defRPr sz="2000"/>
-            </a:pPr>
-            <a:r>
-              <a:t>🎯 Interface Word</a:t>
-            </a:r>
-          </a:p>
-          <a:p>
-            <a:pPr>
-              <a:defRPr sz="2000"/>
-            </a:pPr>
-            <a:r>
-              <a:t>🎯 Mise en page académique</a:t>
-            </a:r>
-          </a:p>
-          <a:p>
-            <a:pPr>
-              <a:defRPr sz="2000"/>
-            </a:pPr>
-            <a:r>
-              <a:t>🎯 Styles et TDM</a:t>
-            </a:r>
-          </a:p>
-          <a:p>
-            <a:pPr>
-              <a:defRPr sz="2000"/>
-            </a:pPr>
-            <a:r>
-              <a:t>🎯 Export PDF</a:t>
-            </a:r>
-          </a:p>
-        </p:txBody>
-      </p:sp>
-      <p:sp>
-        <p:nvSpPr>
-          <p:cNvPr id="4" name="TextBox 3"/>
+          <p:cNvPr id="2" name="Rectangle 1"/>
+          <p:cNvSpPr/>
+          <p:nvPr/>
+        </p:nvSpPr>
+        <p:spPr>
+          <a:xfrm>
+            <a:off x="0" y="0"/>
+            <a:ext cx="109728" cy="6858000"/>
+          </a:xfrm>
+          <a:prstGeom prst="rect">
+            <a:avLst/>
+          </a:prstGeom>
+          <a:solidFill>
+            <a:srgbClr val="2C6E49"/>
+          </a:solidFill>
+          <a:ln>
+            <a:noFill/>
+          </a:ln>
+        </p:spPr>
+        <p:style>
+          <a:lnRef idx="1">
+            <a:schemeClr val="accent1"/>
+          </a:lnRef>
+          <a:fillRef idx="3">
+            <a:schemeClr val="accent1"/>
+          </a:fillRef>
+          <a:effectRef idx="2">
+            <a:schemeClr val="accent1"/>
+          </a:effectRef>
+          <a:fontRef idx="minor">
+            <a:schemeClr val="lt1"/>
+          </a:fontRef>
+        </p:style>
+        <p:txBody>
+          <a:bodyPr rtlCol="0" anchor="ctr"/>
+          <a:lstStyle/>
+          <a:p>
+            <a:pPr algn="ctr"/>
+          </a:p>
+        </p:txBody>
+      </p:sp>
+      <p:sp>
+        <p:nvSpPr>
+          <p:cNvPr id="3" name="TextBox 2"/>
           <p:cNvSpPr txBox="1"/>
           <p:nvPr/>
         </p:nvSpPr>
         <p:spPr>
           <a:xfrm>
-            <a:off x="365760" y="6446520"/>
-            <a:ext cx="8412480" cy="320040"/>
+            <a:off x="457200" y="365760"/>
+            <a:ext cx="8229600" cy="640080"/>
           </a:xfrm>
           <a:prstGeom prst="rect">
             <a:avLst/>
@@ -3753,20 +3563,148 @@
           <a:noFill/>
         </p:spPr>
         <p:txBody>
-          <a:bodyPr wrap="none">
+          <a:bodyPr wrap="square">
             <a:spAutoFit/>
           </a:bodyPr>
           <a:lstStyle/>
           <a:p>
-            <a:pPr algn="ctr">
-              <a:defRPr sz="900">
-                <a:solidFill>
-                  <a:srgbClr val="404040"/>
-                </a:solidFill>
-              </a:defRPr>
-            </a:pPr>
-            <a:r>
-              <a:t>Cours TIC 04  •  Diapositive 2/10</a:t>
+            <a:pPr algn="l">
+              <a:defRPr sz="2200" b="1">
+                <a:solidFill>
+                  <a:srgbClr val="1A5C33"/>
+                </a:solidFill>
+              </a:defRPr>
+            </a:pPr>
+            <a:r>
+              <a:t>1.1 Word en Master : un changement d'échelle</a:t>
+            </a:r>
+          </a:p>
+        </p:txBody>
+      </p:sp>
+      <p:sp>
+        <p:nvSpPr>
+          <p:cNvPr id="4" name="TextBox 3"/>
+          <p:cNvSpPr txBox="1"/>
+          <p:nvPr/>
+        </p:nvSpPr>
+        <p:spPr>
+          <a:xfrm>
+            <a:off x="457200" y="1371600"/>
+            <a:ext cx="7772400" cy="4572000"/>
+          </a:xfrm>
+          <a:prstGeom prst="rect">
+            <a:avLst/>
+          </a:prstGeom>
+          <a:noFill/>
+        </p:spPr>
+        <p:txBody>
+          <a:bodyPr wrap="square">
+            <a:spAutoFit/>
+          </a:bodyPr>
+          <a:lstStyle/>
+          <a:p>
+            <a:pPr>
+              <a:spcAft>
+                <a:spcPts val="600"/>
+              </a:spcAft>
+              <a:defRPr sz="1400">
+                <a:solidFill>
+                  <a:srgbClr val="222222"/>
+                </a:solidFill>
+              </a:defRPr>
+            </a:pPr>
+            <a:r>
+              <a:t>• En Licence, Word servait à rédiger des devoirs de 3 à 5 pages. En Master, vous allez produire unmémoire de 60 à 100 pagesavec :</a:t>
+            </a:r>
+          </a:p>
+          <a:p>
+            <a:pPr>
+              <a:spcAft>
+                <a:spcPts val="600"/>
+              </a:spcAft>
+              <a:defRPr sz="1400">
+                <a:solidFill>
+                  <a:srgbClr val="222222"/>
+                </a:solidFill>
+              </a:defRPr>
+            </a:pPr>
+            <a:r>
+              <a:t>• Structure complexe (6-7 chapitres + annexes)</a:t>
+            </a:r>
+          </a:p>
+          <a:p>
+            <a:pPr>
+              <a:spcAft>
+                <a:spcPts val="600"/>
+              </a:spcAft>
+              <a:defRPr sz="1400">
+                <a:solidFill>
+                  <a:srgbClr val="222222"/>
+                </a:solidFill>
+              </a:defRPr>
+            </a:pPr>
+            <a:r>
+              <a:t>• Pagination multiple (romaine pour préliminaires, arabe pour le corps)</a:t>
+            </a:r>
+          </a:p>
+          <a:p>
+            <a:pPr>
+              <a:spcAft>
+                <a:spcPts val="600"/>
+              </a:spcAft>
+              <a:defRPr sz="1400">
+                <a:solidFill>
+                  <a:srgbClr val="222222"/>
+                </a:solidFill>
+              </a:defRPr>
+            </a:pPr>
+            <a:r>
+              <a:t>• Citations et bibliographie (30-80 références)</a:t>
+            </a:r>
+          </a:p>
+          <a:p>
+            <a:pPr>
+              <a:spcAft>
+                <a:spcPts val="600"/>
+              </a:spcAft>
+              <a:defRPr sz="1400">
+                <a:solidFill>
+                  <a:srgbClr val="222222"/>
+                </a:solidFill>
+              </a:defRPr>
+            </a:pPr>
+            <a:r>
+              <a:t>• Tables des matières, figures, tableaux automatiques</a:t>
+            </a:r>
+          </a:p>
+          <a:p>
+            <a:pPr>
+              <a:spcAft>
+                <a:spcPts val="600"/>
+              </a:spcAft>
+              <a:defRPr sz="1400">
+                <a:solidFill>
+                  <a:srgbClr val="222222"/>
+                </a:solidFill>
+              </a:defRPr>
+            </a:pPr>
+            <a:r>
+              <a:t>• Normes institutionnelles strictes</a:t>
+            </a:r>
+          </a:p>
+          <a:p>
+            <a:pPr>
+              <a:spcAft>
+                <a:spcPts val="600"/>
+              </a:spcAft>
+              <a:defRPr sz="1400">
+                <a:solidFill>
+                  <a:srgbClr val="222222"/>
+                </a:solidFill>
+              </a:defRPr>
+            </a:pPr>
+            <a:r>
+              <a:t>• Un document bien formaté avec Word n'est pas un option — c'estune exigence académiqueévaluée.</a:t>
             </a:r>
           </a:p>
         </p:txBody>
@@ -3776,15 +3714,20 @@
   <p:clrMapOvr>
     <a:masterClrMapping/>
   </p:clrMapOvr>
-  <p:transition spd="med">
-    <p:fade/>
-  </p:transition>
 </p:sld>
 </file>
 
-<file path=ppt/slides/slide3.xml><?xml version="1.0" encoding="utf-8"?>
+<file path=ppt/slides/slide12.xml><?xml version="1.0" encoding="utf-8"?>
 <p:sld xmlns:a="http://schemas.openxmlformats.org/drawingml/2006/main" xmlns:p="http://schemas.openxmlformats.org/presentationml/2006/main" xmlns:r="http://schemas.openxmlformats.org/officeDocument/2006/relationships">
   <p:cSld>
+    <p:bg>
+      <p:bgPr>
+        <a:solidFill>
+          <a:srgbClr val="FFFFFF"/>
+        </a:solidFill>
+        <a:effectLst/>
+      </p:bgPr>
+    </p:bg>
     <p:spTree>
       <p:nvGrpSpPr>
         <p:cNvPr id="1" name=""/>
@@ -3794,83 +3737,57 @@
       <p:grpSpPr/>
       <p:sp>
         <p:nvSpPr>
-          <p:cNvPr id="2" name="Title 1"/>
-          <p:cNvSpPr>
-            <a:spLocks noGrp="1"/>
-          </p:cNvSpPr>
-          <p:nvPr>
-            <p:ph type="title"/>
-          </p:nvPr>
-        </p:nvSpPr>
-        <p:spPr/>
-        <p:txBody>
-          <a:bodyPr/>
-          <a:lstStyle/>
-          <a:p>
-            <a:r>
-              <a:t>Plan du cours (1h30)</a:t>
-            </a:r>
-          </a:p>
-        </p:txBody>
-      </p:sp>
-      <p:sp>
-        <p:nvSpPr>
-          <p:cNvPr id="3" name="Content Placeholder 2"/>
-          <p:cNvSpPr>
-            <a:spLocks noGrp="1"/>
-          </p:cNvSpPr>
-          <p:nvPr>
-            <p:ph idx="1"/>
-          </p:nvPr>
-        </p:nvSpPr>
-        <p:spPr/>
-        <p:txBody>
-          <a:bodyPr/>
-          <a:lstStyle/>
-          <a:p>
-            <a:pPr>
-              <a:defRPr sz="2000"/>
-            </a:pPr>
-            <a:r>
-              <a:t>📋 8 parties — 90 minutes</a:t>
-            </a:r>
-          </a:p>
-          <a:p>
-            <a:pPr>
-              <a:defRPr sz="2000"/>
-            </a:pPr>
-            <a:r>
-              <a:t>📋 Interface → Mise en page</a:t>
-            </a:r>
-          </a:p>
-          <a:p>
-            <a:pPr>
-              <a:defRPr sz="2000"/>
-            </a:pPr>
-            <a:r>
-              <a:t>📋 Styles → TDM</a:t>
-            </a:r>
-          </a:p>
-          <a:p>
-            <a:pPr>
-              <a:defRPr sz="2000"/>
-            </a:pPr>
-            <a:r>
-              <a:t>📋 Tableaux → Export</a:t>
-            </a:r>
-          </a:p>
-        </p:txBody>
-      </p:sp>
-      <p:sp>
-        <p:nvSpPr>
-          <p:cNvPr id="4" name="TextBox 3"/>
+          <p:cNvPr id="2" name="Rectangle 1"/>
+          <p:cNvSpPr/>
+          <p:nvPr/>
+        </p:nvSpPr>
+        <p:spPr>
+          <a:xfrm>
+            <a:off x="0" y="0"/>
+            <a:ext cx="109728" cy="6858000"/>
+          </a:xfrm>
+          <a:prstGeom prst="rect">
+            <a:avLst/>
+          </a:prstGeom>
+          <a:solidFill>
+            <a:srgbClr val="2C6E49"/>
+          </a:solidFill>
+          <a:ln>
+            <a:noFill/>
+          </a:ln>
+        </p:spPr>
+        <p:style>
+          <a:lnRef idx="1">
+            <a:schemeClr val="accent1"/>
+          </a:lnRef>
+          <a:fillRef idx="3">
+            <a:schemeClr val="accent1"/>
+          </a:fillRef>
+          <a:effectRef idx="2">
+            <a:schemeClr val="accent1"/>
+          </a:effectRef>
+          <a:fontRef idx="minor">
+            <a:schemeClr val="lt1"/>
+          </a:fontRef>
+        </p:style>
+        <p:txBody>
+          <a:bodyPr rtlCol="0" anchor="ctr"/>
+          <a:lstStyle/>
+          <a:p>
+            <a:pPr algn="ctr"/>
+          </a:p>
+        </p:txBody>
+      </p:sp>
+      <p:sp>
+        <p:nvSpPr>
+          <p:cNvPr id="3" name="TextBox 2"/>
           <p:cNvSpPr txBox="1"/>
           <p:nvPr/>
         </p:nvSpPr>
         <p:spPr>
           <a:xfrm>
-            <a:off x="365760" y="6446520"/>
-            <a:ext cx="8412480" cy="320040"/>
+            <a:off x="457200" y="365760"/>
+            <a:ext cx="8229600" cy="640080"/>
           </a:xfrm>
           <a:prstGeom prst="rect">
             <a:avLst/>
@@ -3878,20 +3795,148 @@
           <a:noFill/>
         </p:spPr>
         <p:txBody>
-          <a:bodyPr wrap="none">
+          <a:bodyPr wrap="square">
             <a:spAutoFit/>
           </a:bodyPr>
           <a:lstStyle/>
           <a:p>
-            <a:pPr algn="ctr">
-              <a:defRPr sz="900">
-                <a:solidFill>
-                  <a:srgbClr val="404040"/>
-                </a:solidFill>
-              </a:defRPr>
-            </a:pPr>
-            <a:r>
-              <a:t>Cours TIC 04  •  Diapositive 3/10</a:t>
+            <a:pPr algn="l">
+              <a:defRPr sz="2200" b="1">
+                <a:solidFill>
+                  <a:srgbClr val="1A5C33"/>
+                </a:solidFill>
+              </a:defRPr>
+            </a:pPr>
+            <a:r>
+              <a:t>3.2 Créer un template Master (.dotx)</a:t>
+            </a:r>
+          </a:p>
+        </p:txBody>
+      </p:sp>
+      <p:sp>
+        <p:nvSpPr>
+          <p:cNvPr id="4" name="TextBox 3"/>
+          <p:cNvSpPr txBox="1"/>
+          <p:nvPr/>
+        </p:nvSpPr>
+        <p:spPr>
+          <a:xfrm>
+            <a:off x="457200" y="1371600"/>
+            <a:ext cx="7772400" cy="4572000"/>
+          </a:xfrm>
+          <a:prstGeom prst="rect">
+            <a:avLst/>
+          </a:prstGeom>
+          <a:noFill/>
+        </p:spPr>
+        <p:txBody>
+          <a:bodyPr wrap="square">
+            <a:spAutoFit/>
+          </a:bodyPr>
+          <a:lstStyle/>
+          <a:p>
+            <a:pPr>
+              <a:spcAft>
+                <a:spcPts val="600"/>
+              </a:spcAft>
+              <a:defRPr sz="1400">
+                <a:solidFill>
+                  <a:srgbClr val="222222"/>
+                </a:solidFill>
+              </a:defRPr>
+            </a:pPr>
+            <a:r>
+              <a:t>• Untemplateest un fichier.dotxqui sert de modèle pour tous vos documents. Pour créer le vôtre :</a:t>
+            </a:r>
+          </a:p>
+          <a:p>
+            <a:pPr>
+              <a:spcAft>
+                <a:spcPts val="600"/>
+              </a:spcAft>
+              <a:defRPr sz="1400">
+                <a:solidFill>
+                  <a:srgbClr val="222222"/>
+                </a:solidFill>
+              </a:defRPr>
+            </a:pPr>
+            <a:r>
+              <a:t>• Ouvrir Word → Fichier → Nouveau → Document vierge</a:t>
+            </a:r>
+          </a:p>
+          <a:p>
+            <a:pPr>
+              <a:spcAft>
+                <a:spcPts val="600"/>
+              </a:spcAft>
+              <a:defRPr sz="1400">
+                <a:solidFill>
+                  <a:srgbClr val="222222"/>
+                </a:solidFill>
+              </a:defRPr>
+            </a:pPr>
+            <a:r>
+              <a:t>• Définir les styles essentiels (voir 3.3)</a:t>
+            </a:r>
+          </a:p>
+          <a:p>
+            <a:pPr>
+              <a:spcAft>
+                <a:spcPts val="600"/>
+              </a:spcAft>
+              <a:defRPr sz="1400">
+                <a:solidFill>
+                  <a:srgbClr val="222222"/>
+                </a:solidFill>
+              </a:defRPr>
+            </a:pPr>
+            <a:r>
+              <a:t>• Configurer la mise en page (marges, interlignes, polices)</a:t>
+            </a:r>
+          </a:p>
+          <a:p>
+            <a:pPr>
+              <a:spcAft>
+                <a:spcPts val="600"/>
+              </a:spcAft>
+              <a:defRPr sz="1400">
+                <a:solidFill>
+                  <a:srgbClr val="222222"/>
+                </a:solidFill>
+              </a:defRPr>
+            </a:pPr>
+            <a:r>
+              <a:t>• Créer la page de garde à partir du template PG-fr</a:t>
+            </a:r>
+          </a:p>
+          <a:p>
+            <a:pPr>
+              <a:spcAft>
+                <a:spcPts val="600"/>
+              </a:spcAft>
+              <a:defRPr sz="1400">
+                <a:solidFill>
+                  <a:srgbClr val="222222"/>
+                </a:solidFill>
+              </a:defRPr>
+            </a:pPr>
+            <a:r>
+              <a:t>• Enregistrer comme :Fichier → Enregistrer sous → Type : Modèle Word (.dotx)</a:t>
+            </a:r>
+          </a:p>
+          <a:p>
+            <a:pPr>
+              <a:spcAft>
+                <a:spcPts val="600"/>
+              </a:spcAft>
+              <a:defRPr sz="1400">
+                <a:solidFill>
+                  <a:srgbClr val="222222"/>
+                </a:solidFill>
+              </a:defRPr>
+            </a:pPr>
+            <a:r>
+              <a:t>• Nommer :Template_Memoire_Master_Langue_Culture.dotx</a:t>
             </a:r>
           </a:p>
         </p:txBody>
@@ -3901,15 +3946,20 @@
   <p:clrMapOvr>
     <a:masterClrMapping/>
   </p:clrMapOvr>
-  <p:transition spd="med">
-    <p:fade/>
-  </p:transition>
 </p:sld>
 </file>
 
-<file path=ppt/slides/slide4.xml><?xml version="1.0" encoding="utf-8"?>
+<file path=ppt/slides/slide13.xml><?xml version="1.0" encoding="utf-8"?>
 <p:sld xmlns:a="http://schemas.openxmlformats.org/drawingml/2006/main" xmlns:p="http://schemas.openxmlformats.org/presentationml/2006/main" xmlns:r="http://schemas.openxmlformats.org/officeDocument/2006/relationships">
   <p:cSld>
+    <p:bg>
+      <p:bgPr>
+        <a:solidFill>
+          <a:srgbClr val="E8F0E9"/>
+        </a:solidFill>
+        <a:effectLst/>
+      </p:bgPr>
+    </p:bg>
     <p:spTree>
       <p:nvGrpSpPr>
         <p:cNvPr id="1" name=""/>
@@ -3919,83 +3969,14 @@
       <p:grpSpPr/>
       <p:sp>
         <p:nvSpPr>
-          <p:cNvPr id="2" name="Title 1"/>
-          <p:cNvSpPr>
-            <a:spLocks noGrp="1"/>
-          </p:cNvSpPr>
-          <p:nvPr>
-            <p:ph type="title"/>
-          </p:nvPr>
-        </p:nvSpPr>
-        <p:spPr/>
-        <p:txBody>
-          <a:bodyPr/>
-          <a:lstStyle/>
-          <a:p>
-            <a:r>
-              <a:t>Interface de Word</a:t>
-            </a:r>
-          </a:p>
-        </p:txBody>
-      </p:sp>
-      <p:sp>
-        <p:nvSpPr>
-          <p:cNvPr id="3" name="Content Placeholder 2"/>
-          <p:cNvSpPr>
-            <a:spLocks noGrp="1"/>
-          </p:cNvSpPr>
-          <p:nvPr>
-            <p:ph idx="1"/>
-          </p:nvPr>
-        </p:nvSpPr>
-        <p:spPr/>
-        <p:txBody>
-          <a:bodyPr/>
-          <a:lstStyle/>
-          <a:p>
-            <a:pPr>
-              <a:defRPr sz="2000"/>
-            </a:pPr>
-            <a:r>
-              <a:t>📝 Ruban et onglets</a:t>
-            </a:r>
-          </a:p>
-          <a:p>
-            <a:pPr>
-              <a:defRPr sz="2000"/>
-            </a:pPr>
-            <a:r>
-              <a:t>📝 Zone de page</a:t>
-            </a:r>
-          </a:p>
-          <a:p>
-            <a:pPr>
-              <a:defRPr sz="2000"/>
-            </a:pPr>
-            <a:r>
-              <a:t>📝 Volet navigation</a:t>
-            </a:r>
-          </a:p>
-          <a:p>
-            <a:pPr>
-              <a:defRPr sz="2000"/>
-            </a:pPr>
-            <a:r>
-              <a:t>📝 Barre d'état</a:t>
-            </a:r>
-          </a:p>
-        </p:txBody>
-      </p:sp>
-      <p:sp>
-        <p:nvSpPr>
-          <p:cNvPr id="4" name="TextBox 3"/>
+          <p:cNvPr id="2" name="TextBox 1"/>
           <p:cNvSpPr txBox="1"/>
           <p:nvPr/>
         </p:nvSpPr>
         <p:spPr>
           <a:xfrm>
-            <a:off x="365760" y="6446520"/>
-            <a:ext cx="8412480" cy="320040"/>
+            <a:off x="548640" y="365760"/>
+            <a:ext cx="7772400" cy="640080"/>
           </a:xfrm>
           <a:prstGeom prst="rect">
             <a:avLst/>
@@ -4003,20 +3984,126 @@
           <a:noFill/>
         </p:spPr>
         <p:txBody>
-          <a:bodyPr wrap="none">
+          <a:bodyPr wrap="square">
             <a:spAutoFit/>
           </a:bodyPr>
           <a:lstStyle/>
           <a:p>
             <a:pPr algn="ctr">
-              <a:defRPr sz="900">
-                <a:solidFill>
-                  <a:srgbClr val="404040"/>
-                </a:solidFill>
-              </a:defRPr>
-            </a:pPr>
-            <a:r>
-              <a:t>Cours TIC 04  •  Diapositive 4/10</a:t>
+              <a:defRPr sz="2600" b="1">
+                <a:solidFill>
+                  <a:srgbClr val="1A5C33"/>
+                </a:solidFill>
+              </a:defRPr>
+            </a:pPr>
+            <a:r>
+              <a:t>📝 Points clés à retenir</a:t>
+            </a:r>
+          </a:p>
+        </p:txBody>
+      </p:sp>
+      <p:sp>
+        <p:nvSpPr>
+          <p:cNvPr id="3" name="TextBox 2"/>
+          <p:cNvSpPr txBox="1"/>
+          <p:nvPr/>
+        </p:nvSpPr>
+        <p:spPr>
+          <a:xfrm>
+            <a:off x="548640" y="1828800"/>
+            <a:ext cx="7772400" cy="4572000"/>
+          </a:xfrm>
+          <a:prstGeom prst="rect">
+            <a:avLst/>
+          </a:prstGeom>
+          <a:noFill/>
+        </p:spPr>
+        <p:txBody>
+          <a:bodyPr wrap="square">
+            <a:spAutoFit/>
+          </a:bodyPr>
+          <a:lstStyle/>
+          <a:p>
+            <a:pPr>
+              <a:spcAft>
+                <a:spcPts val="600"/>
+              </a:spcAft>
+              <a:defRPr sz="1600">
+                <a:solidFill>
+                  <a:srgbClr val="222222"/>
+                </a:solidFill>
+              </a:defRPr>
+            </a:pPr>
+            <a:r>
+              <a:t>• Référentiel :titres et structure alignés sur Canvas Univ-Mosta (elearning.univ-usto.dz) ; bonnes pratiques benchmark 10 universités algériennes (voirBENCHMARK_10_UNIVERSITES_ELEARNING.md).</a:t>
+            </a:r>
+          </a:p>
+          <a:p>
+            <a:pPr>
+              <a:spcAft>
+                <a:spcPts val="600"/>
+              </a:spcAft>
+              <a:defRPr sz="1600">
+                <a:solidFill>
+                  <a:srgbClr val="222222"/>
+                </a:solidFill>
+              </a:defRPr>
+            </a:pPr>
+            <a:r>
+              <a:t>• En termes de savoir :- Maîtriser les fonctionnalités avancées de Word pour la rédaction d'un mémoire (styles, sections, tables automatisées)</a:t>
+            </a:r>
+            <a:br/>
+            <a:r>
+              <a:t>- Comprendre les normes typographiques académiques (page de garde institutionnelle, sommaire, bibliographie)</a:t>
+            </a:r>
+            <a:br/>
+            <a:r>
+              <a:t>- Connaître le processus de dépôt légal du mémoire (PDF/A, métadonnées)</a:t>
+            </a:r>
+          </a:p>
+          <a:p>
+            <a:pPr>
+              <a:spcAft>
+                <a:spcPts val="600"/>
+              </a:spcAft>
+              <a:defRPr sz="1600">
+                <a:solidFill>
+                  <a:srgbClr val="222222"/>
+                </a:solidFill>
+              </a:defRPr>
+            </a:pPr>
+            <a:r>
+              <a:t>• Atelier : création d'un modèle de document Master (template .dotx) avec styles personnalisés</a:t>
+            </a:r>
+          </a:p>
+          <a:p>
+            <a:pPr>
+              <a:spcAft>
+                <a:spcPts val="600"/>
+              </a:spcAft>
+              <a:defRPr sz="1600">
+                <a:solidFill>
+                  <a:srgbClr val="222222"/>
+                </a:solidFill>
+              </a:defRPr>
+            </a:pPr>
+            <a:r>
+              <a:t>• QCM styles, sections, tables automatiques, normes typographiques</a:t>
+            </a:r>
+          </a:p>
+          <a:p>
+            <a:pPr>
+              <a:spcAft>
+                <a:spcPts val="600"/>
+              </a:spcAft>
+              <a:defRPr sz="1600">
+                <a:solidFill>
+                  <a:srgbClr val="222222"/>
+                </a:solidFill>
+              </a:defRPr>
+            </a:pPr>
+            <a:r>
+              <a:t>• Template PG-fr.docx (page de garde institutionnelle Univ-Mosta)</a:t>
             </a:r>
           </a:p>
         </p:txBody>
@@ -4026,15 +4113,20 @@
   <p:clrMapOvr>
     <a:masterClrMapping/>
   </p:clrMapOvr>
-  <p:transition spd="med">
-    <p:fade/>
-  </p:transition>
 </p:sld>
 </file>
 
-<file path=ppt/slides/slide5.xml><?xml version="1.0" encoding="utf-8"?>
+<file path=ppt/slides/slide14.xml><?xml version="1.0" encoding="utf-8"?>
 <p:sld xmlns:a="http://schemas.openxmlformats.org/drawingml/2006/main" xmlns:p="http://schemas.openxmlformats.org/presentationml/2006/main" xmlns:r="http://schemas.openxmlformats.org/officeDocument/2006/relationships">
   <p:cSld>
+    <p:bg>
+      <p:bgPr>
+        <a:solidFill>
+          <a:srgbClr val="FFFFFF"/>
+        </a:solidFill>
+        <a:effectLst/>
+      </p:bgPr>
+    </p:bg>
     <p:spTree>
       <p:nvGrpSpPr>
         <p:cNvPr id="1" name=""/>
@@ -4044,83 +4136,14 @@
       <p:grpSpPr/>
       <p:sp>
         <p:nvSpPr>
-          <p:cNvPr id="2" name="Title 1"/>
-          <p:cNvSpPr>
-            <a:spLocks noGrp="1"/>
-          </p:cNvSpPr>
-          <p:nvPr>
-            <p:ph type="title"/>
-          </p:nvPr>
-        </p:nvSpPr>
-        <p:spPr/>
-        <p:txBody>
-          <a:bodyPr/>
-          <a:lstStyle/>
-          <a:p>
-            <a:r>
-              <a:t>Mise en page universitaire</a:t>
-            </a:r>
-          </a:p>
-        </p:txBody>
-      </p:sp>
-      <p:sp>
-        <p:nvSpPr>
-          <p:cNvPr id="3" name="Content Placeholder 2"/>
-          <p:cNvSpPr>
-            <a:spLocks noGrp="1"/>
-          </p:cNvSpPr>
-          <p:nvPr>
-            <p:ph idx="1"/>
-          </p:nvPr>
-        </p:nvSpPr>
-        <p:spPr/>
-        <p:txBody>
-          <a:bodyPr/>
-          <a:lstStyle/>
-          <a:p>
-            <a:pPr>
-              <a:defRPr sz="2000"/>
-            </a:pPr>
-            <a:r>
-              <a:t>📄 Police 12 pt</a:t>
-            </a:r>
-          </a:p>
-          <a:p>
-            <a:pPr>
-              <a:defRPr sz="2000"/>
-            </a:pPr>
-            <a:r>
-              <a:t>📄 Interligne 1,5</a:t>
-            </a:r>
-          </a:p>
-          <a:p>
-            <a:pPr>
-              <a:defRPr sz="2000"/>
-            </a:pPr>
-            <a:r>
-              <a:t>📄 Marges 2,5 cm</a:t>
-            </a:r>
-          </a:p>
-          <a:p>
-            <a:pPr>
-              <a:defRPr sz="2000"/>
-            </a:pPr>
-            <a:r>
-              <a:t>📄 Pagination</a:t>
-            </a:r>
-          </a:p>
-        </p:txBody>
-      </p:sp>
-      <p:sp>
-        <p:nvSpPr>
-          <p:cNvPr id="4" name="TextBox 3"/>
+          <p:cNvPr id="2" name="TextBox 1"/>
           <p:cNvSpPr txBox="1"/>
           <p:nvPr/>
         </p:nvSpPr>
         <p:spPr>
           <a:xfrm>
-            <a:off x="365760" y="6446520"/>
-            <a:ext cx="8412480" cy="320040"/>
+            <a:off x="548640" y="365760"/>
+            <a:ext cx="7772400" cy="640080"/>
           </a:xfrm>
           <a:prstGeom prst="rect">
             <a:avLst/>
@@ -4128,20 +4151,118 @@
           <a:noFill/>
         </p:spPr>
         <p:txBody>
-          <a:bodyPr wrap="none">
+          <a:bodyPr wrap="square">
             <a:spAutoFit/>
           </a:bodyPr>
           <a:lstStyle/>
           <a:p>
             <a:pPr algn="ctr">
-              <a:defRPr sz="900">
-                <a:solidFill>
-                  <a:srgbClr val="404040"/>
-                </a:solidFill>
-              </a:defRPr>
-            </a:pPr>
-            <a:r>
-              <a:t>Cours TIC 04  •  Diapositive 5/10</a:t>
+              <a:defRPr sz="2600" b="1">
+                <a:solidFill>
+                  <a:srgbClr val="1A5C33"/>
+                </a:solidFill>
+              </a:defRPr>
+            </a:pPr>
+            <a:r>
+              <a:t>✏️ Exercices d'application</a:t>
+            </a:r>
+          </a:p>
+        </p:txBody>
+      </p:sp>
+      <p:sp>
+        <p:nvSpPr>
+          <p:cNvPr id="3" name="TextBox 2"/>
+          <p:cNvSpPr txBox="1"/>
+          <p:nvPr/>
+        </p:nvSpPr>
+        <p:spPr>
+          <a:xfrm>
+            <a:off x="548640" y="1828800"/>
+            <a:ext cx="7772400" cy="4572000"/>
+          </a:xfrm>
+          <a:prstGeom prst="rect">
+            <a:avLst/>
+          </a:prstGeom>
+          <a:noFill/>
+        </p:spPr>
+        <p:txBody>
+          <a:bodyPr wrap="square">
+            <a:spAutoFit/>
+          </a:bodyPr>
+          <a:lstStyle/>
+          <a:p>
+            <a:pPr>
+              <a:spcAft>
+                <a:spcPts val="600"/>
+              </a:spcAft>
+              <a:defRPr sz="1500">
+                <a:solidFill>
+                  <a:srgbClr val="222222"/>
+                </a:solidFill>
+              </a:defRPr>
+            </a:pPr>
+            <a:r>
+              <a:t>• Définir les concepts principaux du cours</a:t>
+            </a:r>
+          </a:p>
+          <a:p>
+            <a:pPr>
+              <a:spcAft>
+                <a:spcPts val="600"/>
+              </a:spcAft>
+              <a:defRPr sz="1500">
+                <a:solidFill>
+                  <a:srgbClr val="222222"/>
+                </a:solidFill>
+              </a:defRPr>
+            </a:pPr>
+            <a:r>
+              <a:t>• Identifier les applications pratiques</a:t>
+            </a:r>
+          </a:p>
+          <a:p>
+            <a:pPr>
+              <a:spcAft>
+                <a:spcPts val="600"/>
+              </a:spcAft>
+              <a:defRPr sz="1500">
+                <a:solidFill>
+                  <a:srgbClr val="222222"/>
+                </a:solidFill>
+              </a:defRPr>
+            </a:pPr>
+            <a:r>
+              <a:t>• Résoudre les exercices du TD</a:t>
+            </a:r>
+          </a:p>
+          <a:p>
+            <a:pPr>
+              <a:spcAft>
+                <a:spcPts val="600"/>
+              </a:spcAft>
+              <a:defRPr sz="1500">
+                <a:solidFill>
+                  <a:srgbClr val="222222"/>
+                </a:solidFill>
+              </a:defRPr>
+            </a:pPr>
+            <a:r>
+              <a:t>• Synthétiser les points clés en un paragraphe</a:t>
+            </a:r>
+          </a:p>
+          <a:p>
+            <a:pPr>
+              <a:spcAft>
+                <a:spcPts val="600"/>
+              </a:spcAft>
+              <a:defRPr sz="1500">
+                <a:solidFill>
+                  <a:srgbClr val="222222"/>
+                </a:solidFill>
+              </a:defRPr>
+            </a:pPr>
+            <a:r>
+              <a:t>• Préparer une courte présentation orale</a:t>
             </a:r>
           </a:p>
         </p:txBody>
@@ -4151,15 +4272,20 @@
   <p:clrMapOvr>
     <a:masterClrMapping/>
   </p:clrMapOvr>
-  <p:transition spd="med">
-    <p:fade/>
-  </p:transition>
 </p:sld>
 </file>
 
-<file path=ppt/slides/slide6.xml><?xml version="1.0" encoding="utf-8"?>
+<file path=ppt/slides/slide15.xml><?xml version="1.0" encoding="utf-8"?>
 <p:sld xmlns:a="http://schemas.openxmlformats.org/drawingml/2006/main" xmlns:p="http://schemas.openxmlformats.org/presentationml/2006/main" xmlns:r="http://schemas.openxmlformats.org/officeDocument/2006/relationships">
   <p:cSld>
+    <p:bg>
+      <p:bgPr>
+        <a:solidFill>
+          <a:srgbClr val="1A5C33"/>
+        </a:solidFill>
+        <a:effectLst/>
+      </p:bgPr>
+    </p:bg>
     <p:spTree>
       <p:nvGrpSpPr>
         <p:cNvPr id="1" name=""/>
@@ -4169,83 +4295,14 @@
       <p:grpSpPr/>
       <p:sp>
         <p:nvSpPr>
-          <p:cNvPr id="2" name="Title 1"/>
-          <p:cNvSpPr>
-            <a:spLocks noGrp="1"/>
-          </p:cNvSpPr>
-          <p:nvPr>
-            <p:ph type="title"/>
-          </p:nvPr>
-        </p:nvSpPr>
-        <p:spPr/>
-        <p:txBody>
-          <a:bodyPr/>
-          <a:lstStyle/>
-          <a:p>
-            <a:r>
-              <a:t>Les Styles</a:t>
-            </a:r>
-          </a:p>
-        </p:txBody>
-      </p:sp>
-      <p:sp>
-        <p:nvSpPr>
-          <p:cNvPr id="3" name="Content Placeholder 2"/>
-          <p:cNvSpPr>
-            <a:spLocks noGrp="1"/>
-          </p:cNvSpPr>
-          <p:nvPr>
-            <p:ph idx="1"/>
-          </p:nvPr>
-        </p:nvSpPr>
-        <p:spPr/>
-        <p:txBody>
-          <a:bodyPr/>
-          <a:lstStyle/>
-          <a:p>
-            <a:pPr>
-              <a:defRPr sz="2000"/>
-            </a:pPr>
-            <a:r>
-              <a:t>🎨 Titre 1, 2, 3</a:t>
-            </a:r>
-          </a:p>
-          <a:p>
-            <a:pPr>
-              <a:defRPr sz="2000"/>
-            </a:pPr>
-            <a:r>
-              <a:t>🎨 Style Normal</a:t>
-            </a:r>
-          </a:p>
-          <a:p>
-            <a:pPr>
-              <a:defRPr sz="2000"/>
-            </a:pPr>
-            <a:r>
-              <a:t>🎨 Homogénéité</a:t>
-            </a:r>
-          </a:p>
-          <a:p>
-            <a:pPr>
-              <a:defRPr sz="2000"/>
-            </a:pPr>
-            <a:r>
-              <a:t>🎨 Modifier un style</a:t>
-            </a:r>
-          </a:p>
-        </p:txBody>
-      </p:sp>
-      <p:sp>
-        <p:nvSpPr>
-          <p:cNvPr id="4" name="TextBox 3"/>
+          <p:cNvPr id="2" name="TextBox 1"/>
           <p:cNvSpPr txBox="1"/>
           <p:nvPr/>
         </p:nvSpPr>
         <p:spPr>
           <a:xfrm>
-            <a:off x="365760" y="6446520"/>
-            <a:ext cx="8412480" cy="320040"/>
+            <a:off x="731520" y="1371600"/>
+            <a:ext cx="7680960" cy="914400"/>
           </a:xfrm>
           <a:prstGeom prst="rect">
             <a:avLst/>
@@ -4253,20 +4310,67 @@
           <a:noFill/>
         </p:spPr>
         <p:txBody>
-          <a:bodyPr wrap="none">
+          <a:bodyPr wrap="square">
             <a:spAutoFit/>
           </a:bodyPr>
           <a:lstStyle/>
           <a:p>
             <a:pPr algn="ctr">
-              <a:defRPr sz="900">
-                <a:solidFill>
-                  <a:srgbClr val="404040"/>
-                </a:solidFill>
-              </a:defRPr>
-            </a:pPr>
-            <a:r>
-              <a:t>Cours TIC 04  •  Diapositive 6/10</a:t>
+              <a:defRPr sz="2800" b="1">
+                <a:solidFill>
+                  <a:srgbClr val="FFFFFF"/>
+                </a:solidFill>
+              </a:defRPr>
+            </a:pPr>
+            <a:r>
+              <a:t>🎓 Conclusion</a:t>
+            </a:r>
+          </a:p>
+        </p:txBody>
+      </p:sp>
+      <p:sp>
+        <p:nvSpPr>
+          <p:cNvPr id="3" name="TextBox 2"/>
+          <p:cNvSpPr txBox="1"/>
+          <p:nvPr/>
+        </p:nvSpPr>
+        <p:spPr>
+          <a:xfrm>
+            <a:off x="731520" y="2743200"/>
+            <a:ext cx="7680960" cy="1828800"/>
+          </a:xfrm>
+          <a:prstGeom prst="rect">
+            <a:avLst/>
+          </a:prstGeom>
+          <a:noFill/>
+        </p:spPr>
+        <p:txBody>
+          <a:bodyPr wrap="square">
+            <a:spAutoFit/>
+          </a:bodyPr>
+          <a:lstStyle/>
+          <a:p>
+            <a:pPr algn="ctr">
+              <a:defRPr sz="1800" b="0">
+                <a:solidFill>
+                  <a:srgbClr val="C5D9C7"/>
+                </a:solidFill>
+              </a:defRPr>
+            </a:pPr>
+            <a:r>
+              <a:t>Dr. BELACEL Madani</a:t>
+            </a:r>
+            <a:br/>
+            <a:r>
+              <a:t>Maître de Conférences B</a:t>
+            </a:r>
+            <a:br/>
+            <a:r>
+              <a:t>Université de Mostaganem</a:t>
+            </a:r>
+            <a:br/>
+            <a:r>
+              <a:t>madani.belacel@univ-mosta.dz</a:t>
             </a:r>
           </a:p>
         </p:txBody>
@@ -4276,15 +4380,20 @@
   <p:clrMapOvr>
     <a:masterClrMapping/>
   </p:clrMapOvr>
-  <p:transition spd="med">
-    <p:fade/>
-  </p:transition>
 </p:sld>
 </file>
 
-<file path=ppt/slides/slide7.xml><?xml version="1.0" encoding="utf-8"?>
+<file path=ppt/slides/slide2.xml><?xml version="1.0" encoding="utf-8"?>
 <p:sld xmlns:a="http://schemas.openxmlformats.org/drawingml/2006/main" xmlns:p="http://schemas.openxmlformats.org/presentationml/2006/main" xmlns:r="http://schemas.openxmlformats.org/officeDocument/2006/relationships">
   <p:cSld>
+    <p:bg>
+      <p:bgPr>
+        <a:solidFill>
+          <a:srgbClr val="FFFFFF"/>
+        </a:solidFill>
+        <a:effectLst/>
+      </p:bgPr>
+    </p:bg>
     <p:spTree>
       <p:nvGrpSpPr>
         <p:cNvPr id="1" name=""/>
@@ -4294,83 +4403,14 @@
       <p:grpSpPr/>
       <p:sp>
         <p:nvSpPr>
-          <p:cNvPr id="2" name="Title 1"/>
-          <p:cNvSpPr>
-            <a:spLocks noGrp="1"/>
-          </p:cNvSpPr>
-          <p:nvPr>
-            <p:ph type="title"/>
-          </p:nvPr>
-        </p:nvSpPr>
-        <p:spPr/>
-        <p:txBody>
-          <a:bodyPr/>
-          <a:lstStyle/>
-          <a:p>
-            <a:r>
-              <a:t>Table des matières</a:t>
-            </a:r>
-          </a:p>
-        </p:txBody>
-      </p:sp>
-      <p:sp>
-        <p:nvSpPr>
-          <p:cNvPr id="3" name="Content Placeholder 2"/>
-          <p:cNvSpPr>
-            <a:spLocks noGrp="1"/>
-          </p:cNvSpPr>
-          <p:nvPr>
-            <p:ph idx="1"/>
-          </p:nvPr>
-        </p:nvSpPr>
-        <p:spPr/>
-        <p:txBody>
-          <a:bodyPr/>
-          <a:lstStyle/>
-          <a:p>
-            <a:pPr>
-              <a:defRPr sz="2000"/>
-            </a:pPr>
-            <a:r>
-              <a:t>📑 Prérequis styles</a:t>
-            </a:r>
-          </a:p>
-          <a:p>
-            <a:pPr>
-              <a:defRPr sz="2000"/>
-            </a:pPr>
-            <a:r>
-              <a:t>📑 Références → TDM</a:t>
-            </a:r>
-          </a:p>
-          <a:p>
-            <a:pPr>
-              <a:defRPr sz="2000"/>
-            </a:pPr>
-            <a:r>
-              <a:t>📑 Mise à jour auto</a:t>
-            </a:r>
-          </a:p>
-          <a:p>
-            <a:pPr>
-              <a:defRPr sz="2000"/>
-            </a:pPr>
-            <a:r>
-              <a:t>📑 Navigation rapide</a:t>
-            </a:r>
-          </a:p>
-        </p:txBody>
-      </p:sp>
-      <p:sp>
-        <p:nvSpPr>
-          <p:cNvPr id="4" name="TextBox 3"/>
+          <p:cNvPr id="2" name="TextBox 1"/>
           <p:cNvSpPr txBox="1"/>
           <p:nvPr/>
         </p:nvSpPr>
         <p:spPr>
           <a:xfrm>
-            <a:off x="365760" y="6446520"/>
-            <a:ext cx="8412480" cy="320040"/>
+            <a:off x="548640" y="365760"/>
+            <a:ext cx="7772400" cy="640080"/>
           </a:xfrm>
           <a:prstGeom prst="rect">
             <a:avLst/>
@@ -4378,20 +4418,127 @@
           <a:noFill/>
         </p:spPr>
         <p:txBody>
-          <a:bodyPr wrap="none">
+          <a:bodyPr wrap="square">
             <a:spAutoFit/>
           </a:bodyPr>
           <a:lstStyle/>
           <a:p>
-            <a:pPr algn="ctr">
-              <a:defRPr sz="900">
-                <a:solidFill>
-                  <a:srgbClr val="404040"/>
-                </a:solidFill>
-              </a:defRPr>
-            </a:pPr>
-            <a:r>
-              <a:t>Cours TIC 04  •  Diapositive 7/10</a:t>
+            <a:pPr algn="l">
+              <a:defRPr sz="2600" b="1">
+                <a:solidFill>
+                  <a:srgbClr val="1A5C33"/>
+                </a:solidFill>
+              </a:defRPr>
+            </a:pPr>
+            <a:r>
+              <a:t>🎯 Objectifs pédagogiques</a:t>
+            </a:r>
+          </a:p>
+        </p:txBody>
+      </p:sp>
+      <p:sp>
+        <p:nvSpPr>
+          <p:cNvPr id="3" name="TextBox 2"/>
+          <p:cNvSpPr txBox="1"/>
+          <p:nvPr/>
+        </p:nvSpPr>
+        <p:spPr>
+          <a:xfrm>
+            <a:off x="548640" y="1828800"/>
+            <a:ext cx="7772400" cy="4572000"/>
+          </a:xfrm>
+          <a:prstGeom prst="rect">
+            <a:avLst/>
+          </a:prstGeom>
+          <a:noFill/>
+        </p:spPr>
+        <p:txBody>
+          <a:bodyPr wrap="square">
+            <a:spAutoFit/>
+          </a:bodyPr>
+          <a:lstStyle/>
+          <a:p>
+            <a:pPr>
+              <a:spcAft>
+                <a:spcPts val="600"/>
+              </a:spcAft>
+              <a:defRPr sz="1500">
+                <a:solidFill>
+                  <a:srgbClr val="222222"/>
+                </a:solidFill>
+              </a:defRPr>
+            </a:pPr>
+            <a:r>
+              <a:t>• En termes de savoir :- Maîtriser les fonctionnalités avancées de Word pour la rédaction d'un mémoire (styles, sections, tables automatisées)</a:t>
+            </a:r>
+            <a:br/>
+            <a:r>
+              <a:t>- Comprendre les normes typographiques académiques (page de garde institutionnelle, sommaire, bibliographie)</a:t>
+            </a:r>
+            <a:br/>
+            <a:r>
+              <a:t>- Connaître le processus de dépôt légal du mémoire (PDF/A, métadonnées)</a:t>
+            </a:r>
+          </a:p>
+          <a:p>
+            <a:pPr>
+              <a:spcAft>
+                <a:spcPts val="600"/>
+              </a:spcAft>
+              <a:defRPr sz="1500">
+                <a:solidFill>
+                  <a:srgbClr val="222222"/>
+                </a:solidFill>
+              </a:defRPr>
+            </a:pPr>
+            <a:r>
+              <a:t>• En termes de savoir-faire :- Créer un document structuré avec styles, table des matières automatique, listes des figures et tableaux</a:t>
+            </a:r>
+            <a:br/>
+            <a:r>
+              <a:t>- Intégrer et formater des citations avec Zotero dans Word</a:t>
+            </a:r>
+            <a:br/>
+            <a:r>
+              <a:t>- Gérer des documents longs (sections, paginations multiples, numérotation des chapitres)</a:t>
+            </a:r>
+            <a:br/>
+            <a:r>
+              <a:t>- Exporter aux formats requis (DOCX, PDF/A) pour dépôt institutionnel</a:t>
+            </a:r>
+          </a:p>
+          <a:p>
+            <a:pPr>
+              <a:spcAft>
+                <a:spcPts val="600"/>
+              </a:spcAft>
+              <a:defRPr sz="1500">
+                <a:solidFill>
+                  <a:srgbClr val="222222"/>
+                </a:solidFill>
+              </a:defRPr>
+            </a:pPr>
+            <a:r>
+              <a:t>• En termes de savoir-être :- Respecter les normes de rédaction académique (typographie, citation, bibliographie)</a:t>
+            </a:r>
+            <a:br/>
+            <a:r>
+              <a:t>- Adopter une méthodologie de rédaction rigoureuse et reproductible</a:t>
+            </a:r>
+          </a:p>
+          <a:p>
+            <a:pPr>
+              <a:spcAft>
+                <a:spcPts val="600"/>
+              </a:spcAft>
+              <a:defRPr sz="1500">
+                <a:solidFill>
+                  <a:srgbClr val="222222"/>
+                </a:solidFill>
+              </a:defRPr>
+            </a:pPr>
+            <a:r>
+              <a:t>• Mode d'évaluation :TD 25 % + Projet « Structure complète d'un chapitre de mémoire » 35 % + QCM 20 % + Examen pratique 20 %</a:t>
             </a:r>
           </a:p>
         </p:txBody>
@@ -4401,15 +4548,20 @@
   <p:clrMapOvr>
     <a:masterClrMapping/>
   </p:clrMapOvr>
-  <p:transition spd="med">
-    <p:fade/>
-  </p:transition>
 </p:sld>
 </file>
 
-<file path=ppt/slides/slide8.xml><?xml version="1.0" encoding="utf-8"?>
+<file path=ppt/slides/slide3.xml><?xml version="1.0" encoding="utf-8"?>
 <p:sld xmlns:a="http://schemas.openxmlformats.org/drawingml/2006/main" xmlns:p="http://schemas.openxmlformats.org/presentationml/2006/main" xmlns:r="http://schemas.openxmlformats.org/officeDocument/2006/relationships">
   <p:cSld>
+    <p:bg>
+      <p:bgPr>
+        <a:solidFill>
+          <a:srgbClr val="FFFFFF"/>
+        </a:solidFill>
+        <a:effectLst/>
+      </p:bgPr>
+    </p:bg>
     <p:spTree>
       <p:nvGrpSpPr>
         <p:cNvPr id="1" name=""/>
@@ -4419,83 +4571,14 @@
       <p:grpSpPr/>
       <p:sp>
         <p:nvSpPr>
-          <p:cNvPr id="2" name="Title 1"/>
-          <p:cNvSpPr>
-            <a:spLocks noGrp="1"/>
-          </p:cNvSpPr>
-          <p:nvPr>
-            <p:ph type="title"/>
-          </p:nvPr>
-        </p:nvSpPr>
-        <p:spPr/>
-        <p:txBody>
-          <a:bodyPr/>
-          <a:lstStyle/>
-          <a:p>
-            <a:r>
-              <a:t>Tableaux et listes</a:t>
-            </a:r>
-          </a:p>
-        </p:txBody>
-      </p:sp>
-      <p:sp>
-        <p:nvSpPr>
-          <p:cNvPr id="3" name="Content Placeholder 2"/>
-          <p:cNvSpPr>
-            <a:spLocks noGrp="1"/>
-          </p:cNvSpPr>
-          <p:nvPr>
-            <p:ph idx="1"/>
-          </p:nvPr>
-        </p:nvSpPr>
-        <p:spPr/>
-        <p:txBody>
-          <a:bodyPr/>
-          <a:lstStyle/>
-          <a:p>
-            <a:pPr>
-              <a:defRPr sz="2000"/>
-            </a:pPr>
-            <a:r>
-              <a:t>📊 Listes numérotées</a:t>
-            </a:r>
-          </a:p>
-          <a:p>
-            <a:pPr>
-              <a:defRPr sz="2000"/>
-            </a:pPr>
-            <a:r>
-              <a:t>📊 Tableaux comparatifs</a:t>
-            </a:r>
-          </a:p>
-          <a:p>
-            <a:pPr>
-              <a:defRPr sz="2000"/>
-            </a:pPr>
-            <a:r>
-              <a:t>📊 Images légendées</a:t>
-            </a:r>
-          </a:p>
-          <a:p>
-            <a:pPr>
-              <a:defRPr sz="2000"/>
-            </a:pPr>
-            <a:r>
-              <a:t>📊 Éléments visuels</a:t>
-            </a:r>
-          </a:p>
-        </p:txBody>
-      </p:sp>
-      <p:sp>
-        <p:nvSpPr>
-          <p:cNvPr id="4" name="TextBox 3"/>
+          <p:cNvPr id="2" name="TextBox 1"/>
           <p:cNvSpPr txBox="1"/>
           <p:nvPr/>
         </p:nvSpPr>
         <p:spPr>
           <a:xfrm>
-            <a:off x="365760" y="6446520"/>
-            <a:ext cx="8412480" cy="320040"/>
+            <a:off x="548640" y="365760"/>
+            <a:ext cx="7772400" cy="640080"/>
           </a:xfrm>
           <a:prstGeom prst="rect">
             <a:avLst/>
@@ -4503,20 +4586,193 @@
           <a:noFill/>
         </p:spPr>
         <p:txBody>
-          <a:bodyPr wrap="none">
+          <a:bodyPr wrap="square">
             <a:spAutoFit/>
           </a:bodyPr>
           <a:lstStyle/>
           <a:p>
-            <a:pPr algn="ctr">
-              <a:defRPr sz="900">
-                <a:solidFill>
-                  <a:srgbClr val="404040"/>
-                </a:solidFill>
-              </a:defRPr>
-            </a:pPr>
-            <a:r>
-              <a:t>Cours TIC 04  •  Diapositive 8/10</a:t>
+            <a:pPr algn="l">
+              <a:defRPr sz="2600" b="1">
+                <a:solidFill>
+                  <a:srgbClr val="1A5C33"/>
+                </a:solidFill>
+              </a:defRPr>
+            </a:pPr>
+            <a:r>
+              <a:t>📋 Plan du cours</a:t>
+            </a:r>
+          </a:p>
+        </p:txBody>
+      </p:sp>
+      <p:sp>
+        <p:nvSpPr>
+          <p:cNvPr id="3" name="TextBox 2"/>
+          <p:cNvSpPr txBox="1"/>
+          <p:nvPr/>
+        </p:nvSpPr>
+        <p:spPr>
+          <a:xfrm>
+            <a:off x="548640" y="1828800"/>
+            <a:ext cx="7772400" cy="4572000"/>
+          </a:xfrm>
+          <a:prstGeom prst="rect">
+            <a:avLst/>
+          </a:prstGeom>
+          <a:noFill/>
+        </p:spPr>
+        <p:txBody>
+          <a:bodyPr wrap="square">
+            <a:spAutoFit/>
+          </a:bodyPr>
+          <a:lstStyle/>
+          <a:p>
+            <a:pPr>
+              <a:spcAft>
+                <a:spcPts val="600"/>
+              </a:spcAft>
+              <a:defRPr sz="1600">
+                <a:solidFill>
+                  <a:srgbClr val="222222"/>
+                </a:solidFill>
+              </a:defRPr>
+            </a:pPr>
+            <a:r>
+              <a:t>• Fiche cours — Plateforme e-learning (Moodle)</a:t>
+            </a:r>
+          </a:p>
+          <a:p>
+            <a:pPr>
+              <a:spcAft>
+                <a:spcPts val="600"/>
+              </a:spcAft>
+              <a:defRPr sz="1600">
+                <a:solidFill>
+                  <a:srgbClr val="222222"/>
+                </a:solidFill>
+              </a:defRPr>
+            </a:pPr>
+            <a:r>
+              <a:t>• Objectifs de l'enseignement</a:t>
+            </a:r>
+          </a:p>
+          <a:p>
+            <a:pPr>
+              <a:spcAft>
+                <a:spcPts val="600"/>
+              </a:spcAft>
+              <a:defRPr sz="1600">
+                <a:solidFill>
+                  <a:srgbClr val="222222"/>
+                </a:solidFill>
+              </a:defRPr>
+            </a:pPr>
+            <a:r>
+              <a:t>• Activités d'apprentissage</a:t>
+            </a:r>
+          </a:p>
+          <a:p>
+            <a:pPr>
+              <a:spcAft>
+                <a:spcPts val="600"/>
+              </a:spcAft>
+              <a:defRPr sz="1600">
+                <a:solidFill>
+                  <a:srgbClr val="222222"/>
+                </a:solidFill>
+              </a:defRPr>
+            </a:pPr>
+            <a:r>
+              <a:t>• Activités d'évaluation</a:t>
+            </a:r>
+          </a:p>
+          <a:p>
+            <a:pPr>
+              <a:spcAft>
+                <a:spcPts val="600"/>
+              </a:spcAft>
+              <a:defRPr sz="1600">
+                <a:solidFill>
+                  <a:srgbClr val="222222"/>
+                </a:solidFill>
+              </a:defRPr>
+            </a:pPr>
+            <a:r>
+              <a:t>• Bibliographie et ressources externes</a:t>
+            </a:r>
+          </a:p>
+          <a:p>
+            <a:pPr>
+              <a:spcAft>
+                <a:spcPts val="600"/>
+              </a:spcAft>
+              <a:defRPr sz="1600">
+                <a:solidFill>
+                  <a:srgbClr val="222222"/>
+                </a:solidFill>
+              </a:defRPr>
+            </a:pPr>
+            <a:r>
+              <a:t>• Contexte réglementaire algérien</a:t>
+            </a:r>
+          </a:p>
+          <a:p>
+            <a:pPr>
+              <a:spcAft>
+                <a:spcPts val="600"/>
+              </a:spcAft>
+              <a:defRPr sz="1600">
+                <a:solidFill>
+                  <a:srgbClr val="222222"/>
+                </a:solidFill>
+              </a:defRPr>
+            </a:pPr>
+            <a:r>
+              <a:t>• Plan du Cours</a:t>
+            </a:r>
+          </a:p>
+          <a:p>
+            <a:pPr>
+              <a:spcAft>
+                <a:spcPts val="600"/>
+              </a:spcAft>
+              <a:defRPr sz="1600">
+                <a:solidFill>
+                  <a:srgbClr val="222222"/>
+                </a:solidFill>
+              </a:defRPr>
+            </a:pPr>
+            <a:r>
+              <a:t>• 1.1 Word en Master : un changement d'échelle</a:t>
+            </a:r>
+          </a:p>
+          <a:p>
+            <a:pPr>
+              <a:spcAft>
+                <a:spcPts val="600"/>
+              </a:spcAft>
+              <a:defRPr sz="1600">
+                <a:solidFill>
+                  <a:srgbClr val="222222"/>
+                </a:solidFill>
+              </a:defRPr>
+            </a:pPr>
+            <a:r>
+              <a:t>• 3.2 Créer un template Master (.dotx)</a:t>
+            </a:r>
+          </a:p>
+          <a:p>
+            <a:pPr>
+              <a:spcAft>
+                <a:spcPts val="600"/>
+              </a:spcAft>
+              <a:defRPr sz="1600">
+                <a:solidFill>
+                  <a:srgbClr val="222222"/>
+                </a:solidFill>
+              </a:defRPr>
+            </a:pPr>
+            <a:r>
+              <a:t>• 3.4 Modifier un style</a:t>
             </a:r>
           </a:p>
         </p:txBody>
@@ -4526,15 +4782,20 @@
   <p:clrMapOvr>
     <a:masterClrMapping/>
   </p:clrMapOvr>
-  <p:transition spd="med">
-    <p:fade/>
-  </p:transition>
 </p:sld>
 </file>
 
-<file path=ppt/slides/slide9.xml><?xml version="1.0" encoding="utf-8"?>
+<file path=ppt/slides/slide4.xml><?xml version="1.0" encoding="utf-8"?>
 <p:sld xmlns:a="http://schemas.openxmlformats.org/drawingml/2006/main" xmlns:p="http://schemas.openxmlformats.org/presentationml/2006/main" xmlns:r="http://schemas.openxmlformats.org/officeDocument/2006/relationships">
   <p:cSld>
+    <p:bg>
+      <p:bgPr>
+        <a:solidFill>
+          <a:srgbClr val="FFFFFF"/>
+        </a:solidFill>
+        <a:effectLst/>
+      </p:bgPr>
+    </p:bg>
     <p:spTree>
       <p:nvGrpSpPr>
         <p:cNvPr id="1" name=""/>
@@ -4544,83 +4805,57 @@
       <p:grpSpPr/>
       <p:sp>
         <p:nvSpPr>
-          <p:cNvPr id="2" name="Title 1"/>
-          <p:cNvSpPr>
-            <a:spLocks noGrp="1"/>
-          </p:cNvSpPr>
-          <p:nvPr>
-            <p:ph type="title"/>
-          </p:nvPr>
-        </p:nvSpPr>
-        <p:spPr/>
-        <p:txBody>
-          <a:bodyPr/>
-          <a:lstStyle/>
-          <a:p>
-            <a:r>
-              <a:t>Export et bonnes pratiques</a:t>
-            </a:r>
-          </a:p>
-        </p:txBody>
-      </p:sp>
-      <p:sp>
-        <p:nvSpPr>
-          <p:cNvPr id="3" name="Content Placeholder 2"/>
-          <p:cNvSpPr>
-            <a:spLocks noGrp="1"/>
-          </p:cNvSpPr>
-          <p:nvPr>
-            <p:ph idx="1"/>
-          </p:nvPr>
-        </p:nvSpPr>
-        <p:spPr/>
-        <p:txBody>
-          <a:bodyPr/>
-          <a:lstStyle/>
-          <a:p>
-            <a:pPr>
-              <a:defRPr sz="2000"/>
-            </a:pPr>
-            <a:r>
-              <a:t>💾 .docx + .pdf</a:t>
-            </a:r>
-          </a:p>
-          <a:p>
-            <a:pPr>
-              <a:defRPr sz="2000"/>
-            </a:pPr>
-            <a:r>
-              <a:t>💾 Ctrl+S fréquent</a:t>
-            </a:r>
-          </a:p>
-          <a:p>
-            <a:pPr>
-              <a:defRPr sz="2000"/>
-            </a:pPr>
-            <a:r>
-              <a:t>💾 Nommage académique</a:t>
-            </a:r>
-          </a:p>
-          <a:p>
-            <a:pPr>
-              <a:defRPr sz="2000"/>
-            </a:pPr>
-            <a:r>
-              <a:t>💾 Version finale</a:t>
-            </a:r>
-          </a:p>
-        </p:txBody>
-      </p:sp>
-      <p:sp>
-        <p:nvSpPr>
-          <p:cNvPr id="4" name="TextBox 3"/>
+          <p:cNvPr id="2" name="Rectangle 1"/>
+          <p:cNvSpPr/>
+          <p:nvPr/>
+        </p:nvSpPr>
+        <p:spPr>
+          <a:xfrm>
+            <a:off x="0" y="0"/>
+            <a:ext cx="109728" cy="6858000"/>
+          </a:xfrm>
+          <a:prstGeom prst="rect">
+            <a:avLst/>
+          </a:prstGeom>
+          <a:solidFill>
+            <a:srgbClr val="2C6E49"/>
+          </a:solidFill>
+          <a:ln>
+            <a:noFill/>
+          </a:ln>
+        </p:spPr>
+        <p:style>
+          <a:lnRef idx="1">
+            <a:schemeClr val="accent1"/>
+          </a:lnRef>
+          <a:fillRef idx="3">
+            <a:schemeClr val="accent1"/>
+          </a:fillRef>
+          <a:effectRef idx="2">
+            <a:schemeClr val="accent1"/>
+          </a:effectRef>
+          <a:fontRef idx="minor">
+            <a:schemeClr val="lt1"/>
+          </a:fontRef>
+        </p:style>
+        <p:txBody>
+          <a:bodyPr rtlCol="0" anchor="ctr"/>
+          <a:lstStyle/>
+          <a:p>
+            <a:pPr algn="ctr"/>
+          </a:p>
+        </p:txBody>
+      </p:sp>
+      <p:sp>
+        <p:nvSpPr>
+          <p:cNvPr id="3" name="TextBox 2"/>
           <p:cNvSpPr txBox="1"/>
           <p:nvPr/>
         </p:nvSpPr>
         <p:spPr>
           <a:xfrm>
-            <a:off x="365760" y="6446520"/>
-            <a:ext cx="8412480" cy="320040"/>
+            <a:off x="457200" y="365760"/>
+            <a:ext cx="8229600" cy="640080"/>
           </a:xfrm>
           <a:prstGeom prst="rect">
             <a:avLst/>
@@ -4628,20 +4863,88 @@
           <a:noFill/>
         </p:spPr>
         <p:txBody>
-          <a:bodyPr wrap="none">
+          <a:bodyPr wrap="square">
             <a:spAutoFit/>
           </a:bodyPr>
           <a:lstStyle/>
           <a:p>
-            <a:pPr algn="ctr">
-              <a:defRPr sz="900">
-                <a:solidFill>
-                  <a:srgbClr val="404040"/>
-                </a:solidFill>
-              </a:defRPr>
-            </a:pPr>
-            <a:r>
-              <a:t>Cours TIC 04  •  Diapositive 9/10</a:t>
+            <a:pPr algn="l">
+              <a:defRPr sz="2200" b="1">
+                <a:solidFill>
+                  <a:srgbClr val="1A5C33"/>
+                </a:solidFill>
+              </a:defRPr>
+            </a:pPr>
+            <a:r>
+              <a:t>Fiche cours — Plateforme e-learning (Moodle)</a:t>
+            </a:r>
+          </a:p>
+        </p:txBody>
+      </p:sp>
+      <p:sp>
+        <p:nvSpPr>
+          <p:cNvPr id="4" name="TextBox 3"/>
+          <p:cNvSpPr txBox="1"/>
+          <p:nvPr/>
+        </p:nvSpPr>
+        <p:spPr>
+          <a:xfrm>
+            <a:off x="457200" y="1371600"/>
+            <a:ext cx="7772400" cy="4572000"/>
+          </a:xfrm>
+          <a:prstGeom prst="rect">
+            <a:avLst/>
+          </a:prstGeom>
+          <a:noFill/>
+        </p:spPr>
+        <p:txBody>
+          <a:bodyPr wrap="square">
+            <a:spAutoFit/>
+          </a:bodyPr>
+          <a:lstStyle/>
+          <a:p>
+            <a:pPr>
+              <a:spcAft>
+                <a:spcPts val="600"/>
+              </a:spcAft>
+              <a:defRPr sz="1400">
+                <a:solidFill>
+                  <a:srgbClr val="222222"/>
+                </a:solidFill>
+              </a:defRPr>
+            </a:pPr>
+            <a:r>
+              <a:t>• Référentiel :titres et structure alignés sur Canvas Univ-Mosta (elearning.univ-usto.dz) ; bonnes pratiques benchmark 10 universités algériennes (voirBENCHMARK_10_UNIVERSITES_ELEARNING.md).</a:t>
+            </a:r>
+          </a:p>
+          <a:p>
+            <a:pPr>
+              <a:spcAft>
+                <a:spcPts val="600"/>
+              </a:spcAft>
+              <a:defRPr sz="1400">
+                <a:solidFill>
+                  <a:srgbClr val="222222"/>
+                </a:solidFill>
+              </a:defRPr>
+            </a:pPr>
+            <a:r>
+              <a:t>• Public visé :Master 1 Langue et Culture</a:t>
+            </a:r>
+          </a:p>
+          <a:p>
+            <a:pPr>
+              <a:spcAft>
+                <a:spcPts val="600"/>
+              </a:spcAft>
+              <a:defRPr sz="1400">
+                <a:solidFill>
+                  <a:srgbClr val="222222"/>
+                </a:solidFill>
+              </a:defRPr>
+            </a:pPr>
+            <a:r>
+              <a:t>• Compétences pré-requises :TIC 03 ; organisation de fichiers Windows ; notions de navigation et exploration ; Zotero installé</a:t>
             </a:r>
           </a:p>
         </p:txBody>
@@ -4651,9 +4954,951 @@
   <p:clrMapOvr>
     <a:masterClrMapping/>
   </p:clrMapOvr>
-  <p:transition spd="med">
-    <p:fade/>
-  </p:transition>
+</p:sld>
+</file>
+
+<file path=ppt/slides/slide5.xml><?xml version="1.0" encoding="utf-8"?>
+<p:sld xmlns:a="http://schemas.openxmlformats.org/drawingml/2006/main" xmlns:p="http://schemas.openxmlformats.org/presentationml/2006/main" xmlns:r="http://schemas.openxmlformats.org/officeDocument/2006/relationships">
+  <p:cSld>
+    <p:bg>
+      <p:bgPr>
+        <a:solidFill>
+          <a:srgbClr val="FFFFFF"/>
+        </a:solidFill>
+        <a:effectLst/>
+      </p:bgPr>
+    </p:bg>
+    <p:spTree>
+      <p:nvGrpSpPr>
+        <p:cNvPr id="1" name=""/>
+        <p:cNvGrpSpPr/>
+        <p:nvPr/>
+      </p:nvGrpSpPr>
+      <p:grpSpPr/>
+      <p:sp>
+        <p:nvSpPr>
+          <p:cNvPr id="2" name="Rectangle 1"/>
+          <p:cNvSpPr/>
+          <p:nvPr/>
+        </p:nvSpPr>
+        <p:spPr>
+          <a:xfrm>
+            <a:off x="0" y="0"/>
+            <a:ext cx="109728" cy="6858000"/>
+          </a:xfrm>
+          <a:prstGeom prst="rect">
+            <a:avLst/>
+          </a:prstGeom>
+          <a:solidFill>
+            <a:srgbClr val="2C6E49"/>
+          </a:solidFill>
+          <a:ln>
+            <a:noFill/>
+          </a:ln>
+        </p:spPr>
+        <p:style>
+          <a:lnRef idx="1">
+            <a:schemeClr val="accent1"/>
+          </a:lnRef>
+          <a:fillRef idx="3">
+            <a:schemeClr val="accent1"/>
+          </a:fillRef>
+          <a:effectRef idx="2">
+            <a:schemeClr val="accent1"/>
+          </a:effectRef>
+          <a:fontRef idx="minor">
+            <a:schemeClr val="lt1"/>
+          </a:fontRef>
+        </p:style>
+        <p:txBody>
+          <a:bodyPr rtlCol="0" anchor="ctr"/>
+          <a:lstStyle/>
+          <a:p>
+            <a:pPr algn="ctr"/>
+          </a:p>
+        </p:txBody>
+      </p:sp>
+      <p:sp>
+        <p:nvSpPr>
+          <p:cNvPr id="3" name="TextBox 2"/>
+          <p:cNvSpPr txBox="1"/>
+          <p:nvPr/>
+        </p:nvSpPr>
+        <p:spPr>
+          <a:xfrm>
+            <a:off x="457200" y="365760"/>
+            <a:ext cx="8229600" cy="640080"/>
+          </a:xfrm>
+          <a:prstGeom prst="rect">
+            <a:avLst/>
+          </a:prstGeom>
+          <a:noFill/>
+        </p:spPr>
+        <p:txBody>
+          <a:bodyPr wrap="square">
+            <a:spAutoFit/>
+          </a:bodyPr>
+          <a:lstStyle/>
+          <a:p>
+            <a:pPr algn="l">
+              <a:defRPr sz="2200" b="1">
+                <a:solidFill>
+                  <a:srgbClr val="1A5C33"/>
+                </a:solidFill>
+              </a:defRPr>
+            </a:pPr>
+            <a:r>
+              <a:t>Objectifs de l'enseignement</a:t>
+            </a:r>
+          </a:p>
+        </p:txBody>
+      </p:sp>
+      <p:sp>
+        <p:nvSpPr>
+          <p:cNvPr id="4" name="TextBox 3"/>
+          <p:cNvSpPr txBox="1"/>
+          <p:nvPr/>
+        </p:nvSpPr>
+        <p:spPr>
+          <a:xfrm>
+            <a:off x="457200" y="1371600"/>
+            <a:ext cx="7772400" cy="4572000"/>
+          </a:xfrm>
+          <a:prstGeom prst="rect">
+            <a:avLst/>
+          </a:prstGeom>
+          <a:noFill/>
+        </p:spPr>
+        <p:txBody>
+          <a:bodyPr wrap="square">
+            <a:spAutoFit/>
+          </a:bodyPr>
+          <a:lstStyle/>
+          <a:p>
+            <a:pPr>
+              <a:spcAft>
+                <a:spcPts val="600"/>
+              </a:spcAft>
+              <a:defRPr sz="1400">
+                <a:solidFill>
+                  <a:srgbClr val="222222"/>
+                </a:solidFill>
+              </a:defRPr>
+            </a:pPr>
+            <a:r>
+              <a:t>• En termes de savoir :- Maîtriser les fonctionnalités avancées de Word pour la rédaction d'un mémoire (styles, sections, tables automatisées)</a:t>
+            </a:r>
+            <a:br/>
+            <a:r>
+              <a:t>- Comprendre les normes typographiques académiques (page de garde institutionnelle, sommaire, bibliographie)</a:t>
+            </a:r>
+            <a:br/>
+            <a:r>
+              <a:t>- Connaître le processus de dépôt légal du mémoire (PDF/A, métadonnées)</a:t>
+            </a:r>
+          </a:p>
+          <a:p>
+            <a:pPr>
+              <a:spcAft>
+                <a:spcPts val="600"/>
+              </a:spcAft>
+              <a:defRPr sz="1400">
+                <a:solidFill>
+                  <a:srgbClr val="222222"/>
+                </a:solidFill>
+              </a:defRPr>
+            </a:pPr>
+            <a:r>
+              <a:t>• En termes de savoir-faire :- Créer un document structuré avec styles, table des matières automatique, listes des figures et tableaux</a:t>
+            </a:r>
+            <a:br/>
+            <a:r>
+              <a:t>- Intégrer et formater des citations avec Zotero dans Word</a:t>
+            </a:r>
+            <a:br/>
+            <a:r>
+              <a:t>- Gérer des documents longs (sections, paginations multiples, numérotation des chapitres)</a:t>
+            </a:r>
+            <a:br/>
+            <a:r>
+              <a:t>- Exporter aux formats requis (DOCX, PDF/A) pour dépôt institutionnel</a:t>
+            </a:r>
+          </a:p>
+          <a:p>
+            <a:pPr>
+              <a:spcAft>
+                <a:spcPts val="600"/>
+              </a:spcAft>
+              <a:defRPr sz="1400">
+                <a:solidFill>
+                  <a:srgbClr val="222222"/>
+                </a:solidFill>
+              </a:defRPr>
+            </a:pPr>
+            <a:r>
+              <a:t>• En termes de savoir-être :- Respecter les normes de rédaction académique (typographie, citation, bibliographie)</a:t>
+            </a:r>
+            <a:br/>
+            <a:r>
+              <a:t>- Adopter une méthodologie de rédaction rigoureuse et reproductible</a:t>
+            </a:r>
+          </a:p>
+          <a:p>
+            <a:pPr>
+              <a:spcAft>
+                <a:spcPts val="600"/>
+              </a:spcAft>
+              <a:defRPr sz="1400">
+                <a:solidFill>
+                  <a:srgbClr val="222222"/>
+                </a:solidFill>
+              </a:defRPr>
+            </a:pPr>
+            <a:r>
+              <a:t>• Mode d'évaluation :TD 25 % + Projet « Structure complète d'un chapitre de mémoire » 35 % + QCM 20 % + Examen pratique 20 %</a:t>
+            </a:r>
+          </a:p>
+        </p:txBody>
+      </p:sp>
+    </p:spTree>
+  </p:cSld>
+  <p:clrMapOvr>
+    <a:masterClrMapping/>
+  </p:clrMapOvr>
+</p:sld>
+</file>
+
+<file path=ppt/slides/slide6.xml><?xml version="1.0" encoding="utf-8"?>
+<p:sld xmlns:a="http://schemas.openxmlformats.org/drawingml/2006/main" xmlns:p="http://schemas.openxmlformats.org/presentationml/2006/main" xmlns:r="http://schemas.openxmlformats.org/officeDocument/2006/relationships">
+  <p:cSld>
+    <p:bg>
+      <p:bgPr>
+        <a:solidFill>
+          <a:srgbClr val="FFFFFF"/>
+        </a:solidFill>
+        <a:effectLst/>
+      </p:bgPr>
+    </p:bg>
+    <p:spTree>
+      <p:nvGrpSpPr>
+        <p:cNvPr id="1" name=""/>
+        <p:cNvGrpSpPr/>
+        <p:nvPr/>
+      </p:nvGrpSpPr>
+      <p:grpSpPr/>
+      <p:sp>
+        <p:nvSpPr>
+          <p:cNvPr id="2" name="Rectangle 1"/>
+          <p:cNvSpPr/>
+          <p:nvPr/>
+        </p:nvSpPr>
+        <p:spPr>
+          <a:xfrm>
+            <a:off x="0" y="0"/>
+            <a:ext cx="109728" cy="6858000"/>
+          </a:xfrm>
+          <a:prstGeom prst="rect">
+            <a:avLst/>
+          </a:prstGeom>
+          <a:solidFill>
+            <a:srgbClr val="2C6E49"/>
+          </a:solidFill>
+          <a:ln>
+            <a:noFill/>
+          </a:ln>
+        </p:spPr>
+        <p:style>
+          <a:lnRef idx="1">
+            <a:schemeClr val="accent1"/>
+          </a:lnRef>
+          <a:fillRef idx="3">
+            <a:schemeClr val="accent1"/>
+          </a:fillRef>
+          <a:effectRef idx="2">
+            <a:schemeClr val="accent1"/>
+          </a:effectRef>
+          <a:fontRef idx="minor">
+            <a:schemeClr val="lt1"/>
+          </a:fontRef>
+        </p:style>
+        <p:txBody>
+          <a:bodyPr rtlCol="0" anchor="ctr"/>
+          <a:lstStyle/>
+          <a:p>
+            <a:pPr algn="ctr"/>
+          </a:p>
+        </p:txBody>
+      </p:sp>
+      <p:sp>
+        <p:nvSpPr>
+          <p:cNvPr id="3" name="TextBox 2"/>
+          <p:cNvSpPr txBox="1"/>
+          <p:nvPr/>
+        </p:nvSpPr>
+        <p:spPr>
+          <a:xfrm>
+            <a:off x="457200" y="365760"/>
+            <a:ext cx="8229600" cy="640080"/>
+          </a:xfrm>
+          <a:prstGeom prst="rect">
+            <a:avLst/>
+          </a:prstGeom>
+          <a:noFill/>
+        </p:spPr>
+        <p:txBody>
+          <a:bodyPr wrap="square">
+            <a:spAutoFit/>
+          </a:bodyPr>
+          <a:lstStyle/>
+          <a:p>
+            <a:pPr algn="l">
+              <a:defRPr sz="2200" b="1">
+                <a:solidFill>
+                  <a:srgbClr val="1A5C33"/>
+                </a:solidFill>
+              </a:defRPr>
+            </a:pPr>
+            <a:r>
+              <a:t>Activités d'apprentissage</a:t>
+            </a:r>
+          </a:p>
+        </p:txBody>
+      </p:sp>
+      <p:sp>
+        <p:nvSpPr>
+          <p:cNvPr id="4" name="TextBox 3"/>
+          <p:cNvSpPr txBox="1"/>
+          <p:nvPr/>
+        </p:nvSpPr>
+        <p:spPr>
+          <a:xfrm>
+            <a:off x="457200" y="1371600"/>
+            <a:ext cx="7772400" cy="4572000"/>
+          </a:xfrm>
+          <a:prstGeom prst="rect">
+            <a:avLst/>
+          </a:prstGeom>
+          <a:noFill/>
+        </p:spPr>
+        <p:txBody>
+          <a:bodyPr wrap="square">
+            <a:spAutoFit/>
+          </a:bodyPr>
+          <a:lstStyle/>
+          <a:p>
+            <a:pPr>
+              <a:spcAft>
+                <a:spcPts val="600"/>
+              </a:spcAft>
+              <a:defRPr sz="1400">
+                <a:solidFill>
+                  <a:srgbClr val="222222"/>
+                </a:solidFill>
+              </a:defRPr>
+            </a:pPr>
+            <a:r>
+              <a:t>• Atelier : création d'un modèle de document Master (template .dotx) avec styles personnalisés</a:t>
+            </a:r>
+          </a:p>
+          <a:p>
+            <a:pPr>
+              <a:spcAft>
+                <a:spcPts val="600"/>
+              </a:spcAft>
+              <a:defRPr sz="1400">
+                <a:solidFill>
+                  <a:srgbClr val="222222"/>
+                </a:solidFill>
+              </a:defRPr>
+            </a:pPr>
+            <a:r>
+              <a:t>• TP : intégration Zotero dans Word — citations et bibliographies</a:t>
+            </a:r>
+          </a:p>
+          <a:p>
+            <a:pPr>
+              <a:spcAft>
+                <a:spcPts val="600"/>
+              </a:spcAft>
+              <a:defRPr sz="1400">
+                <a:solidFill>
+                  <a:srgbClr val="222222"/>
+                </a:solidFill>
+              </a:defRPr>
+            </a:pPr>
+            <a:r>
+              <a:t>• Exercice : rédaction d'un chapitre-type en suivant les normes (page de garde PG-fr, styles, TDM, bibliographie)</a:t>
+            </a:r>
+          </a:p>
+        </p:txBody>
+      </p:sp>
+    </p:spTree>
+  </p:cSld>
+  <p:clrMapOvr>
+    <a:masterClrMapping/>
+  </p:clrMapOvr>
+</p:sld>
+</file>
+
+<file path=ppt/slides/slide7.xml><?xml version="1.0" encoding="utf-8"?>
+<p:sld xmlns:a="http://schemas.openxmlformats.org/drawingml/2006/main" xmlns:p="http://schemas.openxmlformats.org/presentationml/2006/main" xmlns:r="http://schemas.openxmlformats.org/officeDocument/2006/relationships">
+  <p:cSld>
+    <p:bg>
+      <p:bgPr>
+        <a:solidFill>
+          <a:srgbClr val="FFFFFF"/>
+        </a:solidFill>
+        <a:effectLst/>
+      </p:bgPr>
+    </p:bg>
+    <p:spTree>
+      <p:nvGrpSpPr>
+        <p:cNvPr id="1" name=""/>
+        <p:cNvGrpSpPr/>
+        <p:nvPr/>
+      </p:nvGrpSpPr>
+      <p:grpSpPr/>
+      <p:sp>
+        <p:nvSpPr>
+          <p:cNvPr id="2" name="Rectangle 1"/>
+          <p:cNvSpPr/>
+          <p:nvPr/>
+        </p:nvSpPr>
+        <p:spPr>
+          <a:xfrm>
+            <a:off x="0" y="0"/>
+            <a:ext cx="109728" cy="6858000"/>
+          </a:xfrm>
+          <a:prstGeom prst="rect">
+            <a:avLst/>
+          </a:prstGeom>
+          <a:solidFill>
+            <a:srgbClr val="2C6E49"/>
+          </a:solidFill>
+          <a:ln>
+            <a:noFill/>
+          </a:ln>
+        </p:spPr>
+        <p:style>
+          <a:lnRef idx="1">
+            <a:schemeClr val="accent1"/>
+          </a:lnRef>
+          <a:fillRef idx="3">
+            <a:schemeClr val="accent1"/>
+          </a:fillRef>
+          <a:effectRef idx="2">
+            <a:schemeClr val="accent1"/>
+          </a:effectRef>
+          <a:fontRef idx="minor">
+            <a:schemeClr val="lt1"/>
+          </a:fontRef>
+        </p:style>
+        <p:txBody>
+          <a:bodyPr rtlCol="0" anchor="ctr"/>
+          <a:lstStyle/>
+          <a:p>
+            <a:pPr algn="ctr"/>
+          </a:p>
+        </p:txBody>
+      </p:sp>
+      <p:sp>
+        <p:nvSpPr>
+          <p:cNvPr id="3" name="TextBox 2"/>
+          <p:cNvSpPr txBox="1"/>
+          <p:nvPr/>
+        </p:nvSpPr>
+        <p:spPr>
+          <a:xfrm>
+            <a:off x="457200" y="365760"/>
+            <a:ext cx="8229600" cy="640080"/>
+          </a:xfrm>
+          <a:prstGeom prst="rect">
+            <a:avLst/>
+          </a:prstGeom>
+          <a:noFill/>
+        </p:spPr>
+        <p:txBody>
+          <a:bodyPr wrap="square">
+            <a:spAutoFit/>
+          </a:bodyPr>
+          <a:lstStyle/>
+          <a:p>
+            <a:pPr algn="l">
+              <a:defRPr sz="2200" b="1">
+                <a:solidFill>
+                  <a:srgbClr val="1A5C33"/>
+                </a:solidFill>
+              </a:defRPr>
+            </a:pPr>
+            <a:r>
+              <a:t>Activités d'évaluation</a:t>
+            </a:r>
+          </a:p>
+        </p:txBody>
+      </p:sp>
+      <p:sp>
+        <p:nvSpPr>
+          <p:cNvPr id="4" name="TextBox 3"/>
+          <p:cNvSpPr txBox="1"/>
+          <p:nvPr/>
+        </p:nvSpPr>
+        <p:spPr>
+          <a:xfrm>
+            <a:off x="457200" y="1371600"/>
+            <a:ext cx="7772400" cy="4572000"/>
+          </a:xfrm>
+          <a:prstGeom prst="rect">
+            <a:avLst/>
+          </a:prstGeom>
+          <a:noFill/>
+        </p:spPr>
+        <p:txBody>
+          <a:bodyPr wrap="square">
+            <a:spAutoFit/>
+          </a:bodyPr>
+          <a:lstStyle/>
+          <a:p>
+            <a:pPr>
+              <a:spcAft>
+                <a:spcPts val="600"/>
+              </a:spcAft>
+              <a:defRPr sz="1400">
+                <a:solidFill>
+                  <a:srgbClr val="222222"/>
+                </a:solidFill>
+              </a:defRPr>
+            </a:pPr>
+            <a:r>
+              <a:t>• QCM styles, sections, tables automatiques, normes typographiques</a:t>
+            </a:r>
+          </a:p>
+          <a:p>
+            <a:pPr>
+              <a:spcAft>
+                <a:spcPts val="600"/>
+              </a:spcAft>
+              <a:defRPr sz="1400">
+                <a:solidFill>
+                  <a:srgbClr val="222222"/>
+                </a:solidFill>
+              </a:defRPr>
+            </a:pPr>
+            <a:r>
+              <a:t>• TP noté : document Word structuré avec citations Zotero et bibliographie</a:t>
+            </a:r>
+          </a:p>
+        </p:txBody>
+      </p:sp>
+    </p:spTree>
+  </p:cSld>
+  <p:clrMapOvr>
+    <a:masterClrMapping/>
+  </p:clrMapOvr>
+</p:sld>
+</file>
+
+<file path=ppt/slides/slide8.xml><?xml version="1.0" encoding="utf-8"?>
+<p:sld xmlns:a="http://schemas.openxmlformats.org/drawingml/2006/main" xmlns:p="http://schemas.openxmlformats.org/presentationml/2006/main" xmlns:r="http://schemas.openxmlformats.org/officeDocument/2006/relationships">
+  <p:cSld>
+    <p:bg>
+      <p:bgPr>
+        <a:solidFill>
+          <a:srgbClr val="FFFFFF"/>
+        </a:solidFill>
+        <a:effectLst/>
+      </p:bgPr>
+    </p:bg>
+    <p:spTree>
+      <p:nvGrpSpPr>
+        <p:cNvPr id="1" name=""/>
+        <p:cNvGrpSpPr/>
+        <p:nvPr/>
+      </p:nvGrpSpPr>
+      <p:grpSpPr/>
+      <p:sp>
+        <p:nvSpPr>
+          <p:cNvPr id="2" name="Rectangle 1"/>
+          <p:cNvSpPr/>
+          <p:nvPr/>
+        </p:nvSpPr>
+        <p:spPr>
+          <a:xfrm>
+            <a:off x="0" y="0"/>
+            <a:ext cx="109728" cy="6858000"/>
+          </a:xfrm>
+          <a:prstGeom prst="rect">
+            <a:avLst/>
+          </a:prstGeom>
+          <a:solidFill>
+            <a:srgbClr val="2C6E49"/>
+          </a:solidFill>
+          <a:ln>
+            <a:noFill/>
+          </a:ln>
+        </p:spPr>
+        <p:style>
+          <a:lnRef idx="1">
+            <a:schemeClr val="accent1"/>
+          </a:lnRef>
+          <a:fillRef idx="3">
+            <a:schemeClr val="accent1"/>
+          </a:fillRef>
+          <a:effectRef idx="2">
+            <a:schemeClr val="accent1"/>
+          </a:effectRef>
+          <a:fontRef idx="minor">
+            <a:schemeClr val="lt1"/>
+          </a:fontRef>
+        </p:style>
+        <p:txBody>
+          <a:bodyPr rtlCol="0" anchor="ctr"/>
+          <a:lstStyle/>
+          <a:p>
+            <a:pPr algn="ctr"/>
+          </a:p>
+        </p:txBody>
+      </p:sp>
+      <p:sp>
+        <p:nvSpPr>
+          <p:cNvPr id="3" name="TextBox 2"/>
+          <p:cNvSpPr txBox="1"/>
+          <p:nvPr/>
+        </p:nvSpPr>
+        <p:spPr>
+          <a:xfrm>
+            <a:off x="457200" y="365760"/>
+            <a:ext cx="8229600" cy="640080"/>
+          </a:xfrm>
+          <a:prstGeom prst="rect">
+            <a:avLst/>
+          </a:prstGeom>
+          <a:noFill/>
+        </p:spPr>
+        <p:txBody>
+          <a:bodyPr wrap="square">
+            <a:spAutoFit/>
+          </a:bodyPr>
+          <a:lstStyle/>
+          <a:p>
+            <a:pPr algn="l">
+              <a:defRPr sz="2200" b="1">
+                <a:solidFill>
+                  <a:srgbClr val="1A5C33"/>
+                </a:solidFill>
+              </a:defRPr>
+            </a:pPr>
+            <a:r>
+              <a:t>Bibliographie et ressources externes</a:t>
+            </a:r>
+          </a:p>
+        </p:txBody>
+      </p:sp>
+      <p:sp>
+        <p:nvSpPr>
+          <p:cNvPr id="4" name="TextBox 3"/>
+          <p:cNvSpPr txBox="1"/>
+          <p:nvPr/>
+        </p:nvSpPr>
+        <p:spPr>
+          <a:xfrm>
+            <a:off x="457200" y="1371600"/>
+            <a:ext cx="7772400" cy="4572000"/>
+          </a:xfrm>
+          <a:prstGeom prst="rect">
+            <a:avLst/>
+          </a:prstGeom>
+          <a:noFill/>
+        </p:spPr>
+        <p:txBody>
+          <a:bodyPr wrap="square">
+            <a:spAutoFit/>
+          </a:bodyPr>
+          <a:lstStyle/>
+          <a:p>
+            <a:pPr>
+              <a:spcAft>
+                <a:spcPts val="600"/>
+              </a:spcAft>
+              <a:defRPr sz="1400">
+                <a:solidFill>
+                  <a:srgbClr val="222222"/>
+                </a:solidFill>
+              </a:defRPr>
+            </a:pPr>
+            <a:r>
+              <a:t>• Template PG-fr.docx (page de garde institutionnelle Univ-Mosta)</a:t>
+            </a:r>
+          </a:p>
+          <a:p>
+            <a:pPr>
+              <a:spcAft>
+                <a:spcPts val="600"/>
+              </a:spcAft>
+              <a:defRPr sz="1400">
+                <a:solidFill>
+                  <a:srgbClr val="222222"/>
+                </a:solidFill>
+              </a:defRPr>
+            </a:pPr>
+            <a:r>
+              <a:t>• Guide de rédaction du mémoire de Master — Université de Mostaganem</a:t>
+            </a:r>
+          </a:p>
+          <a:p>
+            <a:pPr>
+              <a:spcAft>
+                <a:spcPts val="600"/>
+              </a:spcAft>
+              <a:defRPr sz="1400">
+                <a:solidFill>
+                  <a:srgbClr val="222222"/>
+                </a:solidFill>
+              </a:defRPr>
+            </a:pPr>
+            <a:r>
+              <a:t>• APA 7th — Publication Manual ; MLA Handbook 9th ed.</a:t>
+            </a:r>
+          </a:p>
+          <a:p>
+            <a:pPr>
+              <a:spcAft>
+                <a:spcPts val="600"/>
+              </a:spcAft>
+              <a:defRPr sz="1400">
+                <a:solidFill>
+                  <a:srgbClr val="222222"/>
+                </a:solidFill>
+              </a:defRPr>
+            </a:pPr>
+            <a:r>
+              <a:t>• Eco, U. (1977).Come si fa una tesi di laurea. (trad.Comment écrire sa thèse)</a:t>
+            </a:r>
+          </a:p>
+          <a:p>
+            <a:pPr>
+              <a:spcAft>
+                <a:spcPts val="600"/>
+              </a:spcAft>
+              <a:defRPr sz="1400">
+                <a:solidFill>
+                  <a:srgbClr val="222222"/>
+                </a:solidFill>
+              </a:defRPr>
+            </a:pPr>
+            <a:r>
+              <a:t>• Zotero — Guide d'utilisation avancée</a:t>
+            </a:r>
+          </a:p>
+          <a:p>
+            <a:pPr>
+              <a:spcAft>
+                <a:spcPts val="600"/>
+              </a:spcAft>
+              <a:defRPr sz="1400">
+                <a:solidFill>
+                  <a:srgbClr val="222222"/>
+                </a:solidFill>
+              </a:defRPr>
+            </a:pPr>
+            <a:r>
+              <a:t>• Contact enseignant :BELACEL Madani —madani.belacel@univ-mosta.dz</a:t>
+            </a:r>
+          </a:p>
+        </p:txBody>
+      </p:sp>
+    </p:spTree>
+  </p:cSld>
+  <p:clrMapOvr>
+    <a:masterClrMapping/>
+  </p:clrMapOvr>
+</p:sld>
+</file>
+
+<file path=ppt/slides/slide9.xml><?xml version="1.0" encoding="utf-8"?>
+<p:sld xmlns:a="http://schemas.openxmlformats.org/drawingml/2006/main" xmlns:p="http://schemas.openxmlformats.org/presentationml/2006/main" xmlns:r="http://schemas.openxmlformats.org/officeDocument/2006/relationships">
+  <p:cSld>
+    <p:bg>
+      <p:bgPr>
+        <a:solidFill>
+          <a:srgbClr val="FFFFFF"/>
+        </a:solidFill>
+        <a:effectLst/>
+      </p:bgPr>
+    </p:bg>
+    <p:spTree>
+      <p:nvGrpSpPr>
+        <p:cNvPr id="1" name=""/>
+        <p:cNvGrpSpPr/>
+        <p:nvPr/>
+      </p:nvGrpSpPr>
+      <p:grpSpPr/>
+      <p:sp>
+        <p:nvSpPr>
+          <p:cNvPr id="2" name="Rectangle 1"/>
+          <p:cNvSpPr/>
+          <p:nvPr/>
+        </p:nvSpPr>
+        <p:spPr>
+          <a:xfrm>
+            <a:off x="0" y="0"/>
+            <a:ext cx="109728" cy="6858000"/>
+          </a:xfrm>
+          <a:prstGeom prst="rect">
+            <a:avLst/>
+          </a:prstGeom>
+          <a:solidFill>
+            <a:srgbClr val="2C6E49"/>
+          </a:solidFill>
+          <a:ln>
+            <a:noFill/>
+          </a:ln>
+        </p:spPr>
+        <p:style>
+          <a:lnRef idx="1">
+            <a:schemeClr val="accent1"/>
+          </a:lnRef>
+          <a:fillRef idx="3">
+            <a:schemeClr val="accent1"/>
+          </a:fillRef>
+          <a:effectRef idx="2">
+            <a:schemeClr val="accent1"/>
+          </a:effectRef>
+          <a:fontRef idx="minor">
+            <a:schemeClr val="lt1"/>
+          </a:fontRef>
+        </p:style>
+        <p:txBody>
+          <a:bodyPr rtlCol="0" anchor="ctr"/>
+          <a:lstStyle/>
+          <a:p>
+            <a:pPr algn="ctr"/>
+          </a:p>
+        </p:txBody>
+      </p:sp>
+      <p:sp>
+        <p:nvSpPr>
+          <p:cNvPr id="3" name="TextBox 2"/>
+          <p:cNvSpPr txBox="1"/>
+          <p:nvPr/>
+        </p:nvSpPr>
+        <p:spPr>
+          <a:xfrm>
+            <a:off x="457200" y="365760"/>
+            <a:ext cx="8229600" cy="640080"/>
+          </a:xfrm>
+          <a:prstGeom prst="rect">
+            <a:avLst/>
+          </a:prstGeom>
+          <a:noFill/>
+        </p:spPr>
+        <p:txBody>
+          <a:bodyPr wrap="square">
+            <a:spAutoFit/>
+          </a:bodyPr>
+          <a:lstStyle/>
+          <a:p>
+            <a:pPr algn="l">
+              <a:defRPr sz="2200" b="1">
+                <a:solidFill>
+                  <a:srgbClr val="1A5C33"/>
+                </a:solidFill>
+              </a:defRPr>
+            </a:pPr>
+            <a:r>
+              <a:t>Contexte réglementaire algérien</a:t>
+            </a:r>
+          </a:p>
+        </p:txBody>
+      </p:sp>
+      <p:sp>
+        <p:nvSpPr>
+          <p:cNvPr id="4" name="TextBox 3"/>
+          <p:cNvSpPr txBox="1"/>
+          <p:nvPr/>
+        </p:nvSpPr>
+        <p:spPr>
+          <a:xfrm>
+            <a:off x="457200" y="1371600"/>
+            <a:ext cx="7772400" cy="4572000"/>
+          </a:xfrm>
+          <a:prstGeom prst="rect">
+            <a:avLst/>
+          </a:prstGeom>
+          <a:noFill/>
+        </p:spPr>
+        <p:txBody>
+          <a:bodyPr wrap="square">
+            <a:spAutoFit/>
+          </a:bodyPr>
+          <a:lstStyle/>
+          <a:p>
+            <a:pPr>
+              <a:spcAft>
+                <a:spcPts val="600"/>
+              </a:spcAft>
+              <a:defRPr sz="1400">
+                <a:solidFill>
+                  <a:srgbClr val="222222"/>
+                </a:solidFill>
+              </a:defRPr>
+            </a:pPr>
+            <a:r>
+              <a:t>• Décision n° 75du 31 mars 2021 relative au dépôt électronique des mémoires de Master : obligation de déposer le mémoire via la plateforme DLN (Dépôt Légal Numérique) au formatPDF/A. Ce format garantit la pérennité du document (polices embarquées, métadonnées, structure balisée).</a:t>
+            </a:r>
+          </a:p>
+          <a:p>
+            <a:pPr>
+              <a:spcAft>
+                <a:spcPts val="600"/>
+              </a:spcAft>
+              <a:defRPr sz="1400">
+                <a:solidFill>
+                  <a:srgbClr val="222222"/>
+                </a:solidFill>
+              </a:defRPr>
+            </a:pPr>
+            <a:r>
+              <a:t>• Arrêté n° 933du 28 juillet 2016 : le mémoire de Master constitue un travail de recherche personnel dont la présentation formelle est évaluée. La maîtrise des outils de traitement de texte est une compétence méthodologique évaluée dans l'unité UEM 1.1.</a:t>
+            </a:r>
+          </a:p>
+          <a:p>
+            <a:pPr>
+              <a:spcAft>
+                <a:spcPts val="600"/>
+              </a:spcAft>
+              <a:defRPr sz="1400">
+                <a:solidFill>
+                  <a:srgbClr val="222222"/>
+                </a:solidFill>
+              </a:defRPr>
+            </a:pPr>
+            <a:r>
+              <a:t>• Note ministérielle n° 133du 15 février 2022 : harmonisation des pages de garde des mémoires de Master. Tous les établissements algériens doivent utiliser une page de garde standardisée avec les éléments suivants :</a:t>
+            </a:r>
+            <a:br/>
+            <a:r>
+              <a:t>- Logo du ministère + logo de l'université</a:t>
+            </a:r>
+            <a:br/>
+            <a:r>
+              <a:t>- Intitulé du master et de la spécialité</a:t>
+            </a:r>
+            <a:br/>
+            <a:r>
+              <a:t>- Titre du mémoire, nom du candidat et du directeur</a:t>
+            </a:r>
+            <a:br/>
+            <a:r>
+              <a:t>- Année universitaire</a:t>
+            </a:r>
+          </a:p>
+        </p:txBody>
+      </p:sp>
+    </p:spTree>
+  </p:cSld>
+  <p:clrMapOvr>
+    <a:masterClrMapping/>
+  </p:clrMapOvr>
 </p:sld>
 </file>
 
@@ -4975,319 +6220,4 @@
   </a:objectDefaults>
   <a:extraClrSchemeLst/>
 </a:theme>
-</file>
-
-<file path=ppt/theme/theme2.xml><?xml version="1.0" encoding="utf-8"?>
-<a:theme xmlns:a="http://schemas.openxmlformats.org/drawingml/2006/main" name="Thème Office">
-  <a:themeElements>
-    <a:clrScheme name="Office">
-      <a:dk1>
-        <a:sysClr val="windowText" lastClr="000000"/>
-      </a:dk1>
-      <a:lt1>
-        <a:sysClr val="window" lastClr="FFFFFF"/>
-      </a:lt1>
-      <a:dk2>
-        <a:srgbClr val="0E2841"/>
-      </a:dk2>
-      <a:lt2>
-        <a:srgbClr val="E8E8E8"/>
-      </a:lt2>
-      <a:accent1>
-        <a:srgbClr val="156082"/>
-      </a:accent1>
-      <a:accent2>
-        <a:srgbClr val="E97132"/>
-      </a:accent2>
-      <a:accent3>
-        <a:srgbClr val="196B24"/>
-      </a:accent3>
-      <a:accent4>
-        <a:srgbClr val="0F9ED5"/>
-      </a:accent4>
-      <a:accent5>
-        <a:srgbClr val="A02B93"/>
-      </a:accent5>
-      <a:accent6>
-        <a:srgbClr val="4EA72E"/>
-      </a:accent6>
-      <a:hlink>
-        <a:srgbClr val="467886"/>
-      </a:hlink>
-      <a:folHlink>
-        <a:srgbClr val="96607D"/>
-      </a:folHlink>
-    </a:clrScheme>
-    <a:fontScheme name="Office">
-      <a:majorFont>
-        <a:latin typeface="Aptos Display" panose="02110004020202020204"/>
-        <a:ea typeface=""/>
-        <a:cs typeface=""/>
-        <a:font script="Jpan" typeface="游ゴシック Light"/>
-        <a:font script="Hang" typeface="맑은 고딕"/>
-        <a:font script="Hans" typeface="等线 Light"/>
-        <a:font script="Hant" typeface="新細明體"/>
-        <a:font script="Arab" typeface="Times New Roman"/>
-        <a:font script="Hebr" typeface="Times New Roman"/>
-        <a:font script="Thai" typeface="Angsana New"/>
-        <a:font script="Ethi" typeface="Nyala"/>
-        <a:font script="Beng" typeface="Vrinda"/>
-        <a:font script="Gujr" typeface="Shruti"/>
-        <a:font script="Khmr" typeface="MoolBoran"/>
-        <a:font script="Knda" typeface="Tunga"/>
-        <a:font script="Guru" typeface="Raavi"/>
-        <a:font script="Cans" typeface="Euphemia"/>
-        <a:font script="Cher" typeface="Plantagenet Cherokee"/>
-        <a:font script="Yiii" typeface="Microsoft Yi Baiti"/>
-        <a:font script="Tibt" typeface="Microsoft Himalaya"/>
-        <a:font script="Thaa" typeface="MV Boli"/>
-        <a:font script="Deva" typeface="Mangal"/>
-        <a:font script="Telu" typeface="Gautami"/>
-        <a:font script="Taml" typeface="Latha"/>
-        <a:font script="Syrc" typeface="Estrangelo Edessa"/>
-        <a:font script="Orya" typeface="Kalinga"/>
-        <a:font script="Mlym" typeface="Kartika"/>
-        <a:font script="Laoo" typeface="DokChampa"/>
-        <a:font script="Sinh" typeface="Iskoola Pota"/>
-        <a:font script="Mong" typeface="Mongolian Baiti"/>
-        <a:font script="Viet" typeface="Times New Roman"/>
-        <a:font script="Uigh" typeface="Microsoft Uighur"/>
-        <a:font script="Geor" typeface="Sylfaen"/>
-        <a:font script="Armn" typeface="Arial"/>
-        <a:font script="Bugi" typeface="Leelawadee UI"/>
-        <a:font script="Bopo" typeface="Microsoft JhengHei"/>
-        <a:font script="Java" typeface="Javanese Text"/>
-        <a:font script="Lisu" typeface="Segoe UI"/>
-        <a:font script="Mymr" typeface="Myanmar Text"/>
-        <a:font script="Nkoo" typeface="Ebrima"/>
-        <a:font script="Olck" typeface="Nirmala UI"/>
-        <a:font script="Osma" typeface="Ebrima"/>
-        <a:font script="Phag" typeface="Phagspa"/>
-        <a:font script="Syrn" typeface="Estrangelo Edessa"/>
-        <a:font script="Syrj" typeface="Estrangelo Edessa"/>
-        <a:font script="Syre" typeface="Estrangelo Edessa"/>
-        <a:font script="Sora" typeface="Nirmala UI"/>
-        <a:font script="Tale" typeface="Microsoft Tai Le"/>
-        <a:font script="Talu" typeface="Microsoft New Tai Lue"/>
-        <a:font script="Tfng" typeface="Ebrima"/>
-      </a:majorFont>
-      <a:minorFont>
-        <a:latin typeface="Aptos" panose="02110004020202020204"/>
-        <a:ea typeface=""/>
-        <a:cs typeface=""/>
-        <a:font script="Jpan" typeface="游ゴシック"/>
-        <a:font script="Hang" typeface="맑은 고딕"/>
-        <a:font script="Hans" typeface="等线"/>
-        <a:font script="Hant" typeface="新細明體"/>
-        <a:font script="Arab" typeface="Arial"/>
-        <a:font script="Hebr" typeface="Arial"/>
-        <a:font script="Thai" typeface="Cordia New"/>
-        <a:font script="Ethi" typeface="Nyala"/>
-        <a:font script="Beng" typeface="Vrinda"/>
-        <a:font script="Gujr" typeface="Shruti"/>
-        <a:font script="Khmr" typeface="DaunPenh"/>
-        <a:font script="Knda" typeface="Tunga"/>
-        <a:font script="Guru" typeface="Raavi"/>
-        <a:font script="Cans" typeface="Euphemia"/>
-        <a:font script="Cher" typeface="Plantagenet Cherokee"/>
-        <a:font script="Yiii" typeface="Microsoft Yi Baiti"/>
-        <a:font script="Tibt" typeface="Microsoft Himalaya"/>
-        <a:font script="Thaa" typeface="MV Boli"/>
-        <a:font script="Deva" typeface="Mangal"/>
-        <a:font script="Telu" typeface="Gautami"/>
-        <a:font script="Taml" typeface="Latha"/>
-        <a:font script="Syrc" typeface="Estrangelo Edessa"/>
-        <a:font script="Orya" typeface="Kalinga"/>
-        <a:font script="Mlym" typeface="Kartika"/>
-        <a:font script="Laoo" typeface="DokChampa"/>
-        <a:font script="Sinh" typeface="Iskoola Pota"/>
-        <a:font script="Mong" typeface="Mongolian Baiti"/>
-        <a:font script="Viet" typeface="Arial"/>
-        <a:font script="Uigh" typeface="Microsoft Uighur"/>
-        <a:font script="Geor" typeface="Sylfaen"/>
-        <a:font script="Armn" typeface="Arial"/>
-        <a:font script="Bugi" typeface="Leelawadee UI"/>
-        <a:font script="Bopo" typeface="Microsoft JhengHei"/>
-        <a:font script="Java" typeface="Javanese Text"/>
-        <a:font script="Lisu" typeface="Segoe UI"/>
-        <a:font script="Mymr" typeface="Myanmar Text"/>
-        <a:font script="Nkoo" typeface="Ebrima"/>
-        <a:font script="Olck" typeface="Nirmala UI"/>
-        <a:font script="Osma" typeface="Ebrima"/>
-        <a:font script="Phag" typeface="Phagspa"/>
-        <a:font script="Syrn" typeface="Estrangelo Edessa"/>
-        <a:font script="Syrj" typeface="Estrangelo Edessa"/>
-        <a:font script="Syre" typeface="Estrangelo Edessa"/>
-        <a:font script="Sora" typeface="Nirmala UI"/>
-        <a:font script="Tale" typeface="Microsoft Tai Le"/>
-        <a:font script="Talu" typeface="Microsoft New Tai Lue"/>
-        <a:font script="Tfng" typeface="Ebrima"/>
-      </a:minorFont>
-    </a:fontScheme>
-    <a:fmtScheme name="Office">
-      <a:fillStyleLst>
-        <a:solidFill>
-          <a:schemeClr val="phClr"/>
-        </a:solidFill>
-        <a:gradFill rotWithShape="1">
-          <a:gsLst>
-            <a:gs pos="0">
-              <a:schemeClr val="phClr">
-                <a:lumMod val="110000"/>
-                <a:satMod val="105000"/>
-                <a:tint val="67000"/>
-              </a:schemeClr>
-            </a:gs>
-            <a:gs pos="50000">
-              <a:schemeClr val="phClr">
-                <a:lumMod val="105000"/>
-                <a:satMod val="103000"/>
-                <a:tint val="73000"/>
-              </a:schemeClr>
-            </a:gs>
-            <a:gs pos="100000">
-              <a:schemeClr val="phClr">
-                <a:lumMod val="105000"/>
-                <a:satMod val="109000"/>
-                <a:tint val="81000"/>
-              </a:schemeClr>
-            </a:gs>
-          </a:gsLst>
-          <a:lin ang="5400000" scaled="0"/>
-        </a:gradFill>
-        <a:gradFill rotWithShape="1">
-          <a:gsLst>
-            <a:gs pos="0">
-              <a:schemeClr val="phClr">
-                <a:satMod val="103000"/>
-                <a:lumMod val="102000"/>
-                <a:tint val="94000"/>
-              </a:schemeClr>
-            </a:gs>
-            <a:gs pos="50000">
-              <a:schemeClr val="phClr">
-                <a:satMod val="110000"/>
-                <a:lumMod val="100000"/>
-                <a:shade val="100000"/>
-              </a:schemeClr>
-            </a:gs>
-            <a:gs pos="100000">
-              <a:schemeClr val="phClr">
-                <a:lumMod val="99000"/>
-                <a:satMod val="120000"/>
-                <a:shade val="78000"/>
-              </a:schemeClr>
-            </a:gs>
-          </a:gsLst>
-          <a:lin ang="5400000" scaled="0"/>
-        </a:gradFill>
-      </a:fillStyleLst>
-      <a:lnStyleLst>
-        <a:ln w="12700" cap="flat" cmpd="sng" algn="ctr">
-          <a:solidFill>
-            <a:schemeClr val="phClr"/>
-          </a:solidFill>
-          <a:prstDash val="solid"/>
-          <a:miter lim="800000"/>
-        </a:ln>
-        <a:ln w="19050" cap="flat" cmpd="sng" algn="ctr">
-          <a:solidFill>
-            <a:schemeClr val="phClr"/>
-          </a:solidFill>
-          <a:prstDash val="solid"/>
-          <a:miter lim="800000"/>
-        </a:ln>
-        <a:ln w="25400" cap="flat" cmpd="sng" algn="ctr">
-          <a:solidFill>
-            <a:schemeClr val="phClr"/>
-          </a:solidFill>
-          <a:prstDash val="solid"/>
-          <a:miter lim="800000"/>
-        </a:ln>
-      </a:lnStyleLst>
-      <a:effectStyleLst>
-        <a:effectStyle>
-          <a:effectLst/>
-        </a:effectStyle>
-        <a:effectStyle>
-          <a:effectLst/>
-        </a:effectStyle>
-        <a:effectStyle>
-          <a:effectLst>
-            <a:outerShdw blurRad="57150" dist="19050" dir="5400000" algn="ctr" rotWithShape="0">
-              <a:srgbClr val="000000">
-                <a:alpha val="63000"/>
-              </a:srgbClr>
-            </a:outerShdw>
-          </a:effectLst>
-        </a:effectStyle>
-      </a:effectStyleLst>
-      <a:bgFillStyleLst>
-        <a:solidFill>
-          <a:schemeClr val="phClr"/>
-        </a:solidFill>
-        <a:solidFill>
-          <a:schemeClr val="phClr">
-            <a:tint val="95000"/>
-            <a:satMod val="170000"/>
-          </a:schemeClr>
-        </a:solidFill>
-        <a:gradFill rotWithShape="1">
-          <a:gsLst>
-            <a:gs pos="0">
-              <a:schemeClr val="phClr">
-                <a:tint val="93000"/>
-                <a:satMod val="150000"/>
-                <a:shade val="98000"/>
-                <a:lumMod val="102000"/>
-              </a:schemeClr>
-            </a:gs>
-            <a:gs pos="50000">
-              <a:schemeClr val="phClr">
-                <a:tint val="98000"/>
-                <a:satMod val="130000"/>
-                <a:shade val="90000"/>
-                <a:lumMod val="103000"/>
-              </a:schemeClr>
-            </a:gs>
-            <a:gs pos="100000">
-              <a:schemeClr val="phClr">
-                <a:shade val="63000"/>
-                <a:satMod val="120000"/>
-              </a:schemeClr>
-            </a:gs>
-          </a:gsLst>
-          <a:lin ang="5400000" scaled="0"/>
-        </a:gradFill>
-      </a:bgFillStyleLst>
-    </a:fmtScheme>
-  </a:themeElements>
-  <a:objectDefaults>
-    <a:lnDef>
-      <a:spPr/>
-      <a:bodyPr/>
-      <a:lstStyle/>
-      <a:style>
-        <a:lnRef idx="2">
-          <a:schemeClr val="accent1"/>
-        </a:lnRef>
-        <a:fillRef idx="0">
-          <a:schemeClr val="accent1"/>
-        </a:fillRef>
-        <a:effectRef idx="1">
-          <a:schemeClr val="accent1"/>
-        </a:effectRef>
-        <a:fontRef idx="minor">
-          <a:schemeClr val="tx1"/>
-        </a:fontRef>
-      </a:style>
-    </a:lnDef>
-  </a:objectDefaults>
-  <a:extraClrSchemeLst/>
-  <a:extLst>
-    <a:ext uri="{05A4C25C-085E-4340-85A3-A5531E510DB2}">
-      <thm15:themeFamily xmlns:thm15="http://schemas.microsoft.com/office/thememl/2012/main" name="Office Theme" id="{2E142A2C-CD16-42D6-873A-C26D2A0506FA}" vid="{1BDDFF52-6CD6-40A5-AB3C-68EB2F1E4D0A}"/>
-    </a:ext>
-  </a:extLst>
-</a:theme>
 </file>
--- a/cours/Module TIC/Département Français/Master 1 - Langue et Culture/Cours_TIC_04_Microsoft_Word_FR.pptx
+++ b/cours/Module TIC/Département Français/Master 1 - Langue et Culture/Cours_TIC_04_Microsoft_Word_FR.pptx
@@ -2850,7 +2850,7 @@
           <a:solidFill>
             <a:schemeClr val="tx1"/>
           </a:solidFill>
-          <a:latin typeface="+mj-lt"/>
+          <a:latin typeface="Poppins"/>
           <a:ea typeface="+mj-ea"/>
           <a:cs typeface="+mj-cs"/>
         </a:defRPr>
@@ -2867,7 +2867,7 @@
           <a:solidFill>
             <a:schemeClr val="tx1"/>
           </a:solidFill>
-          <a:latin typeface="+mn-lt"/>
+          <a:latin typeface="Poppins"/>
           <a:ea typeface="+mn-ea"/>
           <a:cs typeface="+mn-cs"/>
         </a:defRPr>
@@ -2882,7 +2882,7 @@
           <a:solidFill>
             <a:schemeClr val="tx1"/>
           </a:solidFill>
-          <a:latin typeface="+mn-lt"/>
+          <a:latin typeface="Poppins"/>
           <a:ea typeface="+mn-ea"/>
           <a:cs typeface="+mn-cs"/>
         </a:defRPr>
@@ -2897,7 +2897,7 @@
           <a:solidFill>
             <a:schemeClr val="tx1"/>
           </a:solidFill>
-          <a:latin typeface="+mn-lt"/>
+          <a:latin typeface="Poppins"/>
           <a:ea typeface="+mn-ea"/>
           <a:cs typeface="+mn-cs"/>
         </a:defRPr>
@@ -2912,7 +2912,7 @@
           <a:solidFill>
             <a:schemeClr val="tx1"/>
           </a:solidFill>
-          <a:latin typeface="+mn-lt"/>
+          <a:latin typeface="Poppins"/>
           <a:ea typeface="+mn-ea"/>
           <a:cs typeface="+mn-cs"/>
         </a:defRPr>
@@ -2927,7 +2927,7 @@
           <a:solidFill>
             <a:schemeClr val="tx1"/>
           </a:solidFill>
-          <a:latin typeface="+mn-lt"/>
+          <a:latin typeface="Poppins"/>
           <a:ea typeface="+mn-ea"/>
           <a:cs typeface="+mn-cs"/>
         </a:defRPr>
@@ -2942,7 +2942,7 @@
           <a:solidFill>
             <a:schemeClr val="tx1"/>
           </a:solidFill>
-          <a:latin typeface="+mn-lt"/>
+          <a:latin typeface="Poppins"/>
           <a:ea typeface="+mn-ea"/>
           <a:cs typeface="+mn-cs"/>
         </a:defRPr>
@@ -2957,7 +2957,7 @@
           <a:solidFill>
             <a:schemeClr val="tx1"/>
           </a:solidFill>
-          <a:latin typeface="+mn-lt"/>
+          <a:latin typeface="Poppins"/>
           <a:ea typeface="+mn-ea"/>
           <a:cs typeface="+mn-cs"/>
         </a:defRPr>
@@ -2972,7 +2972,7 @@
           <a:solidFill>
             <a:schemeClr val="tx1"/>
           </a:solidFill>
-          <a:latin typeface="+mn-lt"/>
+          <a:latin typeface="Poppins"/>
           <a:ea typeface="+mn-ea"/>
           <a:cs typeface="+mn-cs"/>
         </a:defRPr>
@@ -2987,7 +2987,7 @@
           <a:solidFill>
             <a:schemeClr val="tx1"/>
           </a:solidFill>
-          <a:latin typeface="+mn-lt"/>
+          <a:latin typeface="Poppins"/>
           <a:ea typeface="+mn-ea"/>
           <a:cs typeface="+mn-cs"/>
         </a:defRPr>
@@ -3002,7 +3002,7 @@
           <a:solidFill>
             <a:schemeClr val="tx1"/>
           </a:solidFill>
-          <a:latin typeface="+mn-lt"/>
+          <a:latin typeface="Poppins"/>
           <a:ea typeface="+mn-ea"/>
           <a:cs typeface="+mn-cs"/>
         </a:defRPr>
@@ -3012,7 +3012,7 @@
           <a:solidFill>
             <a:schemeClr val="tx1"/>
           </a:solidFill>
-          <a:latin typeface="+mn-lt"/>
+          <a:latin typeface="Poppins"/>
           <a:ea typeface="+mn-ea"/>
           <a:cs typeface="+mn-cs"/>
         </a:defRPr>
@@ -3022,7 +3022,7 @@
           <a:solidFill>
             <a:schemeClr val="tx1"/>
           </a:solidFill>
-          <a:latin typeface="+mn-lt"/>
+          <a:latin typeface="Poppins"/>
           <a:ea typeface="+mn-ea"/>
           <a:cs typeface="+mn-cs"/>
         </a:defRPr>
@@ -3032,7 +3032,7 @@
           <a:solidFill>
             <a:schemeClr val="tx1"/>
           </a:solidFill>
-          <a:latin typeface="+mn-lt"/>
+          <a:latin typeface="Poppins"/>
           <a:ea typeface="+mn-ea"/>
           <a:cs typeface="+mn-cs"/>
         </a:defRPr>
@@ -3042,7 +3042,7 @@
           <a:solidFill>
             <a:schemeClr val="tx1"/>
           </a:solidFill>
-          <a:latin typeface="+mn-lt"/>
+          <a:latin typeface="Poppins"/>
           <a:ea typeface="+mn-ea"/>
           <a:cs typeface="+mn-cs"/>
         </a:defRPr>
@@ -3052,7 +3052,7 @@
           <a:solidFill>
             <a:schemeClr val="tx1"/>
           </a:solidFill>
-          <a:latin typeface="+mn-lt"/>
+          <a:latin typeface="Poppins"/>
           <a:ea typeface="+mn-ea"/>
           <a:cs typeface="+mn-cs"/>
         </a:defRPr>
@@ -3062,7 +3062,7 @@
           <a:solidFill>
             <a:schemeClr val="tx1"/>
           </a:solidFill>
-          <a:latin typeface="+mn-lt"/>
+          <a:latin typeface="Poppins"/>
           <a:ea typeface="+mn-ea"/>
           <a:cs typeface="+mn-cs"/>
         </a:defRPr>
@@ -3072,7 +3072,7 @@
           <a:solidFill>
             <a:schemeClr val="tx1"/>
           </a:solidFill>
-          <a:latin typeface="+mn-lt"/>
+          <a:latin typeface="Poppins"/>
           <a:ea typeface="+mn-ea"/>
           <a:cs typeface="+mn-cs"/>
         </a:defRPr>
@@ -3082,7 +3082,7 @@
           <a:solidFill>
             <a:schemeClr val="tx1"/>
           </a:solidFill>
-          <a:latin typeface="+mn-lt"/>
+          <a:latin typeface="Poppins"/>
           <a:ea typeface="+mn-ea"/>
           <a:cs typeface="+mn-cs"/>
         </a:defRPr>
@@ -3097,9 +3097,7 @@
   <p:cSld>
     <p:bg>
       <p:bgPr>
-        <a:solidFill>
-          <a:srgbClr val="1A5C33"/>
-        </a:solidFill>
+        <a:solidFill>val="006847"/&gt;</a:solidFill>
         <a:effectLst/>
       </p:bgPr>
     </p:bg>
@@ -3134,9 +3132,7 @@
           <a:p>
             <a:pPr algn="ctr">
               <a:defRPr sz="3200" b="1">
-                <a:solidFill>
-                  <a:srgbClr val="FFFFFF"/>
-                </a:solidFill>
+                <a:solidFill>val="FFFFFF"/&gt;</a:solidFill>
               </a:defRPr>
             </a:pPr>
             <a:r>
@@ -3169,9 +3165,7 @@
           <a:p>
             <a:pPr algn="ctr">
               <a:defRPr sz="2000" b="0">
-                <a:solidFill>
-                  <a:srgbClr val="C5D9C7"/>
-                </a:solidFill>
+                <a:solidFill>val="DFE5EA"/&gt;</a:solidFill>
               </a:defRPr>
             </a:pPr>
             <a:r>
@@ -3204,13 +3198,52 @@
           <a:p>
             <a:pPr algn="ctr">
               <a:defRPr sz="1600" b="0">
+                <a:solidFill>val="B7C9BE"/&gt;</a:solidFill>
+              </a:defRPr>
+            </a:pPr>
+            <a:r>
+              <a:t>Université de Mostaganem — MCB</a:t>
+            </a:r>
+          </a:p>
+        </p:txBody>
+      </p:sp>
+      <p:sp>
+        <p:nvSpPr>
+          <p:cNvPr id="990001" name="Pied de page FLE"/>
+          <p:cNvSpPr>
+            <a:spLocks noGrp="1"/>
+          </p:cNvSpPr>
+          <p:nvPr/>
+        </p:nvSpPr>
+        <p:spPr>
+          <a:xfrm>
+            <a:off x="2880360" y="914400"/>
+            <a:ext cx="4572000" cy="274320"/>
+          </a:xfrm>
+          <a:prstGeom prst="rect">
+            <a:avLst/>
+          </a:prstGeom>
+        </p:spPr>
+        <p:txBody>
+          <a:bodyPr anchor="b"/>
+          <a:lstStyle/>
+          <a:p>
+            <a:pPr algn="r">
+              <a:defRPr sz="900">
                 <a:solidFill>
-                  <a:srgbClr val="A0CFA0"/>
+                  <a:srgbClr val="9AA7B6"/>
                 </a:solidFill>
-              </a:defRPr>
-            </a:pPr>
-            <a:r>
-              <a:t>Université de Mostaganem — MCB</a:t>
+                <a:latin typeface="Poppins"/>
+              </a:defRPr>
+            </a:pPr>
+            <a:r>
+              <a:rPr lang="fr-FR" sz="900">
+                <a:solidFill>
+                  <a:srgbClr val="9AA7B6"/>
+                </a:solidFill>
+                <a:latin typeface="Poppins"/>
+              </a:rPr>
+              <a:t>Université de Mostaganem — Dr. Madani BELACEL</a:t>
             </a:r>
           </a:p>
         </p:txBody>
@@ -3228,9 +3261,7 @@
   <p:cSld>
     <p:bg>
       <p:bgPr>
-        <a:solidFill>
-          <a:srgbClr val="FFFFFF"/>
-        </a:solidFill>
+        <a:solidFill>val="FFFFFF"/&gt;</a:solidFill>
         <a:effectLst/>
       </p:bgPr>
     </p:bg>
@@ -3255,9 +3286,7 @@
           <a:prstGeom prst="rect">
             <a:avLst/>
           </a:prstGeom>
-          <a:solidFill>
-            <a:srgbClr val="2C6E49"/>
-          </a:solidFill>
+          <a:solidFill>val="00875B"/&gt;</a:solidFill>
           <a:ln>
             <a:noFill/>
           </a:ln>
@@ -3308,9 +3337,7 @@
           <a:p>
             <a:pPr algn="l">
               <a:defRPr sz="2200" b="1">
-                <a:solidFill>
-                  <a:srgbClr val="1A5C33"/>
-                </a:solidFill>
+                <a:solidFill>val="006847"/&gt;</a:solidFill>
               </a:defRPr>
             </a:pPr>
             <a:r>
@@ -3346,133 +3373,156 @@
                 <a:spcPts val="600"/>
               </a:spcAft>
               <a:defRPr sz="1400">
+                <a:solidFill>val="22344A"/&gt;</a:solidFill>
+              </a:defRPr>
+            </a:pPr>
+            <a:r>
+              <a:t>• Introduction : Word comme outil de rédaction scientifique</a:t>
+            </a:r>
+          </a:p>
+          <a:p>
+            <a:pPr>
+              <a:spcAft>
+                <a:spcPts val="600"/>
+              </a:spcAft>
+              <a:defRPr sz="1400">
+                <a:solidFill>val="22344A"/&gt;</a:solidFill>
+              </a:defRPr>
+            </a:pPr>
+            <a:r>
+              <a:t>• L'interface Word pour les documents longs</a:t>
+            </a:r>
+          </a:p>
+          <a:p>
+            <a:pPr>
+              <a:spcAft>
+                <a:spcPts val="600"/>
+              </a:spcAft>
+              <a:defRPr sz="1400">
+                <a:solidFill>val="22344A"/&gt;</a:solidFill>
+              </a:defRPr>
+            </a:pPr>
+            <a:r>
+              <a:t>• Styles avancés et template Master</a:t>
+            </a:r>
+          </a:p>
+          <a:p>
+            <a:pPr>
+              <a:spcAft>
+                <a:spcPts val="600"/>
+              </a:spcAft>
+              <a:defRPr sz="1400">
+                <a:solidFill>val="22344A"/&gt;</a:solidFill>
+              </a:defRPr>
+            </a:pPr>
+            <a:r>
+              <a:t>• Gestion des sections et pagination</a:t>
+            </a:r>
+          </a:p>
+          <a:p>
+            <a:pPr>
+              <a:spcAft>
+                <a:spcPts val="600"/>
+              </a:spcAft>
+              <a:defRPr sz="1400">
+                <a:solidFill>val="22344A"/&gt;</a:solidFill>
+              </a:defRPr>
+            </a:pPr>
+            <a:r>
+              <a:t>• Tables automatisées (TDM, figures, tableaux)</a:t>
+            </a:r>
+          </a:p>
+          <a:p>
+            <a:pPr>
+              <a:spcAft>
+                <a:spcPts val="600"/>
+              </a:spcAft>
+              <a:defRPr sz="1400">
+                <a:solidFill>val="22344A"/&gt;</a:solidFill>
+              </a:defRPr>
+            </a:pPr>
+            <a:r>
+              <a:t>• Citations et bibliographie avec Zotero</a:t>
+            </a:r>
+          </a:p>
+          <a:p>
+            <a:pPr>
+              <a:spcAft>
+                <a:spcPts val="600"/>
+              </a:spcAft>
+              <a:defRPr sz="1400">
+                <a:solidFill>val="22344A"/&gt;</a:solidFill>
+              </a:defRPr>
+            </a:pPr>
+            <a:r>
+              <a:t>• Normes typographiques et page de garde institutionnelle</a:t>
+            </a:r>
+          </a:p>
+          <a:p>
+            <a:pPr>
+              <a:spcAft>
+                <a:spcPts val="600"/>
+              </a:spcAft>
+              <a:defRPr sz="1400">
+                <a:solidFill>val="22344A"/&gt;</a:solidFill>
+              </a:defRPr>
+            </a:pPr>
+            <a:r>
+              <a:t>• Export PDF/A et dépôt légal</a:t>
+            </a:r>
+          </a:p>
+          <a:p>
+            <a:pPr>
+              <a:spcAft>
+                <a:spcPts val="600"/>
+              </a:spcAft>
+              <a:defRPr sz="1400">
+                <a:solidFill>val="22344A"/&gt;</a:solidFill>
+              </a:defRPr>
+            </a:pPr>
+            <a:r>
+              <a:t>• Conclusion et transition vers Excel</a:t>
+            </a:r>
+          </a:p>
+        </p:txBody>
+      </p:sp>
+      <p:sp>
+        <p:nvSpPr>
+          <p:cNvPr id="990001" name="Pied de page FLE"/>
+          <p:cNvSpPr>
+            <a:spLocks noGrp="1"/>
+          </p:cNvSpPr>
+          <p:nvPr/>
+        </p:nvSpPr>
+        <p:spPr>
+          <a:xfrm>
+            <a:off x="-228600" y="6400800"/>
+            <a:ext cx="109728" cy="274320"/>
+          </a:xfrm>
+          <a:prstGeom prst="rect">
+            <a:avLst/>
+          </a:prstGeom>
+        </p:spPr>
+        <p:txBody>
+          <a:bodyPr anchor="b"/>
+          <a:lstStyle/>
+          <a:p>
+            <a:pPr algn="r">
+              <a:defRPr sz="900">
                 <a:solidFill>
-                  <a:srgbClr val="222222"/>
+                  <a:srgbClr val="9AA7B6"/>
                 </a:solidFill>
-              </a:defRPr>
-            </a:pPr>
-            <a:r>
-              <a:t>• Introduction : Word comme outil de rédaction scientifique</a:t>
-            </a:r>
-          </a:p>
-          <a:p>
-            <a:pPr>
-              <a:spcAft>
-                <a:spcPts val="600"/>
-              </a:spcAft>
-              <a:defRPr sz="1400">
+                <a:latin typeface="Poppins"/>
+              </a:defRPr>
+            </a:pPr>
+            <a:r>
+              <a:rPr lang="fr-FR" sz="900">
                 <a:solidFill>
-                  <a:srgbClr val="222222"/>
+                  <a:srgbClr val="9AA7B6"/>
                 </a:solidFill>
-              </a:defRPr>
-            </a:pPr>
-            <a:r>
-              <a:t>• L'interface Word pour les documents longs</a:t>
-            </a:r>
-          </a:p>
-          <a:p>
-            <a:pPr>
-              <a:spcAft>
-                <a:spcPts val="600"/>
-              </a:spcAft>
-              <a:defRPr sz="1400">
-                <a:solidFill>
-                  <a:srgbClr val="222222"/>
-                </a:solidFill>
-              </a:defRPr>
-            </a:pPr>
-            <a:r>
-              <a:t>• Styles avancés et template Master</a:t>
-            </a:r>
-          </a:p>
-          <a:p>
-            <a:pPr>
-              <a:spcAft>
-                <a:spcPts val="600"/>
-              </a:spcAft>
-              <a:defRPr sz="1400">
-                <a:solidFill>
-                  <a:srgbClr val="222222"/>
-                </a:solidFill>
-              </a:defRPr>
-            </a:pPr>
-            <a:r>
-              <a:t>• Gestion des sections et pagination</a:t>
-            </a:r>
-          </a:p>
-          <a:p>
-            <a:pPr>
-              <a:spcAft>
-                <a:spcPts val="600"/>
-              </a:spcAft>
-              <a:defRPr sz="1400">
-                <a:solidFill>
-                  <a:srgbClr val="222222"/>
-                </a:solidFill>
-              </a:defRPr>
-            </a:pPr>
-            <a:r>
-              <a:t>• Tables automatisées (TDM, figures, tableaux)</a:t>
-            </a:r>
-          </a:p>
-          <a:p>
-            <a:pPr>
-              <a:spcAft>
-                <a:spcPts val="600"/>
-              </a:spcAft>
-              <a:defRPr sz="1400">
-                <a:solidFill>
-                  <a:srgbClr val="222222"/>
-                </a:solidFill>
-              </a:defRPr>
-            </a:pPr>
-            <a:r>
-              <a:t>• Citations et bibliographie avec Zotero</a:t>
-            </a:r>
-          </a:p>
-          <a:p>
-            <a:pPr>
-              <a:spcAft>
-                <a:spcPts val="600"/>
-              </a:spcAft>
-              <a:defRPr sz="1400">
-                <a:solidFill>
-                  <a:srgbClr val="222222"/>
-                </a:solidFill>
-              </a:defRPr>
-            </a:pPr>
-            <a:r>
-              <a:t>• Normes typographiques et page de garde institutionnelle</a:t>
-            </a:r>
-          </a:p>
-          <a:p>
-            <a:pPr>
-              <a:spcAft>
-                <a:spcPts val="600"/>
-              </a:spcAft>
-              <a:defRPr sz="1400">
-                <a:solidFill>
-                  <a:srgbClr val="222222"/>
-                </a:solidFill>
-              </a:defRPr>
-            </a:pPr>
-            <a:r>
-              <a:t>• Export PDF/A et dépôt légal</a:t>
-            </a:r>
-          </a:p>
-          <a:p>
-            <a:pPr>
-              <a:spcAft>
-                <a:spcPts val="600"/>
-              </a:spcAft>
-              <a:defRPr sz="1400">
-                <a:solidFill>
-                  <a:srgbClr val="222222"/>
-                </a:solidFill>
-              </a:defRPr>
-            </a:pPr>
-            <a:r>
-              <a:t>• Conclusion et transition vers Excel</a:t>
+                <a:latin typeface="Poppins"/>
+              </a:rPr>
+              <a:t>Université de Mostaganem — Dr. Madani BELACEL</a:t>
             </a:r>
           </a:p>
         </p:txBody>
@@ -3490,9 +3540,7 @@
   <p:cSld>
     <p:bg>
       <p:bgPr>
-        <a:solidFill>
-          <a:srgbClr val="FFFFFF"/>
-        </a:solidFill>
+        <a:solidFill>val="FFFFFF"/&gt;</a:solidFill>
         <a:effectLst/>
       </p:bgPr>
     </p:bg>
@@ -3517,9 +3565,7 @@
           <a:prstGeom prst="rect">
             <a:avLst/>
           </a:prstGeom>
-          <a:solidFill>
-            <a:srgbClr val="2C6E49"/>
-          </a:solidFill>
+          <a:solidFill>val="00875B"/&gt;</a:solidFill>
           <a:ln>
             <a:noFill/>
           </a:ln>
@@ -3570,9 +3616,7 @@
           <a:p>
             <a:pPr algn="l">
               <a:defRPr sz="2200" b="1">
-                <a:solidFill>
-                  <a:srgbClr val="1A5C33"/>
-                </a:solidFill>
+                <a:solidFill>val="006847"/&gt;</a:solidFill>
               </a:defRPr>
             </a:pPr>
             <a:r>
@@ -3608,103 +3652,130 @@
                 <a:spcPts val="600"/>
               </a:spcAft>
               <a:defRPr sz="1400">
+                <a:solidFill>val="22344A"/&gt;</a:solidFill>
+              </a:defRPr>
+            </a:pPr>
+            <a:r>
+              <a:t>• En Licence, Word servait à rédiger des devoirs de 3 à 5 pages. En Master, vous allez produire unmémoire de 60 à 100 pagesavec :</a:t>
+            </a:r>
+          </a:p>
+          <a:p>
+            <a:pPr>
+              <a:spcAft>
+                <a:spcPts val="600"/>
+              </a:spcAft>
+              <a:defRPr sz="1400">
+                <a:solidFill>val="22344A"/&gt;</a:solidFill>
+              </a:defRPr>
+            </a:pPr>
+            <a:r>
+              <a:t>• Structure complexe (6-7 chapitres + annexes)</a:t>
+            </a:r>
+          </a:p>
+          <a:p>
+            <a:pPr>
+              <a:spcAft>
+                <a:spcPts val="600"/>
+              </a:spcAft>
+              <a:defRPr sz="1400">
+                <a:solidFill>val="22344A"/&gt;</a:solidFill>
+              </a:defRPr>
+            </a:pPr>
+            <a:r>
+              <a:t>• Pagination multiple (romaine pour préliminaires, arabe pour le corps)</a:t>
+            </a:r>
+          </a:p>
+          <a:p>
+            <a:pPr>
+              <a:spcAft>
+                <a:spcPts val="600"/>
+              </a:spcAft>
+              <a:defRPr sz="1400">
+                <a:solidFill>val="22344A"/&gt;</a:solidFill>
+              </a:defRPr>
+            </a:pPr>
+            <a:r>
+              <a:t>• Citations et bibliographie (30-80 références)</a:t>
+            </a:r>
+          </a:p>
+          <a:p>
+            <a:pPr>
+              <a:spcAft>
+                <a:spcPts val="600"/>
+              </a:spcAft>
+              <a:defRPr sz="1400">
+                <a:solidFill>val="22344A"/&gt;</a:solidFill>
+              </a:defRPr>
+            </a:pPr>
+            <a:r>
+              <a:t>• Tables des matières, figures, tableaux automatiques</a:t>
+            </a:r>
+          </a:p>
+          <a:p>
+            <a:pPr>
+              <a:spcAft>
+                <a:spcPts val="600"/>
+              </a:spcAft>
+              <a:defRPr sz="1400">
+                <a:solidFill>val="22344A"/&gt;</a:solidFill>
+              </a:defRPr>
+            </a:pPr>
+            <a:r>
+              <a:t>• Normes institutionnelles strictes</a:t>
+            </a:r>
+          </a:p>
+          <a:p>
+            <a:pPr>
+              <a:spcAft>
+                <a:spcPts val="600"/>
+              </a:spcAft>
+              <a:defRPr sz="1400">
+                <a:solidFill>val="22344A"/&gt;</a:solidFill>
+              </a:defRPr>
+            </a:pPr>
+            <a:r>
+              <a:t>• Un document bien formaté avec Word n'est pas un option — c'estune exigence académiqueévaluée.</a:t>
+            </a:r>
+          </a:p>
+        </p:txBody>
+      </p:sp>
+      <p:sp>
+        <p:nvSpPr>
+          <p:cNvPr id="990001" name="Pied de page FLE"/>
+          <p:cNvSpPr>
+            <a:spLocks noGrp="1"/>
+          </p:cNvSpPr>
+          <p:nvPr/>
+        </p:nvSpPr>
+        <p:spPr>
+          <a:xfrm>
+            <a:off x="-228600" y="6400800"/>
+            <a:ext cx="109728" cy="274320"/>
+          </a:xfrm>
+          <a:prstGeom prst="rect">
+            <a:avLst/>
+          </a:prstGeom>
+        </p:spPr>
+        <p:txBody>
+          <a:bodyPr anchor="b"/>
+          <a:lstStyle/>
+          <a:p>
+            <a:pPr algn="r">
+              <a:defRPr sz="900">
                 <a:solidFill>
-                  <a:srgbClr val="222222"/>
+                  <a:srgbClr val="9AA7B6"/>
                 </a:solidFill>
-              </a:defRPr>
-            </a:pPr>
-            <a:r>
-              <a:t>• En Licence, Word servait à rédiger des devoirs de 3 à 5 pages. En Master, vous allez produire unmémoire de 60 à 100 pagesavec :</a:t>
-            </a:r>
-          </a:p>
-          <a:p>
-            <a:pPr>
-              <a:spcAft>
-                <a:spcPts val="600"/>
-              </a:spcAft>
-              <a:defRPr sz="1400">
+                <a:latin typeface="Poppins"/>
+              </a:defRPr>
+            </a:pPr>
+            <a:r>
+              <a:rPr lang="fr-FR" sz="900">
                 <a:solidFill>
-                  <a:srgbClr val="222222"/>
+                  <a:srgbClr val="9AA7B6"/>
                 </a:solidFill>
-              </a:defRPr>
-            </a:pPr>
-            <a:r>
-              <a:t>• Structure complexe (6-7 chapitres + annexes)</a:t>
-            </a:r>
-          </a:p>
-          <a:p>
-            <a:pPr>
-              <a:spcAft>
-                <a:spcPts val="600"/>
-              </a:spcAft>
-              <a:defRPr sz="1400">
-                <a:solidFill>
-                  <a:srgbClr val="222222"/>
-                </a:solidFill>
-              </a:defRPr>
-            </a:pPr>
-            <a:r>
-              <a:t>• Pagination multiple (romaine pour préliminaires, arabe pour le corps)</a:t>
-            </a:r>
-          </a:p>
-          <a:p>
-            <a:pPr>
-              <a:spcAft>
-                <a:spcPts val="600"/>
-              </a:spcAft>
-              <a:defRPr sz="1400">
-                <a:solidFill>
-                  <a:srgbClr val="222222"/>
-                </a:solidFill>
-              </a:defRPr>
-            </a:pPr>
-            <a:r>
-              <a:t>• Citations et bibliographie (30-80 références)</a:t>
-            </a:r>
-          </a:p>
-          <a:p>
-            <a:pPr>
-              <a:spcAft>
-                <a:spcPts val="600"/>
-              </a:spcAft>
-              <a:defRPr sz="1400">
-                <a:solidFill>
-                  <a:srgbClr val="222222"/>
-                </a:solidFill>
-              </a:defRPr>
-            </a:pPr>
-            <a:r>
-              <a:t>• Tables des matières, figures, tableaux automatiques</a:t>
-            </a:r>
-          </a:p>
-          <a:p>
-            <a:pPr>
-              <a:spcAft>
-                <a:spcPts val="600"/>
-              </a:spcAft>
-              <a:defRPr sz="1400">
-                <a:solidFill>
-                  <a:srgbClr val="222222"/>
-                </a:solidFill>
-              </a:defRPr>
-            </a:pPr>
-            <a:r>
-              <a:t>• Normes institutionnelles strictes</a:t>
-            </a:r>
-          </a:p>
-          <a:p>
-            <a:pPr>
-              <a:spcAft>
-                <a:spcPts val="600"/>
-              </a:spcAft>
-              <a:defRPr sz="1400">
-                <a:solidFill>
-                  <a:srgbClr val="222222"/>
-                </a:solidFill>
-              </a:defRPr>
-            </a:pPr>
-            <a:r>
-              <a:t>• Un document bien formaté avec Word n'est pas un option — c'estune exigence académiqueévaluée.</a:t>
+                <a:latin typeface="Poppins"/>
+              </a:rPr>
+              <a:t>Université de Mostaganem — Dr. Madani BELACEL</a:t>
             </a:r>
           </a:p>
         </p:txBody>
@@ -3722,9 +3793,7 @@
   <p:cSld>
     <p:bg>
       <p:bgPr>
-        <a:solidFill>
-          <a:srgbClr val="FFFFFF"/>
-        </a:solidFill>
+        <a:solidFill>val="FFFFFF"/&gt;</a:solidFill>
         <a:effectLst/>
       </p:bgPr>
     </p:bg>
@@ -3749,9 +3818,7 @@
           <a:prstGeom prst="rect">
             <a:avLst/>
           </a:prstGeom>
-          <a:solidFill>
-            <a:srgbClr val="2C6E49"/>
-          </a:solidFill>
+          <a:solidFill>val="00875B"/&gt;</a:solidFill>
           <a:ln>
             <a:noFill/>
           </a:ln>
@@ -3802,9 +3869,7 @@
           <a:p>
             <a:pPr algn="l">
               <a:defRPr sz="2200" b="1">
-                <a:solidFill>
-                  <a:srgbClr val="1A5C33"/>
-                </a:solidFill>
+                <a:solidFill>val="006847"/&gt;</a:solidFill>
               </a:defRPr>
             </a:pPr>
             <a:r>
@@ -3840,103 +3905,130 @@
                 <a:spcPts val="600"/>
               </a:spcAft>
               <a:defRPr sz="1400">
+                <a:solidFill>val="22344A"/&gt;</a:solidFill>
+              </a:defRPr>
+            </a:pPr>
+            <a:r>
+              <a:t>• Untemplateest un fichier.dotxqui sert de modèle pour tous vos documents. Pour créer le vôtre :</a:t>
+            </a:r>
+          </a:p>
+          <a:p>
+            <a:pPr>
+              <a:spcAft>
+                <a:spcPts val="600"/>
+              </a:spcAft>
+              <a:defRPr sz="1400">
+                <a:solidFill>val="22344A"/&gt;</a:solidFill>
+              </a:defRPr>
+            </a:pPr>
+            <a:r>
+              <a:t>• Ouvrir Word → Fichier → Nouveau → Document vierge</a:t>
+            </a:r>
+          </a:p>
+          <a:p>
+            <a:pPr>
+              <a:spcAft>
+                <a:spcPts val="600"/>
+              </a:spcAft>
+              <a:defRPr sz="1400">
+                <a:solidFill>val="22344A"/&gt;</a:solidFill>
+              </a:defRPr>
+            </a:pPr>
+            <a:r>
+              <a:t>• Définir les styles essentiels (voir 3.3)</a:t>
+            </a:r>
+          </a:p>
+          <a:p>
+            <a:pPr>
+              <a:spcAft>
+                <a:spcPts val="600"/>
+              </a:spcAft>
+              <a:defRPr sz="1400">
+                <a:solidFill>val="22344A"/&gt;</a:solidFill>
+              </a:defRPr>
+            </a:pPr>
+            <a:r>
+              <a:t>• Configurer la mise en page (marges, interlignes, polices)</a:t>
+            </a:r>
+          </a:p>
+          <a:p>
+            <a:pPr>
+              <a:spcAft>
+                <a:spcPts val="600"/>
+              </a:spcAft>
+              <a:defRPr sz="1400">
+                <a:solidFill>val="22344A"/&gt;</a:solidFill>
+              </a:defRPr>
+            </a:pPr>
+            <a:r>
+              <a:t>• Créer la page de garde à partir du template PG-fr</a:t>
+            </a:r>
+          </a:p>
+          <a:p>
+            <a:pPr>
+              <a:spcAft>
+                <a:spcPts val="600"/>
+              </a:spcAft>
+              <a:defRPr sz="1400">
+                <a:solidFill>val="22344A"/&gt;</a:solidFill>
+              </a:defRPr>
+            </a:pPr>
+            <a:r>
+              <a:t>• Enregistrer comme :Fichier → Enregistrer sous → Type : Modèle Word (.dotx)</a:t>
+            </a:r>
+          </a:p>
+          <a:p>
+            <a:pPr>
+              <a:spcAft>
+                <a:spcPts val="600"/>
+              </a:spcAft>
+              <a:defRPr sz="1400">
+                <a:solidFill>val="22344A"/&gt;</a:solidFill>
+              </a:defRPr>
+            </a:pPr>
+            <a:r>
+              <a:t>• Nommer :Template_Memoire_Master_Langue_Culture.dotx</a:t>
+            </a:r>
+          </a:p>
+        </p:txBody>
+      </p:sp>
+      <p:sp>
+        <p:nvSpPr>
+          <p:cNvPr id="990001" name="Pied de page FLE"/>
+          <p:cNvSpPr>
+            <a:spLocks noGrp="1"/>
+          </p:cNvSpPr>
+          <p:nvPr/>
+        </p:nvSpPr>
+        <p:spPr>
+          <a:xfrm>
+            <a:off x="-228600" y="6400800"/>
+            <a:ext cx="109728" cy="274320"/>
+          </a:xfrm>
+          <a:prstGeom prst="rect">
+            <a:avLst/>
+          </a:prstGeom>
+        </p:spPr>
+        <p:txBody>
+          <a:bodyPr anchor="b"/>
+          <a:lstStyle/>
+          <a:p>
+            <a:pPr algn="r">
+              <a:defRPr sz="900">
                 <a:solidFill>
-                  <a:srgbClr val="222222"/>
+                  <a:srgbClr val="9AA7B6"/>
                 </a:solidFill>
-              </a:defRPr>
-            </a:pPr>
-            <a:r>
-              <a:t>• Untemplateest un fichier.dotxqui sert de modèle pour tous vos documents. Pour créer le vôtre :</a:t>
-            </a:r>
-          </a:p>
-          <a:p>
-            <a:pPr>
-              <a:spcAft>
-                <a:spcPts val="600"/>
-              </a:spcAft>
-              <a:defRPr sz="1400">
+                <a:latin typeface="Poppins"/>
+              </a:defRPr>
+            </a:pPr>
+            <a:r>
+              <a:rPr lang="fr-FR" sz="900">
                 <a:solidFill>
-                  <a:srgbClr val="222222"/>
+                  <a:srgbClr val="9AA7B6"/>
                 </a:solidFill>
-              </a:defRPr>
-            </a:pPr>
-            <a:r>
-              <a:t>• Ouvrir Word → Fichier → Nouveau → Document vierge</a:t>
-            </a:r>
-          </a:p>
-          <a:p>
-            <a:pPr>
-              <a:spcAft>
-                <a:spcPts val="600"/>
-              </a:spcAft>
-              <a:defRPr sz="1400">
-                <a:solidFill>
-                  <a:srgbClr val="222222"/>
-                </a:solidFill>
-              </a:defRPr>
-            </a:pPr>
-            <a:r>
-              <a:t>• Définir les styles essentiels (voir 3.3)</a:t>
-            </a:r>
-          </a:p>
-          <a:p>
-            <a:pPr>
-              <a:spcAft>
-                <a:spcPts val="600"/>
-              </a:spcAft>
-              <a:defRPr sz="1400">
-                <a:solidFill>
-                  <a:srgbClr val="222222"/>
-                </a:solidFill>
-              </a:defRPr>
-            </a:pPr>
-            <a:r>
-              <a:t>• Configurer la mise en page (marges, interlignes, polices)</a:t>
-            </a:r>
-          </a:p>
-          <a:p>
-            <a:pPr>
-              <a:spcAft>
-                <a:spcPts val="600"/>
-              </a:spcAft>
-              <a:defRPr sz="1400">
-                <a:solidFill>
-                  <a:srgbClr val="222222"/>
-                </a:solidFill>
-              </a:defRPr>
-            </a:pPr>
-            <a:r>
-              <a:t>• Créer la page de garde à partir du template PG-fr</a:t>
-            </a:r>
-          </a:p>
-          <a:p>
-            <a:pPr>
-              <a:spcAft>
-                <a:spcPts val="600"/>
-              </a:spcAft>
-              <a:defRPr sz="1400">
-                <a:solidFill>
-                  <a:srgbClr val="222222"/>
-                </a:solidFill>
-              </a:defRPr>
-            </a:pPr>
-            <a:r>
-              <a:t>• Enregistrer comme :Fichier → Enregistrer sous → Type : Modèle Word (.dotx)</a:t>
-            </a:r>
-          </a:p>
-          <a:p>
-            <a:pPr>
-              <a:spcAft>
-                <a:spcPts val="600"/>
-              </a:spcAft>
-              <a:defRPr sz="1400">
-                <a:solidFill>
-                  <a:srgbClr val="222222"/>
-                </a:solidFill>
-              </a:defRPr>
-            </a:pPr>
-            <a:r>
-              <a:t>• Nommer :Template_Memoire_Master_Langue_Culture.dotx</a:t>
+                <a:latin typeface="Poppins"/>
+              </a:rPr>
+              <a:t>Université de Mostaganem — Dr. Madani BELACEL</a:t>
             </a:r>
           </a:p>
         </p:txBody>
@@ -3954,9 +4046,7 @@
   <p:cSld>
     <p:bg>
       <p:bgPr>
-        <a:solidFill>
-          <a:srgbClr val="E8F0E9"/>
-        </a:solidFill>
+        <a:solidFill>val="F4F6F8"/&gt;</a:solidFill>
         <a:effectLst/>
       </p:bgPr>
     </p:bg>
@@ -3991,9 +4081,7 @@
           <a:p>
             <a:pPr algn="ctr">
               <a:defRPr sz="2600" b="1">
-                <a:solidFill>
-                  <a:srgbClr val="1A5C33"/>
-                </a:solidFill>
+                <a:solidFill>val="006847"/&gt;</a:solidFill>
               </a:defRPr>
             </a:pPr>
             <a:r>
@@ -4029,81 +4117,112 @@
                 <a:spcPts val="600"/>
               </a:spcAft>
               <a:defRPr sz="1600">
+                <a:solidFill>val="22344A"/&gt;</a:solidFill>
+              </a:defRPr>
+            </a:pPr>
+            <a:r>
+              <a:t>• Référentiel :titres et structure alignés sur Canvas Univ-Mosta (elearning.univ-usto.dz) ; bonnes pratiques benchmark 10 universités algériennes (voirBENCHMARK_10_UNIVERSITES_ELEARNING.md).</a:t>
+            </a:r>
+          </a:p>
+          <a:p>
+            <a:pPr>
+              <a:spcAft>
+                <a:spcPts val="600"/>
+              </a:spcAft>
+              <a:defRPr sz="1600">
+                <a:solidFill>val="22344A"/&gt;</a:solidFill>
+              </a:defRPr>
+            </a:pPr>
+            <a:r>
+              <a:t>• En termes de savoir :- Maîtriser les fonctionnalités avancées de Word pour la rédaction d'un mémoire (styles, sections, tables automatisées)</a:t>
+            </a:r>
+            <a:br/>
+            <a:r>
+              <a:t>- Comprendre les normes typographiques académiques (page de garde institutionnelle, sommaire, bibliographie)</a:t>
+            </a:r>
+            <a:br/>
+            <a:r>
+              <a:t>- Connaître le processus de dépôt légal du mémoire (PDF/A, métadonnées)</a:t>
+            </a:r>
+          </a:p>
+          <a:p>
+            <a:pPr>
+              <a:spcAft>
+                <a:spcPts val="600"/>
+              </a:spcAft>
+              <a:defRPr sz="1600">
+                <a:solidFill>val="22344A"/&gt;</a:solidFill>
+              </a:defRPr>
+            </a:pPr>
+            <a:r>
+              <a:t>• Atelier : création d'un modèle de document Master (template .dotx) avec styles personnalisés</a:t>
+            </a:r>
+          </a:p>
+          <a:p>
+            <a:pPr>
+              <a:spcAft>
+                <a:spcPts val="600"/>
+              </a:spcAft>
+              <a:defRPr sz="1600">
+                <a:solidFill>val="22344A"/&gt;</a:solidFill>
+              </a:defRPr>
+            </a:pPr>
+            <a:r>
+              <a:t>• QCM styles, sections, tables automatiques, normes typographiques</a:t>
+            </a:r>
+          </a:p>
+          <a:p>
+            <a:pPr>
+              <a:spcAft>
+                <a:spcPts val="600"/>
+              </a:spcAft>
+              <a:defRPr sz="1600">
+                <a:solidFill>val="22344A"/&gt;</a:solidFill>
+              </a:defRPr>
+            </a:pPr>
+            <a:r>
+              <a:t>• Template PG-fr.docx (page de garde institutionnelle Univ-Mosta)</a:t>
+            </a:r>
+          </a:p>
+        </p:txBody>
+      </p:sp>
+      <p:sp>
+        <p:nvSpPr>
+          <p:cNvPr id="990001" name="Pied de page FLE"/>
+          <p:cNvSpPr>
+            <a:spLocks noGrp="1"/>
+          </p:cNvSpPr>
+          <p:nvPr/>
+        </p:nvSpPr>
+        <p:spPr>
+          <a:xfrm>
+            <a:off x="2971800" y="182880"/>
+            <a:ext cx="4572000" cy="274320"/>
+          </a:xfrm>
+          <a:prstGeom prst="rect">
+            <a:avLst/>
+          </a:prstGeom>
+        </p:spPr>
+        <p:txBody>
+          <a:bodyPr anchor="b"/>
+          <a:lstStyle/>
+          <a:p>
+            <a:pPr algn="r">
+              <a:defRPr sz="900">
                 <a:solidFill>
-                  <a:srgbClr val="222222"/>
+                  <a:srgbClr val="9AA7B6"/>
                 </a:solidFill>
-              </a:defRPr>
-            </a:pPr>
-            <a:r>
-              <a:t>• Référentiel :titres et structure alignés sur Canvas Univ-Mosta (elearning.univ-usto.dz) ; bonnes pratiques benchmark 10 universités algériennes (voirBENCHMARK_10_UNIVERSITES_ELEARNING.md).</a:t>
-            </a:r>
-          </a:p>
-          <a:p>
-            <a:pPr>
-              <a:spcAft>
-                <a:spcPts val="600"/>
-              </a:spcAft>
-              <a:defRPr sz="1600">
+                <a:latin typeface="Poppins"/>
+              </a:defRPr>
+            </a:pPr>
+            <a:r>
+              <a:rPr lang="fr-FR" sz="900">
                 <a:solidFill>
-                  <a:srgbClr val="222222"/>
+                  <a:srgbClr val="9AA7B6"/>
                 </a:solidFill>
-              </a:defRPr>
-            </a:pPr>
-            <a:r>
-              <a:t>• En termes de savoir :- Maîtriser les fonctionnalités avancées de Word pour la rédaction d'un mémoire (styles, sections, tables automatisées)</a:t>
-            </a:r>
-            <a:br/>
-            <a:r>
-              <a:t>- Comprendre les normes typographiques académiques (page de garde institutionnelle, sommaire, bibliographie)</a:t>
-            </a:r>
-            <a:br/>
-            <a:r>
-              <a:t>- Connaître le processus de dépôt légal du mémoire (PDF/A, métadonnées)</a:t>
-            </a:r>
-          </a:p>
-          <a:p>
-            <a:pPr>
-              <a:spcAft>
-                <a:spcPts val="600"/>
-              </a:spcAft>
-              <a:defRPr sz="1600">
-                <a:solidFill>
-                  <a:srgbClr val="222222"/>
-                </a:solidFill>
-              </a:defRPr>
-            </a:pPr>
-            <a:r>
-              <a:t>• Atelier : création d'un modèle de document Master (template .dotx) avec styles personnalisés</a:t>
-            </a:r>
-          </a:p>
-          <a:p>
-            <a:pPr>
-              <a:spcAft>
-                <a:spcPts val="600"/>
-              </a:spcAft>
-              <a:defRPr sz="1600">
-                <a:solidFill>
-                  <a:srgbClr val="222222"/>
-                </a:solidFill>
-              </a:defRPr>
-            </a:pPr>
-            <a:r>
-              <a:t>• QCM styles, sections, tables automatiques, normes typographiques</a:t>
-            </a:r>
-          </a:p>
-          <a:p>
-            <a:pPr>
-              <a:spcAft>
-                <a:spcPts val="600"/>
-              </a:spcAft>
-              <a:defRPr sz="1600">
-                <a:solidFill>
-                  <a:srgbClr val="222222"/>
-                </a:solidFill>
-              </a:defRPr>
-            </a:pPr>
-            <a:r>
-              <a:t>• Template PG-fr.docx (page de garde institutionnelle Univ-Mosta)</a:t>
+                <a:latin typeface="Poppins"/>
+              </a:rPr>
+              <a:t>Université de Mostaganem — Dr. Madani BELACEL</a:t>
             </a:r>
           </a:p>
         </p:txBody>
@@ -4121,9 +4240,7 @@
   <p:cSld>
     <p:bg>
       <p:bgPr>
-        <a:solidFill>
-          <a:srgbClr val="FFFFFF"/>
-        </a:solidFill>
+        <a:solidFill>val="FFFFFF"/&gt;</a:solidFill>
         <a:effectLst/>
       </p:bgPr>
     </p:bg>
@@ -4158,9 +4275,7 @@
           <a:p>
             <a:pPr algn="ctr">
               <a:defRPr sz="2600" b="1">
-                <a:solidFill>
-                  <a:srgbClr val="1A5C33"/>
-                </a:solidFill>
+                <a:solidFill>val="006847"/&gt;</a:solidFill>
               </a:defRPr>
             </a:pPr>
             <a:r>
@@ -4196,73 +4311,104 @@
                 <a:spcPts val="600"/>
               </a:spcAft>
               <a:defRPr sz="1500">
+                <a:solidFill>val="22344A"/&gt;</a:solidFill>
+              </a:defRPr>
+            </a:pPr>
+            <a:r>
+              <a:t>• Définir les concepts principaux du cours</a:t>
+            </a:r>
+          </a:p>
+          <a:p>
+            <a:pPr>
+              <a:spcAft>
+                <a:spcPts val="600"/>
+              </a:spcAft>
+              <a:defRPr sz="1500">
+                <a:solidFill>val="22344A"/&gt;</a:solidFill>
+              </a:defRPr>
+            </a:pPr>
+            <a:r>
+              <a:t>• Identifier les applications pratiques</a:t>
+            </a:r>
+          </a:p>
+          <a:p>
+            <a:pPr>
+              <a:spcAft>
+                <a:spcPts val="600"/>
+              </a:spcAft>
+              <a:defRPr sz="1500">
+                <a:solidFill>val="22344A"/&gt;</a:solidFill>
+              </a:defRPr>
+            </a:pPr>
+            <a:r>
+              <a:t>• Résoudre les exercices du TD</a:t>
+            </a:r>
+          </a:p>
+          <a:p>
+            <a:pPr>
+              <a:spcAft>
+                <a:spcPts val="600"/>
+              </a:spcAft>
+              <a:defRPr sz="1500">
+                <a:solidFill>val="22344A"/&gt;</a:solidFill>
+              </a:defRPr>
+            </a:pPr>
+            <a:r>
+              <a:t>• Synthétiser les points clés en un paragraphe</a:t>
+            </a:r>
+          </a:p>
+          <a:p>
+            <a:pPr>
+              <a:spcAft>
+                <a:spcPts val="600"/>
+              </a:spcAft>
+              <a:defRPr sz="1500">
+                <a:solidFill>val="22344A"/&gt;</a:solidFill>
+              </a:defRPr>
+            </a:pPr>
+            <a:r>
+              <a:t>• Préparer une courte présentation orale</a:t>
+            </a:r>
+          </a:p>
+        </p:txBody>
+      </p:sp>
+      <p:sp>
+        <p:nvSpPr>
+          <p:cNvPr id="990001" name="Pied de page FLE"/>
+          <p:cNvSpPr>
+            <a:spLocks noGrp="1"/>
+          </p:cNvSpPr>
+          <p:nvPr/>
+        </p:nvSpPr>
+        <p:spPr>
+          <a:xfrm>
+            <a:off x="2971800" y="182880"/>
+            <a:ext cx="4572000" cy="274320"/>
+          </a:xfrm>
+          <a:prstGeom prst="rect">
+            <a:avLst/>
+          </a:prstGeom>
+        </p:spPr>
+        <p:txBody>
+          <a:bodyPr anchor="b"/>
+          <a:lstStyle/>
+          <a:p>
+            <a:pPr algn="r">
+              <a:defRPr sz="900">
                 <a:solidFill>
-                  <a:srgbClr val="222222"/>
+                  <a:srgbClr val="9AA7B6"/>
                 </a:solidFill>
-              </a:defRPr>
-            </a:pPr>
-            <a:r>
-              <a:t>• Définir les concepts principaux du cours</a:t>
-            </a:r>
-          </a:p>
-          <a:p>
-            <a:pPr>
-              <a:spcAft>
-                <a:spcPts val="600"/>
-              </a:spcAft>
-              <a:defRPr sz="1500">
+                <a:latin typeface="Poppins"/>
+              </a:defRPr>
+            </a:pPr>
+            <a:r>
+              <a:rPr lang="fr-FR" sz="900">
                 <a:solidFill>
-                  <a:srgbClr val="222222"/>
+                  <a:srgbClr val="9AA7B6"/>
                 </a:solidFill>
-              </a:defRPr>
-            </a:pPr>
-            <a:r>
-              <a:t>• Identifier les applications pratiques</a:t>
-            </a:r>
-          </a:p>
-          <a:p>
-            <a:pPr>
-              <a:spcAft>
-                <a:spcPts val="600"/>
-              </a:spcAft>
-              <a:defRPr sz="1500">
-                <a:solidFill>
-                  <a:srgbClr val="222222"/>
-                </a:solidFill>
-              </a:defRPr>
-            </a:pPr>
-            <a:r>
-              <a:t>• Résoudre les exercices du TD</a:t>
-            </a:r>
-          </a:p>
-          <a:p>
-            <a:pPr>
-              <a:spcAft>
-                <a:spcPts val="600"/>
-              </a:spcAft>
-              <a:defRPr sz="1500">
-                <a:solidFill>
-                  <a:srgbClr val="222222"/>
-                </a:solidFill>
-              </a:defRPr>
-            </a:pPr>
-            <a:r>
-              <a:t>• Synthétiser les points clés en un paragraphe</a:t>
-            </a:r>
-          </a:p>
-          <a:p>
-            <a:pPr>
-              <a:spcAft>
-                <a:spcPts val="600"/>
-              </a:spcAft>
-              <a:defRPr sz="1500">
-                <a:solidFill>
-                  <a:srgbClr val="222222"/>
-                </a:solidFill>
-              </a:defRPr>
-            </a:pPr>
-            <a:r>
-              <a:t>• Préparer une courte présentation orale</a:t>
+                <a:latin typeface="Poppins"/>
+              </a:rPr>
+              <a:t>Université de Mostaganem — Dr. Madani BELACEL</a:t>
             </a:r>
           </a:p>
         </p:txBody>
@@ -4280,9 +4426,7 @@
   <p:cSld>
     <p:bg>
       <p:bgPr>
-        <a:solidFill>
-          <a:srgbClr val="1A5C33"/>
-        </a:solidFill>
+        <a:solidFill>val="006847"/&gt;</a:solidFill>
         <a:effectLst/>
       </p:bgPr>
     </p:bg>
@@ -4317,9 +4461,7 @@
           <a:p>
             <a:pPr algn="ctr">
               <a:defRPr sz="2800" b="1">
-                <a:solidFill>
-                  <a:srgbClr val="FFFFFF"/>
-                </a:solidFill>
+                <a:solidFill>val="FFFFFF"/&gt;</a:solidFill>
               </a:defRPr>
             </a:pPr>
             <a:r>
@@ -4352,25 +4494,64 @@
           <a:p>
             <a:pPr algn="ctr">
               <a:defRPr sz="1800" b="0">
+                <a:solidFill>val="DFE5EA"/&gt;</a:solidFill>
+              </a:defRPr>
+            </a:pPr>
+            <a:r>
+              <a:t>Dr. BELACEL Madani</a:t>
+            </a:r>
+            <a:br/>
+            <a:r>
+              <a:t>Maître de Conférences B</a:t>
+            </a:r>
+            <a:br/>
+            <a:r>
+              <a:t>Université de Mostaganem</a:t>
+            </a:r>
+            <a:br/>
+            <a:r>
+              <a:t>madani.belacel@univ-mosta.dz</a:t>
+            </a:r>
+          </a:p>
+        </p:txBody>
+      </p:sp>
+      <p:sp>
+        <p:nvSpPr>
+          <p:cNvPr id="990001" name="Pied de page FLE"/>
+          <p:cNvSpPr>
+            <a:spLocks noGrp="1"/>
+          </p:cNvSpPr>
+          <p:nvPr/>
+        </p:nvSpPr>
+        <p:spPr>
+          <a:xfrm>
+            <a:off x="2880360" y="457200"/>
+            <a:ext cx="4572000" cy="274320"/>
+          </a:xfrm>
+          <a:prstGeom prst="rect">
+            <a:avLst/>
+          </a:prstGeom>
+        </p:spPr>
+        <p:txBody>
+          <a:bodyPr anchor="b"/>
+          <a:lstStyle/>
+          <a:p>
+            <a:pPr algn="r">
+              <a:defRPr sz="900">
                 <a:solidFill>
-                  <a:srgbClr val="C5D9C7"/>
+                  <a:srgbClr val="9AA7B6"/>
                 </a:solidFill>
-              </a:defRPr>
-            </a:pPr>
-            <a:r>
-              <a:t>Dr. BELACEL Madani</a:t>
-            </a:r>
-            <a:br/>
-            <a:r>
-              <a:t>Maître de Conférences B</a:t>
-            </a:r>
-            <a:br/>
-            <a:r>
-              <a:t>Université de Mostaganem</a:t>
-            </a:r>
-            <a:br/>
-            <a:r>
-              <a:t>madani.belacel@univ-mosta.dz</a:t>
+                <a:latin typeface="Poppins"/>
+              </a:defRPr>
+            </a:pPr>
+            <a:r>
+              <a:rPr lang="fr-FR" sz="900">
+                <a:solidFill>
+                  <a:srgbClr val="9AA7B6"/>
+                </a:solidFill>
+                <a:latin typeface="Poppins"/>
+              </a:rPr>
+              <a:t>Université de Mostaganem — Dr. Madani BELACEL</a:t>
             </a:r>
           </a:p>
         </p:txBody>
@@ -4388,9 +4569,7 @@
   <p:cSld>
     <p:bg>
       <p:bgPr>
-        <a:solidFill>
-          <a:srgbClr val="FFFFFF"/>
-        </a:solidFill>
+        <a:solidFill>val="FFFFFF"/&gt;</a:solidFill>
         <a:effectLst/>
       </p:bgPr>
     </p:bg>
@@ -4425,9 +4604,7 @@
           <a:p>
             <a:pPr algn="l">
               <a:defRPr sz="2600" b="1">
-                <a:solidFill>
-                  <a:srgbClr val="1A5C33"/>
-                </a:solidFill>
+                <a:solidFill>val="006847"/&gt;</a:solidFill>
               </a:defRPr>
             </a:pPr>
             <a:r>
@@ -4463,82 +4640,115 @@
                 <a:spcPts val="600"/>
               </a:spcAft>
               <a:defRPr sz="1500">
+                <a:solidFill>val="22344A"/&gt;</a:solidFill>
+              </a:defRPr>
+            </a:pPr>
+            <a:r>
+              <a:t>• En termes de savoir :- Maîtriser les fonctionnalités avancées de Word pour la rédaction d'un mémoire (styles, sections, tables automatisées)</a:t>
+            </a:r>
+            <a:br/>
+            <a:r>
+              <a:t>- Comprendre les normes typographiques académiques (page de garde institutionnelle, sommaire, bibliographie)</a:t>
+            </a:r>
+            <a:br/>
+            <a:r>
+              <a:t>- Connaître le processus de dépôt légal du mémoire (PDF/A, métadonnées)</a:t>
+            </a:r>
+          </a:p>
+          <a:p>
+            <a:pPr>
+              <a:spcAft>
+                <a:spcPts val="600"/>
+              </a:spcAft>
+              <a:defRPr sz="1500">
+                <a:solidFill>val="22344A"/&gt;</a:solidFill>
+              </a:defRPr>
+            </a:pPr>
+            <a:r>
+              <a:t>• En termes de savoir-faire :- Créer un document structuré avec styles, table des matières automatique, listes des figures et tableaux</a:t>
+            </a:r>
+            <a:br/>
+            <a:r>
+              <a:t>- Intégrer et formater des citations avec Zotero dans Word</a:t>
+            </a:r>
+            <a:br/>
+            <a:r>
+              <a:t>- Gérer des documents longs (sections, paginations multiples, numérotation des chapitres)</a:t>
+            </a:r>
+            <a:br/>
+            <a:r>
+              <a:t>- Exporter aux formats requis (DOCX, PDF/A) pour dépôt institutionnel</a:t>
+            </a:r>
+          </a:p>
+          <a:p>
+            <a:pPr>
+              <a:spcAft>
+                <a:spcPts val="600"/>
+              </a:spcAft>
+              <a:defRPr sz="1500">
+                <a:solidFill>val="22344A"/&gt;</a:solidFill>
+              </a:defRPr>
+            </a:pPr>
+            <a:r>
+              <a:t>• En termes de savoir-être :- Respecter les normes de rédaction académique (typographie, citation, bibliographie)</a:t>
+            </a:r>
+            <a:br/>
+            <a:r>
+              <a:t>- Adopter une méthodologie de rédaction rigoureuse et reproductible</a:t>
+            </a:r>
+          </a:p>
+          <a:p>
+            <a:pPr>
+              <a:spcAft>
+                <a:spcPts val="600"/>
+              </a:spcAft>
+              <a:defRPr sz="1500">
+                <a:solidFill>val="22344A"/&gt;</a:solidFill>
+              </a:defRPr>
+            </a:pPr>
+            <a:r>
+              <a:t>• Mode d'évaluation :TD 25 % + Projet « Structure complète d'un chapitre de mémoire » 35 % + QCM 20 % + Examen pratique 20 %</a:t>
+            </a:r>
+          </a:p>
+        </p:txBody>
+      </p:sp>
+      <p:sp>
+        <p:nvSpPr>
+          <p:cNvPr id="990001" name="Pied de page FLE"/>
+          <p:cNvSpPr>
+            <a:spLocks noGrp="1"/>
+          </p:cNvSpPr>
+          <p:nvPr/>
+        </p:nvSpPr>
+        <p:spPr>
+          <a:xfrm>
+            <a:off x="2971800" y="182880"/>
+            <a:ext cx="4572000" cy="274320"/>
+          </a:xfrm>
+          <a:prstGeom prst="rect">
+            <a:avLst/>
+          </a:prstGeom>
+        </p:spPr>
+        <p:txBody>
+          <a:bodyPr anchor="b"/>
+          <a:lstStyle/>
+          <a:p>
+            <a:pPr algn="r">
+              <a:defRPr sz="900">
                 <a:solidFill>
-                  <a:srgbClr val="222222"/>
+                  <a:srgbClr val="9AA7B6"/>
                 </a:solidFill>
-              </a:defRPr>
-            </a:pPr>
-            <a:r>
-              <a:t>• En termes de savoir :- Maîtriser les fonctionnalités avancées de Word pour la rédaction d'un mémoire (styles, sections, tables automatisées)</a:t>
-            </a:r>
-            <a:br/>
-            <a:r>
-              <a:t>- Comprendre les normes typographiques académiques (page de garde institutionnelle, sommaire, bibliographie)</a:t>
-            </a:r>
-            <a:br/>
-            <a:r>
-              <a:t>- Connaître le processus de dépôt légal du mémoire (PDF/A, métadonnées)</a:t>
-            </a:r>
-          </a:p>
-          <a:p>
-            <a:pPr>
-              <a:spcAft>
-                <a:spcPts val="600"/>
-              </a:spcAft>
-              <a:defRPr sz="1500">
+                <a:latin typeface="Poppins"/>
+              </a:defRPr>
+            </a:pPr>
+            <a:r>
+              <a:rPr lang="fr-FR" sz="900">
                 <a:solidFill>
-                  <a:srgbClr val="222222"/>
+                  <a:srgbClr val="9AA7B6"/>
                 </a:solidFill>
-              </a:defRPr>
-            </a:pPr>
-            <a:r>
-              <a:t>• En termes de savoir-faire :- Créer un document structuré avec styles, table des matières automatique, listes des figures et tableaux</a:t>
-            </a:r>
-            <a:br/>
-            <a:r>
-              <a:t>- Intégrer et formater des citations avec Zotero dans Word</a:t>
-            </a:r>
-            <a:br/>
-            <a:r>
-              <a:t>- Gérer des documents longs (sections, paginations multiples, numérotation des chapitres)</a:t>
-            </a:r>
-            <a:br/>
-            <a:r>
-              <a:t>- Exporter aux formats requis (DOCX, PDF/A) pour dépôt institutionnel</a:t>
-            </a:r>
-          </a:p>
-          <a:p>
-            <a:pPr>
-              <a:spcAft>
-                <a:spcPts val="600"/>
-              </a:spcAft>
-              <a:defRPr sz="1500">
-                <a:solidFill>
-                  <a:srgbClr val="222222"/>
-                </a:solidFill>
-              </a:defRPr>
-            </a:pPr>
-            <a:r>
-              <a:t>• En termes de savoir-être :- Respecter les normes de rédaction académique (typographie, citation, bibliographie)</a:t>
-            </a:r>
-            <a:br/>
-            <a:r>
-              <a:t>- Adopter une méthodologie de rédaction rigoureuse et reproductible</a:t>
-            </a:r>
-          </a:p>
-          <a:p>
-            <a:pPr>
-              <a:spcAft>
-                <a:spcPts val="600"/>
-              </a:spcAft>
-              <a:defRPr sz="1500">
-                <a:solidFill>
-                  <a:srgbClr val="222222"/>
-                </a:solidFill>
-              </a:defRPr>
-            </a:pPr>
-            <a:r>
-              <a:t>• Mode d'évaluation :TD 25 % + Projet « Structure complète d'un chapitre de mémoire » 35 % + QCM 20 % + Examen pratique 20 %</a:t>
+                <a:latin typeface="Poppins"/>
+              </a:rPr>
+              <a:t>Université de Mostaganem — Dr. Madani BELACEL</a:t>
             </a:r>
           </a:p>
         </p:txBody>
@@ -4556,9 +4766,7 @@
   <p:cSld>
     <p:bg>
       <p:bgPr>
-        <a:solidFill>
-          <a:srgbClr val="FFFFFF"/>
-        </a:solidFill>
+        <a:solidFill>val="FFFFFF"/&gt;</a:solidFill>
         <a:effectLst/>
       </p:bgPr>
     </p:bg>
@@ -4593,9 +4801,7 @@
           <a:p>
             <a:pPr algn="l">
               <a:defRPr sz="2600" b="1">
-                <a:solidFill>
-                  <a:srgbClr val="1A5C33"/>
-                </a:solidFill>
+                <a:solidFill>val="006847"/&gt;</a:solidFill>
               </a:defRPr>
             </a:pPr>
             <a:r>
@@ -4631,148 +4837,169 @@
                 <a:spcPts val="600"/>
               </a:spcAft>
               <a:defRPr sz="1600">
+                <a:solidFill>val="22344A"/&gt;</a:solidFill>
+              </a:defRPr>
+            </a:pPr>
+            <a:r>
+              <a:t>• Fiche cours — Plateforme e-learning (Moodle)</a:t>
+            </a:r>
+          </a:p>
+          <a:p>
+            <a:pPr>
+              <a:spcAft>
+                <a:spcPts val="600"/>
+              </a:spcAft>
+              <a:defRPr sz="1600">
+                <a:solidFill>val="22344A"/&gt;</a:solidFill>
+              </a:defRPr>
+            </a:pPr>
+            <a:r>
+              <a:t>• Objectifs de l'enseignement</a:t>
+            </a:r>
+          </a:p>
+          <a:p>
+            <a:pPr>
+              <a:spcAft>
+                <a:spcPts val="600"/>
+              </a:spcAft>
+              <a:defRPr sz="1600">
+                <a:solidFill>val="22344A"/&gt;</a:solidFill>
+              </a:defRPr>
+            </a:pPr>
+            <a:r>
+              <a:t>• Activités d'apprentissage</a:t>
+            </a:r>
+          </a:p>
+          <a:p>
+            <a:pPr>
+              <a:spcAft>
+                <a:spcPts val="600"/>
+              </a:spcAft>
+              <a:defRPr sz="1600">
+                <a:solidFill>val="22344A"/&gt;</a:solidFill>
+              </a:defRPr>
+            </a:pPr>
+            <a:r>
+              <a:t>• Activités d'évaluation</a:t>
+            </a:r>
+          </a:p>
+          <a:p>
+            <a:pPr>
+              <a:spcAft>
+                <a:spcPts val="600"/>
+              </a:spcAft>
+              <a:defRPr sz="1600">
+                <a:solidFill>val="22344A"/&gt;</a:solidFill>
+              </a:defRPr>
+            </a:pPr>
+            <a:r>
+              <a:t>• Bibliographie et ressources externes</a:t>
+            </a:r>
+          </a:p>
+          <a:p>
+            <a:pPr>
+              <a:spcAft>
+                <a:spcPts val="600"/>
+              </a:spcAft>
+              <a:defRPr sz="1600">
+                <a:solidFill>val="22344A"/&gt;</a:solidFill>
+              </a:defRPr>
+            </a:pPr>
+            <a:r>
+              <a:t>• Contexte réglementaire algérien</a:t>
+            </a:r>
+          </a:p>
+          <a:p>
+            <a:pPr>
+              <a:spcAft>
+                <a:spcPts val="600"/>
+              </a:spcAft>
+              <a:defRPr sz="1600">
+                <a:solidFill>val="22344A"/&gt;</a:solidFill>
+              </a:defRPr>
+            </a:pPr>
+            <a:r>
+              <a:t>• Plan du Cours</a:t>
+            </a:r>
+          </a:p>
+          <a:p>
+            <a:pPr>
+              <a:spcAft>
+                <a:spcPts val="600"/>
+              </a:spcAft>
+              <a:defRPr sz="1600">
+                <a:solidFill>val="22344A"/&gt;</a:solidFill>
+              </a:defRPr>
+            </a:pPr>
+            <a:r>
+              <a:t>• 1.1 Word en Master : un changement d'échelle</a:t>
+            </a:r>
+          </a:p>
+          <a:p>
+            <a:pPr>
+              <a:spcAft>
+                <a:spcPts val="600"/>
+              </a:spcAft>
+              <a:defRPr sz="1600">
+                <a:solidFill>val="22344A"/&gt;</a:solidFill>
+              </a:defRPr>
+            </a:pPr>
+            <a:r>
+              <a:t>• 3.2 Créer un template Master (.dotx)</a:t>
+            </a:r>
+          </a:p>
+          <a:p>
+            <a:pPr>
+              <a:spcAft>
+                <a:spcPts val="600"/>
+              </a:spcAft>
+              <a:defRPr sz="1600">
+                <a:solidFill>val="22344A"/&gt;</a:solidFill>
+              </a:defRPr>
+            </a:pPr>
+            <a:r>
+              <a:t>• 3.4 Modifier un style</a:t>
+            </a:r>
+          </a:p>
+        </p:txBody>
+      </p:sp>
+      <p:sp>
+        <p:nvSpPr>
+          <p:cNvPr id="990001" name="Pied de page FLE"/>
+          <p:cNvSpPr>
+            <a:spLocks noGrp="1"/>
+          </p:cNvSpPr>
+          <p:nvPr/>
+        </p:nvSpPr>
+        <p:spPr>
+          <a:xfrm>
+            <a:off x="2971800" y="182880"/>
+            <a:ext cx="4572000" cy="274320"/>
+          </a:xfrm>
+          <a:prstGeom prst="rect">
+            <a:avLst/>
+          </a:prstGeom>
+        </p:spPr>
+        <p:txBody>
+          <a:bodyPr anchor="b"/>
+          <a:lstStyle/>
+          <a:p>
+            <a:pPr algn="r">
+              <a:defRPr sz="900">
                 <a:solidFill>
-                  <a:srgbClr val="222222"/>
+                  <a:srgbClr val="9AA7B6"/>
                 </a:solidFill>
-              </a:defRPr>
-            </a:pPr>
-            <a:r>
-              <a:t>• Fiche cours — Plateforme e-learning (Moodle)</a:t>
-            </a:r>
-          </a:p>
-          <a:p>
-            <a:pPr>
-              <a:spcAft>
-                <a:spcPts val="600"/>
-              </a:spcAft>
-              <a:defRPr sz="1600">
+                <a:latin typeface="Poppins"/>
+              </a:defRPr>
+            </a:pPr>
+            <a:r>
+              <a:rPr lang="fr-FR" sz="900">
                 <a:solidFill>
-                  <a:srgbClr val="222222"/>
+                  <a:srgbClr val="9AA7B6"/>
                 </a:solidFill>
-              </a:defRPr>
-            </a:pPr>
-            <a:r>
-              <a:t>• Objectifs de l'enseignement</a:t>
-            </a:r>
-          </a:p>
-          <a:p>
-            <a:pPr>
-              <a:spcAft>
-                <a:spcPts val="600"/>
-              </a:spcAft>
-              <a:defRPr sz="1600">
-                <a:solidFill>
-                  <a:srgbClr val="222222"/>
-                </a:solidFill>
-              </a:defRPr>
-            </a:pPr>
-            <a:r>
-              <a:t>• Activités d'apprentissage</a:t>
-            </a:r>
-          </a:p>
-          <a:p>
-            <a:pPr>
-              <a:spcAft>
-                <a:spcPts val="600"/>
-              </a:spcAft>
-              <a:defRPr sz="1600">
-                <a:solidFill>
-                  <a:srgbClr val="222222"/>
-                </a:solidFill>
-              </a:defRPr>
-            </a:pPr>
-            <a:r>
-              <a:t>• Activités d'évaluation</a:t>
-            </a:r>
-          </a:p>
-          <a:p>
-            <a:pPr>
-              <a:spcAft>
-                <a:spcPts val="600"/>
-              </a:spcAft>
-              <a:defRPr sz="1600">
-                <a:solidFill>
-                  <a:srgbClr val="222222"/>
-                </a:solidFill>
-              </a:defRPr>
-            </a:pPr>
-            <a:r>
-              <a:t>• Bibliographie et ressources externes</a:t>
-            </a:r>
-          </a:p>
-          <a:p>
-            <a:pPr>
-              <a:spcAft>
-                <a:spcPts val="600"/>
-              </a:spcAft>
-              <a:defRPr sz="1600">
-                <a:solidFill>
-                  <a:srgbClr val="222222"/>
-                </a:solidFill>
-              </a:defRPr>
-            </a:pPr>
-            <a:r>
-              <a:t>• Contexte réglementaire algérien</a:t>
-            </a:r>
-          </a:p>
-          <a:p>
-            <a:pPr>
-              <a:spcAft>
-                <a:spcPts val="600"/>
-              </a:spcAft>
-              <a:defRPr sz="1600">
-                <a:solidFill>
-                  <a:srgbClr val="222222"/>
-                </a:solidFill>
-              </a:defRPr>
-            </a:pPr>
-            <a:r>
-              <a:t>• Plan du Cours</a:t>
-            </a:r>
-          </a:p>
-          <a:p>
-            <a:pPr>
-              <a:spcAft>
-                <a:spcPts val="600"/>
-              </a:spcAft>
-              <a:defRPr sz="1600">
-                <a:solidFill>
-                  <a:srgbClr val="222222"/>
-                </a:solidFill>
-              </a:defRPr>
-            </a:pPr>
-            <a:r>
-              <a:t>• 1.1 Word en Master : un changement d'échelle</a:t>
-            </a:r>
-          </a:p>
-          <a:p>
-            <a:pPr>
-              <a:spcAft>
-                <a:spcPts val="600"/>
-              </a:spcAft>
-              <a:defRPr sz="1600">
-                <a:solidFill>
-                  <a:srgbClr val="222222"/>
-                </a:solidFill>
-              </a:defRPr>
-            </a:pPr>
-            <a:r>
-              <a:t>• 3.2 Créer un template Master (.dotx)</a:t>
-            </a:r>
-          </a:p>
-          <a:p>
-            <a:pPr>
-              <a:spcAft>
-                <a:spcPts val="600"/>
-              </a:spcAft>
-              <a:defRPr sz="1600">
-                <a:solidFill>
-                  <a:srgbClr val="222222"/>
-                </a:solidFill>
-              </a:defRPr>
-            </a:pPr>
-            <a:r>
-              <a:t>• 3.4 Modifier un style</a:t>
+                <a:latin typeface="Poppins"/>
+              </a:rPr>
+              <a:t>Université de Mostaganem — Dr. Madani BELACEL</a:t>
             </a:r>
           </a:p>
         </p:txBody>
@@ -4790,9 +5017,7 @@
   <p:cSld>
     <p:bg>
       <p:bgPr>
-        <a:solidFill>
-          <a:srgbClr val="FFFFFF"/>
-        </a:solidFill>
+        <a:solidFill>val="FFFFFF"/&gt;</a:solidFill>
         <a:effectLst/>
       </p:bgPr>
     </p:bg>
@@ -4817,9 +5042,7 @@
           <a:prstGeom prst="rect">
             <a:avLst/>
           </a:prstGeom>
-          <a:solidFill>
-            <a:srgbClr val="2C6E49"/>
-          </a:solidFill>
+          <a:solidFill>val="00875B"/&gt;</a:solidFill>
           <a:ln>
             <a:noFill/>
           </a:ln>
@@ -4870,9 +5093,7 @@
           <a:p>
             <a:pPr algn="l">
               <a:defRPr sz="2200" b="1">
-                <a:solidFill>
-                  <a:srgbClr val="1A5C33"/>
-                </a:solidFill>
+                <a:solidFill>val="006847"/&gt;</a:solidFill>
               </a:defRPr>
             </a:pPr>
             <a:r>
@@ -4908,43 +5129,78 @@
                 <a:spcPts val="600"/>
               </a:spcAft>
               <a:defRPr sz="1400">
+                <a:solidFill>val="22344A"/&gt;</a:solidFill>
+              </a:defRPr>
+            </a:pPr>
+            <a:r>
+              <a:t>• Référentiel :titres et structure alignés sur Canvas Univ-Mosta (elearning.univ-usto.dz) ; bonnes pratiques benchmark 10 universités algériennes (voirBENCHMARK_10_UNIVERSITES_ELEARNING.md).</a:t>
+            </a:r>
+          </a:p>
+          <a:p>
+            <a:pPr>
+              <a:spcAft>
+                <a:spcPts val="600"/>
+              </a:spcAft>
+              <a:defRPr sz="1400">
+                <a:solidFill>val="22344A"/&gt;</a:solidFill>
+              </a:defRPr>
+            </a:pPr>
+            <a:r>
+              <a:t>• Public visé :Master 1 Langue et Culture</a:t>
+            </a:r>
+          </a:p>
+          <a:p>
+            <a:pPr>
+              <a:spcAft>
+                <a:spcPts val="600"/>
+              </a:spcAft>
+              <a:defRPr sz="1400">
+                <a:solidFill>val="22344A"/&gt;</a:solidFill>
+              </a:defRPr>
+            </a:pPr>
+            <a:r>
+              <a:t>• Compétences pré-requises :TIC 03 ; organisation de fichiers Windows ; notions de navigation et exploration ; Zotero installé</a:t>
+            </a:r>
+          </a:p>
+        </p:txBody>
+      </p:sp>
+      <p:sp>
+        <p:nvSpPr>
+          <p:cNvPr id="990001" name="Pied de page FLE"/>
+          <p:cNvSpPr>
+            <a:spLocks noGrp="1"/>
+          </p:cNvSpPr>
+          <p:nvPr/>
+        </p:nvSpPr>
+        <p:spPr>
+          <a:xfrm>
+            <a:off x="-228600" y="6400800"/>
+            <a:ext cx="109728" cy="274320"/>
+          </a:xfrm>
+          <a:prstGeom prst="rect">
+            <a:avLst/>
+          </a:prstGeom>
+        </p:spPr>
+        <p:txBody>
+          <a:bodyPr anchor="b"/>
+          <a:lstStyle/>
+          <a:p>
+            <a:pPr algn="r">
+              <a:defRPr sz="900">
                 <a:solidFill>
-                  <a:srgbClr val="222222"/>
+                  <a:srgbClr val="9AA7B6"/>
                 </a:solidFill>
-              </a:defRPr>
-            </a:pPr>
-            <a:r>
-              <a:t>• Référentiel :titres et structure alignés sur Canvas Univ-Mosta (elearning.univ-usto.dz) ; bonnes pratiques benchmark 10 universités algériennes (voirBENCHMARK_10_UNIVERSITES_ELEARNING.md).</a:t>
-            </a:r>
-          </a:p>
-          <a:p>
-            <a:pPr>
-              <a:spcAft>
-                <a:spcPts val="600"/>
-              </a:spcAft>
-              <a:defRPr sz="1400">
+                <a:latin typeface="Poppins"/>
+              </a:defRPr>
+            </a:pPr>
+            <a:r>
+              <a:rPr lang="fr-FR" sz="900">
                 <a:solidFill>
-                  <a:srgbClr val="222222"/>
+                  <a:srgbClr val="9AA7B6"/>
                 </a:solidFill>
-              </a:defRPr>
-            </a:pPr>
-            <a:r>
-              <a:t>• Public visé :Master 1 Langue et Culture</a:t>
-            </a:r>
-          </a:p>
-          <a:p>
-            <a:pPr>
-              <a:spcAft>
-                <a:spcPts val="600"/>
-              </a:spcAft>
-              <a:defRPr sz="1400">
-                <a:solidFill>
-                  <a:srgbClr val="222222"/>
-                </a:solidFill>
-              </a:defRPr>
-            </a:pPr>
-            <a:r>
-              <a:t>• Compétences pré-requises :TIC 03 ; organisation de fichiers Windows ; notions de navigation et exploration ; Zotero installé</a:t>
+                <a:latin typeface="Poppins"/>
+              </a:rPr>
+              <a:t>Université de Mostaganem — Dr. Madani BELACEL</a:t>
             </a:r>
           </a:p>
         </p:txBody>
@@ -4962,9 +5218,7 @@
   <p:cSld>
     <p:bg>
       <p:bgPr>
-        <a:solidFill>
-          <a:srgbClr val="FFFFFF"/>
-        </a:solidFill>
+        <a:solidFill>val="FFFFFF"/&gt;</a:solidFill>
         <a:effectLst/>
       </p:bgPr>
     </p:bg>
@@ -4989,9 +5243,7 @@
           <a:prstGeom prst="rect">
             <a:avLst/>
           </a:prstGeom>
-          <a:solidFill>
-            <a:srgbClr val="2C6E49"/>
-          </a:solidFill>
+          <a:solidFill>val="00875B"/&gt;</a:solidFill>
           <a:ln>
             <a:noFill/>
           </a:ln>
@@ -5042,9 +5294,7 @@
           <a:p>
             <a:pPr algn="l">
               <a:defRPr sz="2200" b="1">
-                <a:solidFill>
-                  <a:srgbClr val="1A5C33"/>
-                </a:solidFill>
+                <a:solidFill>val="006847"/&gt;</a:solidFill>
               </a:defRPr>
             </a:pPr>
             <a:r>
@@ -5080,82 +5330,115 @@
                 <a:spcPts val="600"/>
               </a:spcAft>
               <a:defRPr sz="1400">
+                <a:solidFill>val="22344A"/&gt;</a:solidFill>
+              </a:defRPr>
+            </a:pPr>
+            <a:r>
+              <a:t>• En termes de savoir :- Maîtriser les fonctionnalités avancées de Word pour la rédaction d'un mémoire (styles, sections, tables automatisées)</a:t>
+            </a:r>
+            <a:br/>
+            <a:r>
+              <a:t>- Comprendre les normes typographiques académiques (page de garde institutionnelle, sommaire, bibliographie)</a:t>
+            </a:r>
+            <a:br/>
+            <a:r>
+              <a:t>- Connaître le processus de dépôt légal du mémoire (PDF/A, métadonnées)</a:t>
+            </a:r>
+          </a:p>
+          <a:p>
+            <a:pPr>
+              <a:spcAft>
+                <a:spcPts val="600"/>
+              </a:spcAft>
+              <a:defRPr sz="1400">
+                <a:solidFill>val="22344A"/&gt;</a:solidFill>
+              </a:defRPr>
+            </a:pPr>
+            <a:r>
+              <a:t>• En termes de savoir-faire :- Créer un document structuré avec styles, table des matières automatique, listes des figures et tableaux</a:t>
+            </a:r>
+            <a:br/>
+            <a:r>
+              <a:t>- Intégrer et formater des citations avec Zotero dans Word</a:t>
+            </a:r>
+            <a:br/>
+            <a:r>
+              <a:t>- Gérer des documents longs (sections, paginations multiples, numérotation des chapitres)</a:t>
+            </a:r>
+            <a:br/>
+            <a:r>
+              <a:t>- Exporter aux formats requis (DOCX, PDF/A) pour dépôt institutionnel</a:t>
+            </a:r>
+          </a:p>
+          <a:p>
+            <a:pPr>
+              <a:spcAft>
+                <a:spcPts val="600"/>
+              </a:spcAft>
+              <a:defRPr sz="1400">
+                <a:solidFill>val="22344A"/&gt;</a:solidFill>
+              </a:defRPr>
+            </a:pPr>
+            <a:r>
+              <a:t>• En termes de savoir-être :- Respecter les normes de rédaction académique (typographie, citation, bibliographie)</a:t>
+            </a:r>
+            <a:br/>
+            <a:r>
+              <a:t>- Adopter une méthodologie de rédaction rigoureuse et reproductible</a:t>
+            </a:r>
+          </a:p>
+          <a:p>
+            <a:pPr>
+              <a:spcAft>
+                <a:spcPts val="600"/>
+              </a:spcAft>
+              <a:defRPr sz="1400">
+                <a:solidFill>val="22344A"/&gt;</a:solidFill>
+              </a:defRPr>
+            </a:pPr>
+            <a:r>
+              <a:t>• Mode d'évaluation :TD 25 % + Projet « Structure complète d'un chapitre de mémoire » 35 % + QCM 20 % + Examen pratique 20 %</a:t>
+            </a:r>
+          </a:p>
+        </p:txBody>
+      </p:sp>
+      <p:sp>
+        <p:nvSpPr>
+          <p:cNvPr id="990001" name="Pied de page FLE"/>
+          <p:cNvSpPr>
+            <a:spLocks noGrp="1"/>
+          </p:cNvSpPr>
+          <p:nvPr/>
+        </p:nvSpPr>
+        <p:spPr>
+          <a:xfrm>
+            <a:off x="-228600" y="6400800"/>
+            <a:ext cx="109728" cy="274320"/>
+          </a:xfrm>
+          <a:prstGeom prst="rect">
+            <a:avLst/>
+          </a:prstGeom>
+        </p:spPr>
+        <p:txBody>
+          <a:bodyPr anchor="b"/>
+          <a:lstStyle/>
+          <a:p>
+            <a:pPr algn="r">
+              <a:defRPr sz="900">
                 <a:solidFill>
-                  <a:srgbClr val="222222"/>
+                  <a:srgbClr val="9AA7B6"/>
                 </a:solidFill>
-              </a:defRPr>
-            </a:pPr>
-            <a:r>
-              <a:t>• En termes de savoir :- Maîtriser les fonctionnalités avancées de Word pour la rédaction d'un mémoire (styles, sections, tables automatisées)</a:t>
-            </a:r>
-            <a:br/>
-            <a:r>
-              <a:t>- Comprendre les normes typographiques académiques (page de garde institutionnelle, sommaire, bibliographie)</a:t>
-            </a:r>
-            <a:br/>
-            <a:r>
-              <a:t>- Connaître le processus de dépôt légal du mémoire (PDF/A, métadonnées)</a:t>
-            </a:r>
-          </a:p>
-          <a:p>
-            <a:pPr>
-              <a:spcAft>
-                <a:spcPts val="600"/>
-              </a:spcAft>
-              <a:defRPr sz="1400">
+                <a:latin typeface="Poppins"/>
+              </a:defRPr>
+            </a:pPr>
+            <a:r>
+              <a:rPr lang="fr-FR" sz="900">
                 <a:solidFill>
-                  <a:srgbClr val="222222"/>
+                  <a:srgbClr val="9AA7B6"/>
                 </a:solidFill>
-              </a:defRPr>
-            </a:pPr>
-            <a:r>
-              <a:t>• En termes de savoir-faire :- Créer un document structuré avec styles, table des matières automatique, listes des figures et tableaux</a:t>
-            </a:r>
-            <a:br/>
-            <a:r>
-              <a:t>- Intégrer et formater des citations avec Zotero dans Word</a:t>
-            </a:r>
-            <a:br/>
-            <a:r>
-              <a:t>- Gérer des documents longs (sections, paginations multiples, numérotation des chapitres)</a:t>
-            </a:r>
-            <a:br/>
-            <a:r>
-              <a:t>- Exporter aux formats requis (DOCX, PDF/A) pour dépôt institutionnel</a:t>
-            </a:r>
-          </a:p>
-          <a:p>
-            <a:pPr>
-              <a:spcAft>
-                <a:spcPts val="600"/>
-              </a:spcAft>
-              <a:defRPr sz="1400">
-                <a:solidFill>
-                  <a:srgbClr val="222222"/>
-                </a:solidFill>
-              </a:defRPr>
-            </a:pPr>
-            <a:r>
-              <a:t>• En termes de savoir-être :- Respecter les normes de rédaction académique (typographie, citation, bibliographie)</a:t>
-            </a:r>
-            <a:br/>
-            <a:r>
-              <a:t>- Adopter une méthodologie de rédaction rigoureuse et reproductible</a:t>
-            </a:r>
-          </a:p>
-          <a:p>
-            <a:pPr>
-              <a:spcAft>
-                <a:spcPts val="600"/>
-              </a:spcAft>
-              <a:defRPr sz="1400">
-                <a:solidFill>
-                  <a:srgbClr val="222222"/>
-                </a:solidFill>
-              </a:defRPr>
-            </a:pPr>
-            <a:r>
-              <a:t>• Mode d'évaluation :TD 25 % + Projet « Structure complète d'un chapitre de mémoire » 35 % + QCM 20 % + Examen pratique 20 %</a:t>
+                <a:latin typeface="Poppins"/>
+              </a:rPr>
+              <a:t>Université de Mostaganem — Dr. Madani BELACEL</a:t>
             </a:r>
           </a:p>
         </p:txBody>
@@ -5173,9 +5456,7 @@
   <p:cSld>
     <p:bg>
       <p:bgPr>
-        <a:solidFill>
-          <a:srgbClr val="FFFFFF"/>
-        </a:solidFill>
+        <a:solidFill>val="FFFFFF"/&gt;</a:solidFill>
         <a:effectLst/>
       </p:bgPr>
     </p:bg>
@@ -5200,9 +5481,7 @@
           <a:prstGeom prst="rect">
             <a:avLst/>
           </a:prstGeom>
-          <a:solidFill>
-            <a:srgbClr val="2C6E49"/>
-          </a:solidFill>
+          <a:solidFill>val="00875B"/&gt;</a:solidFill>
           <a:ln>
             <a:noFill/>
           </a:ln>
@@ -5253,9 +5532,7 @@
           <a:p>
             <a:pPr algn="l">
               <a:defRPr sz="2200" b="1">
-                <a:solidFill>
-                  <a:srgbClr val="1A5C33"/>
-                </a:solidFill>
+                <a:solidFill>val="006847"/&gt;</a:solidFill>
               </a:defRPr>
             </a:pPr>
             <a:r>
@@ -5291,43 +5568,78 @@
                 <a:spcPts val="600"/>
               </a:spcAft>
               <a:defRPr sz="1400">
+                <a:solidFill>val="22344A"/&gt;</a:solidFill>
+              </a:defRPr>
+            </a:pPr>
+            <a:r>
+              <a:t>• Atelier : création d'un modèle de document Master (template .dotx) avec styles personnalisés</a:t>
+            </a:r>
+          </a:p>
+          <a:p>
+            <a:pPr>
+              <a:spcAft>
+                <a:spcPts val="600"/>
+              </a:spcAft>
+              <a:defRPr sz="1400">
+                <a:solidFill>val="22344A"/&gt;</a:solidFill>
+              </a:defRPr>
+            </a:pPr>
+            <a:r>
+              <a:t>• TP : intégration Zotero dans Word — citations et bibliographies</a:t>
+            </a:r>
+          </a:p>
+          <a:p>
+            <a:pPr>
+              <a:spcAft>
+                <a:spcPts val="600"/>
+              </a:spcAft>
+              <a:defRPr sz="1400">
+                <a:solidFill>val="22344A"/&gt;</a:solidFill>
+              </a:defRPr>
+            </a:pPr>
+            <a:r>
+              <a:t>• Exercice : rédaction d'un chapitre-type en suivant les normes (page de garde PG-fr, styles, TDM, bibliographie)</a:t>
+            </a:r>
+          </a:p>
+        </p:txBody>
+      </p:sp>
+      <p:sp>
+        <p:nvSpPr>
+          <p:cNvPr id="990001" name="Pied de page FLE"/>
+          <p:cNvSpPr>
+            <a:spLocks noGrp="1"/>
+          </p:cNvSpPr>
+          <p:nvPr/>
+        </p:nvSpPr>
+        <p:spPr>
+          <a:xfrm>
+            <a:off x="-228600" y="6400800"/>
+            <a:ext cx="109728" cy="274320"/>
+          </a:xfrm>
+          <a:prstGeom prst="rect">
+            <a:avLst/>
+          </a:prstGeom>
+        </p:spPr>
+        <p:txBody>
+          <a:bodyPr anchor="b"/>
+          <a:lstStyle/>
+          <a:p>
+            <a:pPr algn="r">
+              <a:defRPr sz="900">
                 <a:solidFill>
-                  <a:srgbClr val="222222"/>
+                  <a:srgbClr val="9AA7B6"/>
                 </a:solidFill>
-              </a:defRPr>
-            </a:pPr>
-            <a:r>
-              <a:t>• Atelier : création d'un modèle de document Master (template .dotx) avec styles personnalisés</a:t>
-            </a:r>
-          </a:p>
-          <a:p>
-            <a:pPr>
-              <a:spcAft>
-                <a:spcPts val="600"/>
-              </a:spcAft>
-              <a:defRPr sz="1400">
+                <a:latin typeface="Poppins"/>
+              </a:defRPr>
+            </a:pPr>
+            <a:r>
+              <a:rPr lang="fr-FR" sz="900">
                 <a:solidFill>
-                  <a:srgbClr val="222222"/>
+                  <a:srgbClr val="9AA7B6"/>
                 </a:solidFill>
-              </a:defRPr>
-            </a:pPr>
-            <a:r>
-              <a:t>• TP : intégration Zotero dans Word — citations et bibliographies</a:t>
-            </a:r>
-          </a:p>
-          <a:p>
-            <a:pPr>
-              <a:spcAft>
-                <a:spcPts val="600"/>
-              </a:spcAft>
-              <a:defRPr sz="1400">
-                <a:solidFill>
-                  <a:srgbClr val="222222"/>
-                </a:solidFill>
-              </a:defRPr>
-            </a:pPr>
-            <a:r>
-              <a:t>• Exercice : rédaction d'un chapitre-type en suivant les normes (page de garde PG-fr, styles, TDM, bibliographie)</a:t>
+                <a:latin typeface="Poppins"/>
+              </a:rPr>
+              <a:t>Université de Mostaganem — Dr. Madani BELACEL</a:t>
             </a:r>
           </a:p>
         </p:txBody>
@@ -5345,9 +5657,7 @@
   <p:cSld>
     <p:bg>
       <p:bgPr>
-        <a:solidFill>
-          <a:srgbClr val="FFFFFF"/>
-        </a:solidFill>
+        <a:solidFill>val="FFFFFF"/&gt;</a:solidFill>
         <a:effectLst/>
       </p:bgPr>
     </p:bg>
@@ -5372,9 +5682,7 @@
           <a:prstGeom prst="rect">
             <a:avLst/>
           </a:prstGeom>
-          <a:solidFill>
-            <a:srgbClr val="2C6E49"/>
-          </a:solidFill>
+          <a:solidFill>val="00875B"/&gt;</a:solidFill>
           <a:ln>
             <a:noFill/>
           </a:ln>
@@ -5425,9 +5733,7 @@
           <a:p>
             <a:pPr algn="l">
               <a:defRPr sz="2200" b="1">
-                <a:solidFill>
-                  <a:srgbClr val="1A5C33"/>
-                </a:solidFill>
+                <a:solidFill>val="006847"/&gt;</a:solidFill>
               </a:defRPr>
             </a:pPr>
             <a:r>
@@ -5463,28 +5769,65 @@
                 <a:spcPts val="600"/>
               </a:spcAft>
               <a:defRPr sz="1400">
+                <a:solidFill>val="22344A"/&gt;</a:solidFill>
+              </a:defRPr>
+            </a:pPr>
+            <a:r>
+              <a:t>• QCM styles, sections, tables automatiques, normes typographiques</a:t>
+            </a:r>
+          </a:p>
+          <a:p>
+            <a:pPr>
+              <a:spcAft>
+                <a:spcPts val="600"/>
+              </a:spcAft>
+              <a:defRPr sz="1400">
+                <a:solidFill>val="22344A"/&gt;</a:solidFill>
+              </a:defRPr>
+            </a:pPr>
+            <a:r>
+              <a:t>• TP noté : document Word structuré avec citations Zotero et bibliographie</a:t>
+            </a:r>
+          </a:p>
+        </p:txBody>
+      </p:sp>
+      <p:sp>
+        <p:nvSpPr>
+          <p:cNvPr id="990001" name="Pied de page FLE"/>
+          <p:cNvSpPr>
+            <a:spLocks noGrp="1"/>
+          </p:cNvSpPr>
+          <p:nvPr/>
+        </p:nvSpPr>
+        <p:spPr>
+          <a:xfrm>
+            <a:off x="-228600" y="6400800"/>
+            <a:ext cx="109728" cy="274320"/>
+          </a:xfrm>
+          <a:prstGeom prst="rect">
+            <a:avLst/>
+          </a:prstGeom>
+        </p:spPr>
+        <p:txBody>
+          <a:bodyPr anchor="b"/>
+          <a:lstStyle/>
+          <a:p>
+            <a:pPr algn="r">
+              <a:defRPr sz="900">
                 <a:solidFill>
-                  <a:srgbClr val="222222"/>
+                  <a:srgbClr val="9AA7B6"/>
                 </a:solidFill>
-              </a:defRPr>
-            </a:pPr>
-            <a:r>
-              <a:t>• QCM styles, sections, tables automatiques, normes typographiques</a:t>
-            </a:r>
-          </a:p>
-          <a:p>
-            <a:pPr>
-              <a:spcAft>
-                <a:spcPts val="600"/>
-              </a:spcAft>
-              <a:defRPr sz="1400">
+                <a:latin typeface="Poppins"/>
+              </a:defRPr>
+            </a:pPr>
+            <a:r>
+              <a:rPr lang="fr-FR" sz="900">
                 <a:solidFill>
-                  <a:srgbClr val="222222"/>
+                  <a:srgbClr val="9AA7B6"/>
                 </a:solidFill>
-              </a:defRPr>
-            </a:pPr>
-            <a:r>
-              <a:t>• TP noté : document Word structuré avec citations Zotero et bibliographie</a:t>
+                <a:latin typeface="Poppins"/>
+              </a:rPr>
+              <a:t>Université de Mostaganem — Dr. Madani BELACEL</a:t>
             </a:r>
           </a:p>
         </p:txBody>
@@ -5502,9 +5845,7 @@
   <p:cSld>
     <p:bg>
       <p:bgPr>
-        <a:solidFill>
-          <a:srgbClr val="FFFFFF"/>
-        </a:solidFill>
+        <a:solidFill>val="FFFFFF"/&gt;</a:solidFill>
         <a:effectLst/>
       </p:bgPr>
     </p:bg>
@@ -5529,9 +5870,7 @@
           <a:prstGeom prst="rect">
             <a:avLst/>
           </a:prstGeom>
-          <a:solidFill>
-            <a:srgbClr val="2C6E49"/>
-          </a:solidFill>
+          <a:solidFill>val="00875B"/&gt;</a:solidFill>
           <a:ln>
             <a:noFill/>
           </a:ln>
@@ -5582,9 +5921,7 @@
           <a:p>
             <a:pPr algn="l">
               <a:defRPr sz="2200" b="1">
-                <a:solidFill>
-                  <a:srgbClr val="1A5C33"/>
-                </a:solidFill>
+                <a:solidFill>val="006847"/&gt;</a:solidFill>
               </a:defRPr>
             </a:pPr>
             <a:r>
@@ -5620,88 +5957,117 @@
                 <a:spcPts val="600"/>
               </a:spcAft>
               <a:defRPr sz="1400">
+                <a:solidFill>val="22344A"/&gt;</a:solidFill>
+              </a:defRPr>
+            </a:pPr>
+            <a:r>
+              <a:t>• Template PG-fr.docx (page de garde institutionnelle Univ-Mosta)</a:t>
+            </a:r>
+          </a:p>
+          <a:p>
+            <a:pPr>
+              <a:spcAft>
+                <a:spcPts val="600"/>
+              </a:spcAft>
+              <a:defRPr sz="1400">
+                <a:solidFill>val="22344A"/&gt;</a:solidFill>
+              </a:defRPr>
+            </a:pPr>
+            <a:r>
+              <a:t>• Guide de rédaction du mémoire de Master — Université de Mostaganem</a:t>
+            </a:r>
+          </a:p>
+          <a:p>
+            <a:pPr>
+              <a:spcAft>
+                <a:spcPts val="600"/>
+              </a:spcAft>
+              <a:defRPr sz="1400">
+                <a:solidFill>val="22344A"/&gt;</a:solidFill>
+              </a:defRPr>
+            </a:pPr>
+            <a:r>
+              <a:t>• APA 7th — Publication Manual ; MLA Handbook 9th ed.</a:t>
+            </a:r>
+          </a:p>
+          <a:p>
+            <a:pPr>
+              <a:spcAft>
+                <a:spcPts val="600"/>
+              </a:spcAft>
+              <a:defRPr sz="1400">
+                <a:solidFill>val="22344A"/&gt;</a:solidFill>
+              </a:defRPr>
+            </a:pPr>
+            <a:r>
+              <a:t>• Eco, U. (1977).Come si fa una tesi di laurea. (trad.Comment écrire sa thèse)</a:t>
+            </a:r>
+          </a:p>
+          <a:p>
+            <a:pPr>
+              <a:spcAft>
+                <a:spcPts val="600"/>
+              </a:spcAft>
+              <a:defRPr sz="1400">
+                <a:solidFill>val="22344A"/&gt;</a:solidFill>
+              </a:defRPr>
+            </a:pPr>
+            <a:r>
+              <a:t>• Zotero — Guide d'utilisation avancée</a:t>
+            </a:r>
+          </a:p>
+          <a:p>
+            <a:pPr>
+              <a:spcAft>
+                <a:spcPts val="600"/>
+              </a:spcAft>
+              <a:defRPr sz="1400">
+                <a:solidFill>val="22344A"/&gt;</a:solidFill>
+              </a:defRPr>
+            </a:pPr>
+            <a:r>
+              <a:t>• Contact enseignant :BELACEL Madani —madani.belacel@univ-mosta.dz</a:t>
+            </a:r>
+          </a:p>
+        </p:txBody>
+      </p:sp>
+      <p:sp>
+        <p:nvSpPr>
+          <p:cNvPr id="990001" name="Pied de page FLE"/>
+          <p:cNvSpPr>
+            <a:spLocks noGrp="1"/>
+          </p:cNvSpPr>
+          <p:nvPr/>
+        </p:nvSpPr>
+        <p:spPr>
+          <a:xfrm>
+            <a:off x="-228600" y="6400800"/>
+            <a:ext cx="109728" cy="274320"/>
+          </a:xfrm>
+          <a:prstGeom prst="rect">
+            <a:avLst/>
+          </a:prstGeom>
+        </p:spPr>
+        <p:txBody>
+          <a:bodyPr anchor="b"/>
+          <a:lstStyle/>
+          <a:p>
+            <a:pPr algn="r">
+              <a:defRPr sz="900">
                 <a:solidFill>
-                  <a:srgbClr val="222222"/>
+                  <a:srgbClr val="9AA7B6"/>
                 </a:solidFill>
-              </a:defRPr>
-            </a:pPr>
-            <a:r>
-              <a:t>• Template PG-fr.docx (page de garde institutionnelle Univ-Mosta)</a:t>
-            </a:r>
-          </a:p>
-          <a:p>
-            <a:pPr>
-              <a:spcAft>
-                <a:spcPts val="600"/>
-              </a:spcAft>
-              <a:defRPr sz="1400">
+                <a:latin typeface="Poppins"/>
+              </a:defRPr>
+            </a:pPr>
+            <a:r>
+              <a:rPr lang="fr-FR" sz="900">
                 <a:solidFill>
-                  <a:srgbClr val="222222"/>
+                  <a:srgbClr val="9AA7B6"/>
                 </a:solidFill>
-              </a:defRPr>
-            </a:pPr>
-            <a:r>
-              <a:t>• Guide de rédaction du mémoire de Master — Université de Mostaganem</a:t>
-            </a:r>
-          </a:p>
-          <a:p>
-            <a:pPr>
-              <a:spcAft>
-                <a:spcPts val="600"/>
-              </a:spcAft>
-              <a:defRPr sz="1400">
-                <a:solidFill>
-                  <a:srgbClr val="222222"/>
-                </a:solidFill>
-              </a:defRPr>
-            </a:pPr>
-            <a:r>
-              <a:t>• APA 7th — Publication Manual ; MLA Handbook 9th ed.</a:t>
-            </a:r>
-          </a:p>
-          <a:p>
-            <a:pPr>
-              <a:spcAft>
-                <a:spcPts val="600"/>
-              </a:spcAft>
-              <a:defRPr sz="1400">
-                <a:solidFill>
-                  <a:srgbClr val="222222"/>
-                </a:solidFill>
-              </a:defRPr>
-            </a:pPr>
-            <a:r>
-              <a:t>• Eco, U. (1977).Come si fa una tesi di laurea. (trad.Comment écrire sa thèse)</a:t>
-            </a:r>
-          </a:p>
-          <a:p>
-            <a:pPr>
-              <a:spcAft>
-                <a:spcPts val="600"/>
-              </a:spcAft>
-              <a:defRPr sz="1400">
-                <a:solidFill>
-                  <a:srgbClr val="222222"/>
-                </a:solidFill>
-              </a:defRPr>
-            </a:pPr>
-            <a:r>
-              <a:t>• Zotero — Guide d'utilisation avancée</a:t>
-            </a:r>
-          </a:p>
-          <a:p>
-            <a:pPr>
-              <a:spcAft>
-                <a:spcPts val="600"/>
-              </a:spcAft>
-              <a:defRPr sz="1400">
-                <a:solidFill>
-                  <a:srgbClr val="222222"/>
-                </a:solidFill>
-              </a:defRPr>
-            </a:pPr>
-            <a:r>
-              <a:t>• Contact enseignant :BELACEL Madani —madani.belacel@univ-mosta.dz</a:t>
+                <a:latin typeface="Poppins"/>
+              </a:rPr>
+              <a:t>Université de Mostaganem — Dr. Madani BELACEL</a:t>
             </a:r>
           </a:p>
         </p:txBody>
@@ -5719,9 +6085,7 @@
   <p:cSld>
     <p:bg>
       <p:bgPr>
-        <a:solidFill>
-          <a:srgbClr val="FFFFFF"/>
-        </a:solidFill>
+        <a:solidFill>val="FFFFFF"/&gt;</a:solidFill>
         <a:effectLst/>
       </p:bgPr>
     </p:bg>
@@ -5746,9 +6110,7 @@
           <a:prstGeom prst="rect">
             <a:avLst/>
           </a:prstGeom>
-          <a:solidFill>
-            <a:srgbClr val="2C6E49"/>
-          </a:solidFill>
+          <a:solidFill>val="00875B"/&gt;</a:solidFill>
           <a:ln>
             <a:noFill/>
           </a:ln>
@@ -5799,9 +6161,7 @@
           <a:p>
             <a:pPr algn="l">
               <a:defRPr sz="2200" b="1">
-                <a:solidFill>
-                  <a:srgbClr val="1A5C33"/>
-                </a:solidFill>
+                <a:solidFill>val="006847"/&gt;</a:solidFill>
               </a:defRPr>
             </a:pPr>
             <a:r>
@@ -5837,59 +6197,94 @@
                 <a:spcPts val="600"/>
               </a:spcAft>
               <a:defRPr sz="1400">
+                <a:solidFill>val="22344A"/&gt;</a:solidFill>
+              </a:defRPr>
+            </a:pPr>
+            <a:r>
+              <a:t>• Décision n° 75du 31 mars 2021 relative au dépôt électronique des mémoires de Master : obligation de déposer le mémoire via la plateforme DLN (Dépôt Légal Numérique) au formatPDF/A. Ce format garantit la pérennité du document (polices embarquées, métadonnées, structure balisée).</a:t>
+            </a:r>
+          </a:p>
+          <a:p>
+            <a:pPr>
+              <a:spcAft>
+                <a:spcPts val="600"/>
+              </a:spcAft>
+              <a:defRPr sz="1400">
+                <a:solidFill>val="22344A"/&gt;</a:solidFill>
+              </a:defRPr>
+            </a:pPr>
+            <a:r>
+              <a:t>• Arrêté n° 933du 28 juillet 2016 : le mémoire de Master constitue un travail de recherche personnel dont la présentation formelle est évaluée. La maîtrise des outils de traitement de texte est une compétence méthodologique évaluée dans l'unité UEM 1.1.</a:t>
+            </a:r>
+          </a:p>
+          <a:p>
+            <a:pPr>
+              <a:spcAft>
+                <a:spcPts val="600"/>
+              </a:spcAft>
+              <a:defRPr sz="1400">
+                <a:solidFill>val="22344A"/&gt;</a:solidFill>
+              </a:defRPr>
+            </a:pPr>
+            <a:r>
+              <a:t>• Note ministérielle n° 133du 15 février 2022 : harmonisation des pages de garde des mémoires de Master. Tous les établissements algériens doivent utiliser une page de garde standardisée avec les éléments suivants :</a:t>
+            </a:r>
+            <a:br/>
+            <a:r>
+              <a:t>- Logo du ministère + logo de l'université</a:t>
+            </a:r>
+            <a:br/>
+            <a:r>
+              <a:t>- Intitulé du master et de la spécialité</a:t>
+            </a:r>
+            <a:br/>
+            <a:r>
+              <a:t>- Titre du mémoire, nom du candidat et du directeur</a:t>
+            </a:r>
+            <a:br/>
+            <a:r>
+              <a:t>- Année universitaire</a:t>
+            </a:r>
+          </a:p>
+        </p:txBody>
+      </p:sp>
+      <p:sp>
+        <p:nvSpPr>
+          <p:cNvPr id="990001" name="Pied de page FLE"/>
+          <p:cNvSpPr>
+            <a:spLocks noGrp="1"/>
+          </p:cNvSpPr>
+          <p:nvPr/>
+        </p:nvSpPr>
+        <p:spPr>
+          <a:xfrm>
+            <a:off x="-228600" y="6400800"/>
+            <a:ext cx="109728" cy="274320"/>
+          </a:xfrm>
+          <a:prstGeom prst="rect">
+            <a:avLst/>
+          </a:prstGeom>
+        </p:spPr>
+        <p:txBody>
+          <a:bodyPr anchor="b"/>
+          <a:lstStyle/>
+          <a:p>
+            <a:pPr algn="r">
+              <a:defRPr sz="900">
                 <a:solidFill>
-                  <a:srgbClr val="222222"/>
+                  <a:srgbClr val="9AA7B6"/>
                 </a:solidFill>
-              </a:defRPr>
-            </a:pPr>
-            <a:r>
-              <a:t>• Décision n° 75du 31 mars 2021 relative au dépôt électronique des mémoires de Master : obligation de déposer le mémoire via la plateforme DLN (Dépôt Légal Numérique) au formatPDF/A. Ce format garantit la pérennité du document (polices embarquées, métadonnées, structure balisée).</a:t>
-            </a:r>
-          </a:p>
-          <a:p>
-            <a:pPr>
-              <a:spcAft>
-                <a:spcPts val="600"/>
-              </a:spcAft>
-              <a:defRPr sz="1400">
+                <a:latin typeface="Poppins"/>
+              </a:defRPr>
+            </a:pPr>
+            <a:r>
+              <a:rPr lang="fr-FR" sz="900">
                 <a:solidFill>
-                  <a:srgbClr val="222222"/>
+                  <a:srgbClr val="9AA7B6"/>
                 </a:solidFill>
-              </a:defRPr>
-            </a:pPr>
-            <a:r>
-              <a:t>• Arrêté n° 933du 28 juillet 2016 : le mémoire de Master constitue un travail de recherche personnel dont la présentation formelle est évaluée. La maîtrise des outils de traitement de texte est une compétence méthodologique évaluée dans l'unité UEM 1.1.</a:t>
-            </a:r>
-          </a:p>
-          <a:p>
-            <a:pPr>
-              <a:spcAft>
-                <a:spcPts val="600"/>
-              </a:spcAft>
-              <a:defRPr sz="1400">
-                <a:solidFill>
-                  <a:srgbClr val="222222"/>
-                </a:solidFill>
-              </a:defRPr>
-            </a:pPr>
-            <a:r>
-              <a:t>• Note ministérielle n° 133du 15 février 2022 : harmonisation des pages de garde des mémoires de Master. Tous les établissements algériens doivent utiliser une page de garde standardisée avec les éléments suivants :</a:t>
-            </a:r>
-            <a:br/>
-            <a:r>
-              <a:t>- Logo du ministère + logo de l'université</a:t>
-            </a:r>
-            <a:br/>
-            <a:r>
-              <a:t>- Intitulé du master et de la spécialité</a:t>
-            </a:r>
-            <a:br/>
-            <a:r>
-              <a:t>- Titre du mémoire, nom du candidat et du directeur</a:t>
-            </a:r>
-            <a:br/>
-            <a:r>
-              <a:t>- Année universitaire</a:t>
+                <a:latin typeface="Poppins"/>
+              </a:rPr>
+              <a:t>Université de Mostaganem — Dr. Madani BELACEL</a:t>
             </a:r>
           </a:p>
         </p:txBody>
@@ -5945,7 +6340,7 @@
     </a:clrScheme>
     <a:fontScheme name="Office">
       <a:majorFont>
-        <a:latin typeface="Calibri"/>
+        <a:latin typeface="Poppins"/>
         <a:ea typeface=""/>
         <a:cs typeface=""/>
         <a:font script="Jpan" typeface="ＭＳ Ｐゴシック"/>
@@ -5980,7 +6375,7 @@
         <a:font script="Geor" typeface="Sylfaen"/>
       </a:majorFont>
       <a:minorFont>
-        <a:latin typeface="Calibri"/>
+        <a:latin typeface="Poppins"/>
         <a:ea typeface=""/>
         <a:cs typeface=""/>
         <a:font script="Jpan" typeface="ＭＳ Ｐゴシック"/>
